--- a/slides/DevOps-PlatformEngineering-Day2.pptx
+++ b/slides/DevOps-PlatformEngineering-Day2.pptx
@@ -35,6 +35,14 @@
     <p:sldId id="283" r:id="rId35"/>
     <p:sldId id="284" r:id="rId36"/>
     <p:sldId id="285" r:id="rId37"/>
+    <p:sldId id="286" r:id="rId38"/>
+    <p:sldId id="287" r:id="rId39"/>
+    <p:sldId id="288" r:id="rId40"/>
+    <p:sldId id="289" r:id="rId41"/>
+    <p:sldId id="290" r:id="rId42"/>
+    <p:sldId id="291" r:id="rId43"/>
+    <p:sldId id="292" r:id="rId44"/>
+    <p:sldId id="293" r:id="rId45"/>
   </p:sldIdLst>
   <p:sldSz cx="9144000" cy="6858000" type="screen4x3"/>
   <p:notesSz cx="6858000" cy="9144000"/>
@@ -531,7 +539,7 @@
           <a:lstStyle/>
           <a:p>
             <a:r>
-              <a:t>Welcome participants. Explain that slides include detailed notes that also serve as the participant reference. Encourage questions and note-taking.</a:t>
+              <a:t>Welcome participants. These decks are shared with participants after the course; the speaker notes double as the written reference, so read them when reviewing. Modules 1-9 are theory with small demos; the three workshops and the capstone are the hands-on core.</a:t>
             </a:r>
           </a:p>
         </p:txBody>
@@ -601,7 +609,7 @@
           <a:lstStyle/>
           <a:p>
             <a:r>
-              <a:t>Shifting left does not mean dumping security tools on developers without support. Platform teams should integrate scanners into pipelines and offer remediation guidance.</a:t>
+              <a:t>Five objects cover Workshop 2 completely. Pods are mortal - never hand-create them; they die and are replaced, and their IPs change, which is WHY Services exist. Deployments are what you actually write: replicas + pod template; kubectl set image triggers a rolling update (new ReplicaSet scaled up as old scales down, gated by readiness probes), and kubectl rollout undo is the one-command rollback - participants run both and watch build_id change and change back via /health. Services solve discovery: a stable DNS name (payment-service) and virtual IP, load-balancing across whatever pods currently match the label selector - the Compose DNS idea, made dynamic; label selectors are the glue, and a selector/label mismatch is the classic 'why is my service empty' bug (it is in the workshop's troubleshooting table). ConfigMaps/Secrets inject environment per-cluster while the image stays identical - our app-config supplies APP_ENV=kubernetes, and /health proves it. Probes: readiness gates traffic, liveness triggers restart - configure them differently or a slow startup becomes a restart loop. Requests/limits: requests inform scheduling, limits enforce via cgroups; both are set in our manifests and both are what Module 7's config scanner checks for.</a:t>
             </a:r>
           </a:p>
         </p:txBody>
@@ -671,7 +679,7 @@
           <a:lstStyle/>
           <a:p>
             <a:r>
-              <a:t>Trace each stage. Emphasise that 'Operate' includes runtime threat detection and vulnerability management.</a:t>
+              <a:t>Close the module by sketching the horizon honestly - name what exists, what it costs, and who should own it. Horizontal Pod Autoscaler scales replicas on CPU or custom metrics (a direct payoff of Module 8's metrics work); the cluster autoscaler adds nodes when pods cannot schedule; note the interplay - HPA without cluster autoscaling hits a ceiling. Service meshes inject a proxy sidecar next to every pod and centralise mTLS between services, retries/timeouts, and percentage traffic-splitting (the canary mechanics from Module 5) - real capabilities with real operational cost; the honest guidance is to adopt a mesh when you need at least two of its features, not because a diagram looked good. GitOps (from Module 3) matures deployment at scale: clusters converge on declarative repos, so 'what is running in production' has a Git answer and manual drift self-corrects. Multi-cluster is usually about blast radius and data residency before raw scale. The last bullet is the module's platform thread: none of these decisions should be made twenty times by twenty teams - the platform decides once, encodes it in the golden path, and product teams inherit scale-readiness. Workshop 2 is next: build the image, compose the stack, deploy to kind, scale it, roll it, roll it back.</a:t>
             </a:r>
           </a:p>
         </p:txBody>
@@ -741,7 +749,7 @@
           <a:lstStyle/>
           <a:p>
             <a:r>
-              <a:t>Compliance as code turns audit cycles from panic events into everyday assurance. Demonstrate that policy can reject a deployment before it reaches production.</a:t>
+              <a:t>45 minutes theory + a 10-minute basic demo (Trivy scan + one Conftest policy). Goal: shift-left economics, the scanner taxonomy, supply-chain awareness, policy as code, and triage discipline - security as a platform default, not a checkpoint.</a:t>
             </a:r>
           </a:p>
         </p:txBody>
@@ -811,7 +819,7 @@
           <a:lstStyle/>
           <a:p>
             <a:r>
-              <a:t>These practices become platform defaults: every team inherits them by using the golden path, but can still opt out with documented justification.</a:t>
+              <a:t>DevSecOps in one curve: a vulnerable dependency caught at commit time is a one-line bump chosen calmly; the same flaw found in production is an incident - emergency patching across a fleet, forensics on whether it was exploited, possibly disclosure. The traditional model (a security review before release) failed for a structural reason participants now understand from Module 5: it put a slow, manual, low-context checkpoint at the END of a fast pipeline - so security became the department of 'no', teams routed around it, and reviews happened too late to change designs anyway. Shift-left redistributes security along the whole lifecycle as fast, automated feedback: threat modelling at design ('what can go wrong here?' asked in planning - even 15 informal minutes pays), secret and dependency scanning at commit, image and IaC scanning at build, policy checks at deploy, and hardened defaults at runtime. Note what shift-left does NOT mean: it does not abolish security specialists - it changes their job from gatekeeping every release to building guardrails and platform defaults (curating rules, tuning gates, handling escalations), which scales in a way manual review never can. Every stage on this diagram maps to something concrete participants touch today.</a:t>
             </a:r>
           </a:p>
         </p:txBody>
@@ -881,7 +889,7 @@
           <a:lstStyle/>
           <a:p>
             <a:r>
-              <a:t>Reliability is not about zero incidents; it is about understanding and controlling systems well enough to recover quickly.</a:t>
+              <a:t>Give participants the map so vendor noise cannot confuse them: each scanner class answers a different question at a different pipeline stage, and a mature setup layers several - they overlap little. SAST parses your first-party code for dangerous patterns; its curse is false-positive volume, so tune rulesets or teams learn to ignore it. SCA (software composition analysis) is where modern risk concentrates, because a typical service is overwhelmingly third-party code by volume - Log4Shell was an SCA problem, present in thousands of codebases that had written no vulnerable line themselves. Secret scanning runs twice: as a pre-commit/PR check (cheap prevention) and continuously over history, because a secret once pushed lives in Git history forever - the remediation is ROTATION, never just deletion; our demo plants a fake AWS key and watches Trivy catch it. Image scanning inspects the built artifact - base-image OS packages plus language dependencies - which is why slim bases (Module 6) directly shrink findings. IaC scanning catches the cloud-breach classics (public buckets, missing encryption, permissive roles, no resource limits) before anything exists; participants scan the course's own Terraform and manifests. DAST probes the running application from outside, catching what only manifests at runtime (auth flows, headers, injections through the real stack) - slower, so staging on a schedule rather than every commit.</a:t>
             </a:r>
           </a:p>
         </p:txBody>
@@ -951,7 +959,7 @@
           <a:lstStyle/>
           <a:p>
             <a:r>
-              <a:t>Define each pillar. Metrics show trends, logs show details, traces show causality across services. The real value is asking new questions without deploying new code.</a:t>
+              <a:t>Supply chain attacks target the factory rather than the product, and they scale terrifyingly: compromise one build system or one popular package and you compromise every downstream consumer at once. SolarWinds (2020) is the canonical case - attackers modified the vendor's build process so signed, official updates carried the implant to ~18,000 organisations. The dependency-level versions arrive constantly: typosquatted packages, maintainer-account takeovers, malicious updates to abandoned libraries. Walk the attack surface as a checklist of what participants' own pipelines contain: third-party dependencies (SCA scanning), base images (pin them; prefer minimal), CI actions (our @master-vs-pinned-version lesson from Module 5 - an upstream compromise of an unpinned action runs with your repo's token immediately), registries (who can push to the image your cluster pulls?), and the build system itself. SBOMs (SPDX/CycloneDX formats) answer the Log4Shell-day question - 'which of our 400 services contains this library?' - in minutes instead of weeks, and are increasingly demanded contractually and by regulation (US EO 14028, EU CRA). Signing (Sigstore/cosign) plus admission-time verification closes the loop: only artifacts provably built by YOUR pipeline run in production. SLSA gives the maturity vocabulary; most organisations should first reach 'builds are scripted, provenance exists, tokens are least-privilege' before chasing higher levels.</a:t>
             </a:r>
           </a:p>
         </p:txBody>
@@ -1021,7 +1029,7 @@
           <a:lstStyle/>
           <a:p>
             <a:r>
-              <a:t>Reliability engineering asks: 'How reliable does this need to be for our users, and what are we willing to pay for that reliability?'</a:t>
+              <a:t>Compliance as code closes the gap between what the standards document says and what production does. The traditional cycle - write a standard, hope, audit annually, discover drift, remediate in a panic - fails because enforcement is manual and sampling is sparse. Encoding the rule makes enforcement continuous and total: every deployment must carry an owner label, no container may run as root, no image may use :latest - each becomes a policy evaluated automatically on every single change, and the standards document stops being fiction. OPA (Open Policy Agent, a CNCF-graduated engine) with its Rego language is the common denominator: the same policy skills apply to Kubernetes manifests, Terraform plans, CI pipelines and even application authorisation. Enforcement lives at two doors: Conftest in the pipeline (shift-left - developers get policy feedback at PR time, cheap to fix) and admission controllers in the cluster (Gatekeeper/Kyverno - nothing enters the API server unchecked, catching whatever bypassed CI). The render-time subtlety is today's demo punchline: our raw manifests FAIL the required-label policy while the Kustomize-rendered output PASSES, because labels are stamped at render time - so policies must test what actually ships. The audit story lands especially well with anyone who has suffered an audit: evidence stops being screenshots and interviews and becomes the policy file, its Git history, and pipeline logs showing every evaluation.</a:t>
             </a:r>
           </a:p>
         </p:txBody>
@@ -1091,7 +1099,7 @@
           <a:lstStyle/>
           <a:p>
             <a:r>
-              <a:t>Stress that mitigation can be a rollback or feature-flag disable; resolution fixes the root cause. Postmortems are learning opportunities, not blame sessions.</a:t>
+              <a:t>Runtime hardening is defence in depth for the day the earlier layers miss something. Container level - and every item here is LIVE in the course manifests, so open deployment-order.yaml and point: runAsNonRoot (an escaped attacker lands unprivileged), readOnlyRootFilesystem (nothing can be written or planted - our own app runs happily under it, proving well-built services tolerate hardening), capabilities drop ALL (Linux root is a bundle of distinct powers; drop everything not needed), seccompProfile RuntimeDefault (filters the kernel syscall surface - the shared-kernel risk from Module 6, mitigated). Cluster level: RBAC on the API server is the security boundary that matters most - least-privilege service accounts, no default-namespace sprawl, and audit any cluster-admin binding; NetworkPolicies turn the flat pod network into default-deny with explicit allowed flows (our order-&gt;payment call would be an explicit rule). Secrets deserve their own breath: base64 in a manifest is encoding, not encryption - real setups use a manager with rotation, injected via CSI or external-secrets operators. The final bullet is the module's thesis and the platform thread again: none of this should be twenty teams' homework - the golden path's templates ship hardened, so the secure configuration is the DEFAULT configuration, and teams opt out with justification rather than opting in with expertise. BASIC DEMO (10 min, theory-demos.md): trivy image on the course's own image, then the raw-vs-rendered Conftest comparison.</a:t>
             </a:r>
           </a:p>
         </p:txBody>
@@ -1161,7 +1169,7 @@
           <a:lstStyle/>
           <a:p>
             <a:r>
-              <a:t>If the culture punishes people for incidents, information will be hidden and learning will stop. Safety is the prerequisite for improvement.</a:t>
+              <a:t>The first real scan of any mature image returns dozens of findings, and the untrained reactions - panic, or numb dismissal - are equally wrong; triage is the professional skill, and it is teachable in one slide. CVSS scores measure theoretical severity in a vacuum; RISK is severity multiplied by context: a critical RCE in an internal batch tool behind a VPN is a different animal from a medium-severity flaw in your internet-facing auth service. The triage tree: Is a fixed version released? - upgrade, usually a one-line change caught at ideal cost (the shift-left curve). No fix yet? - assess reachability: is the vulnerable function even invoked in your usage? Vendor advisories and reachability analysis help; often the honest answer is 'not exploitable in our configuration', which is an ACCEPTANCE decision - and acceptances get an owner and an expiry date, because 'ignore forever' files rot into blindness. This is exactly why the Workshop 1 gate uses --ignore-unfixed on criticals: a gate must only block what someone can action today, or it gets bypassed and takes the team's respect for red builds with it (Module 5's lesson, applied). Finally, zoom out: individual findings matter less than the TREND of vulnerability debt - a platform that auto-bumps base images weekly beats any amount of heroic patching.</a:t>
             </a:r>
           </a:p>
         </p:txBody>
@@ -1231,7 +1239,7 @@
           <a:lstStyle/>
           <a:p>
             <a:r>
-              <a:t>Game days convert incident response from theory into muscle memory. In the lab version the saboteur stops or pauses the payment container; responders must notice the symptom (orders report payment unavailable), localise it via Prometheus targets and rates, confirm with logs, recover, and write a 5-line postmortem. Emphasise the discipline of using only the telemetry: if the tools cannot answer the question in the lab, they will not answer it at 3 a.m. either.</a:t>
+              <a:t>Bridge to Module 8: hardening reduces the odds of failure; observability is how you find out anyway - because something always gets through.</a:t>
             </a:r>
           </a:p>
         </p:txBody>
@@ -1301,7 +1309,7 @@
           <a:lstStyle/>
           <a:p>
             <a:r>
-              <a:t>Day 2 is hands-on. Start with concepts, then move into Docker, Compose and Kubernetes labs. Keep slides concise enough to leave time for labs.</a:t>
+              <a:t>75 minutes theory; Workshop 2 (mid-morning) is the big hands-on: build, compose and deploy the microservice to Kubernetes. Theory goal: when microservices are worth their cost, what containers actually are, and the Kubernetes mental model.</a:t>
             </a:r>
           </a:p>
         </p:txBody>
@@ -1371,7 +1379,7 @@
           <a:lstStyle/>
           <a:p>
             <a:r>
-              <a:t>This module brings together culture and platform thinking. A platform is only valuable if developers choose to use it.</a:t>
+              <a:t>45 minutes theory + a 15-minute basic demo (Prometheus + Grafana on localhost, then a mini incident). Goal: pillars with real depth, SLI/SLO/error budgets, alerting that respects humans, and reliability patterns - measurement in service of learning.</a:t>
             </a:r>
           </a:p>
         </p:txBody>
@@ -1441,7 +1449,7 @@
           <a:lstStyle/>
           <a:p>
             <a:r>
-              <a:t>The platform team treats internal developers as customers. Capabilities are productised: documentation, APIs, CLI, templates and support.</a:t>
+              <a:t>The distinction is practical, not pedantic. Monitoring is a set of questions you wrote down in advance - is the disk full, is the process up, is latency under 500ms - and it is necessary but bounded by your imagination at dashboard-design time. In a distributed system (Module 6's world), the failures that hurt are EMERGENT: a retry storm amplifying a slow dependency, one customer's pathological request pattern, a cache stampede after a deploy - none of which had a pre-built dashboard. Observability (the term borrowed from control theory: inferring internal state from outputs) is the property of emitting telemetry rich enough to answer questions you formulate DURING the incident: metrics with meaningful labels (endpoint, status, customer-tier), structured logs with correlation IDs, traces stitching a request across services. The litmus test on the slide is worth reading aloud twice - if answering a novel question requires adding instrumentation and redeploying, you have monitoring; if you can slice existing telemetry ad hoc, you have observability. High-cardinality labels are what make slicing possible, and also what makes naive metric systems explode - a real design tension to name honestly (metrics for aggregates, logs/traces for high-cardinality detail).</a:t>
             </a:r>
           </a:p>
         </p:txBody>
@@ -1511,7 +1519,7 @@
           <a:lstStyle/>
           <a:p>
             <a:r>
-              <a:t>Platform adoption is voluntary in practice. If the platform is harder than the alternative, teams will bypass it.</a:t>
+              <a:t>Give each pillar its engineering personality, because they are complements, not alternatives. METRICS are cheap aggregates over time - counters and histograms whose cost is independent of traffic volume - perfect for dashboards, alerts and SLOs; our app's middleware counts every request into order_requests_total with method/endpoint/status labels and times it into a histogram; two method points worth teaching: RED (Rate, Errors, Duration) is the request-service checklist, USE (Utilisation, Saturation, Errors) the resource-level one - and averages LIE, which is why histograms exist: mean latency of 50ms is compatible with a p99 of 4 seconds, and your unluckiest users live in the tail, so we quantile from histogram buckets (participants build the p95 panel in the demo). LOGS are discrete events with unbounded detail - the place for stack traces and request context; structure them (JSON) and carry correlation IDs so one request's story is greppable across services; they answer 'what exactly happened at 14:32'. TRACES follow ONE request across service boundaries - spans with timing per hop - answering 'WHERE in the chain did the time or error come from'; OpenTelemetry is the vendor-neutral standard worth naming (one instrumentation, any backend). Workflow in practice: a metric alert says SOMETHING is wrong, traces localise WHERE, logs explain WHY - the demo walks exactly this path.</a:t>
             </a:r>
           </a:p>
         </p:txBody>
@@ -1581,7 +1589,7 @@
           <a:lstStyle/>
           <a:p>
             <a:r>
-              <a:t>ROI conversations are essential for platform funding. Combine hard metrics with qualitative stories of teams shipping faster or sleeping through incidents.</a:t>
+              <a:t>This is SRE's crown jewel: it converts 'how reliable should we be?' from an emotional argument into an engineering budget. SLIs must measure USER experience, not machinery - 'successful responses to real requests' beats 'CPU below 80%' (users do not experience your CPU); choose 2-3 per service, typically availability and latency. Two subtleties participants hit in the course material: exclude health-check traffic from the SLI (it is high-volume and almost always succeeds, so it dilutes real user pain - our slo.md does this deliberately and says why), and measure at the point closest to the user you can. SLOs are internal targets with explicit windows; SLAs are contracts with lawyers and penalties, set LOOSER than the SLO so you breach internally before you breach contractually. The error budget reframes everything: a 99% monthly SLO GRANTS ~7.2 hours of failure - reliability stops being 'as much as possible' and becomes a resource to SPEND on velocity (deploys, experiments, migrations). The policy must be agreed BEFORE it is needed: budget healthy means ship; budget exhausted means feature work yields to reliability work - agreed in calm, enforced without a fight in crisis. The last bullet defuses the 100% instinct: each extra nine multiplies cost (redundancy, complexity, on-call) while user-perceived value flattens - your mobile user's network is less reliable than your 99.9% anyway. Ask the room what THEIR services' unwritten SLO currently is; the silence is the lesson.</a:t>
             </a:r>
           </a:p>
         </p:txBody>
@@ -1651,7 +1659,7 @@
           <a:lstStyle/>
           <a:p>
             <a:r>
-              <a:t>The final module is the capstone. Participants tie together everything from both days into one end-to-end deployment.</a:t>
+              <a:t>Alerting is where observability meets human factors, and most organisations get it wrong in the direction of MORE. The symptom/cause split: page a human when users are hurting (error rate up, latency exploding) because that always deserves urgency; causes that are not yet symptoms (a disk filling over days, a certificate expiring next week) become tickets - urgent-but-async work. Naive threshold alerts ('availability below 95% for 5 minutes') fail in both directions: too slow for a total outage, too twitchy for a brief blip that self-heals. Burn-RATE alerting fixes this by asking 'how fast is the error budget being consumed?': a fast-burn rule (e.g. burning at 14x budget rate over 1 hour AND 5 minutes - the two windows suppress flapping) pages because the monthly budget dies in days; a slow-burn rule (3x over 24 hours) tickets because there is time to think. Our slo.md contains these exact rules with the arithmetic worked out - point participants at it. The 'actionable, urgent, novel' test kills most existing alerts on contact, and that is the point: alert fatigue is not an annoyance but a SAFETY failure - the on-call who silences their tenth false page tonight is the one who sleeps through the real one; Module 2's psychological safety applies to machines paging humans, too. Runbook links and a standing rule that every false page produces a tuning change keep the alert set trustworthy over time.</a:t>
             </a:r>
           </a:p>
         </p:txBody>
@@ -1721,7 +1729,7 @@
           <a:lstStyle/>
           <a:p>
             <a:r>
-              <a:t>Remind participants that the capstone is not about finishing first; it is about seeing how the pieces fit together. Encourage pairing.</a:t>
+              <a:t>Reliability is designed, not hoped for - and every pattern here is visible in the course's tiny app, which is the teaching trick: point at labs/app/main.py on screen. Timeouts: our payment call carries timeout=2.0 - without it, a hung dependency consumes order-service threads until IT dies too, which is how failures cascade upward. Retries help with transient blips but are dangerous at scale: a thousand clients retrying immediately is a self-inflicted DDoS on a recovering service - hence exponential backoff with JITTER (randomisation so retries do not synchronise into waves), and retry budgets to cap amplification. Circuit breakers formalise 'stop asking': after N failures the breaker opens and calls fail fast without touching the sick dependency, then a half-open probe tests recovery - protecting both caller (no wasted waits) and callee (breathing room). Graceful degradation is the design PHILOSOPHY the mechanisms serve: decide per feature what reduced service looks like - our order service accepts the order with payment status 'unavailable' rather than erroring, a product decision (accept-and-reconcile vs reject) that engineering alone cannot make; participants watched this behaviour in Lab 00 without the payment service and will trigger it deliberately in the incident demo. The last bullet reframes the goal with DORA's stability metrics: since failure is inevitable, RECOVERY TIME is often the better investment than ever-more prevention - which is why rollback practice (Workshop 2) matters as much as tests.</a:t>
             </a:r>
           </a:p>
         </p:txBody>
@@ -1791,7 +1799,7 @@
           <a:lstStyle/>
           <a:p>
             <a:r>
-              <a:t>This scenario mirrors real platform engineering work: building paved roads that abstract complexity while preserving safety.</a:t>
+              <a:t>Walk the ring with emphasis on the two clocks and the learning half. MTTD (detection) is bought with Module 8's alerting - the gap between 'users hurting' and 'we know' should be minutes, not a customer email later. Triage assigns severity and a clear incident-commander role (someone coordinates, others investigate - structure beats heroics). MITIGATE before you understand: stop the bleeding with rollback, failover or a flag flip - root cause can wait; this ordering feels wrong to engineers who want to understand first, and is right anyway. Resolve fixes the cause properly. Then the half most organisations skip: the blameless POSTMORTEM (Module 2's practice, now in context) and REMEDIATE - action items shipped as real backlog work, closing the loop back to 'detect' with better alerts, runbooks and guards. This is the Third Way from Module 1: incidents as the system teaching you about itself. BASIC DEMO NOW (15 min, theory-demos.md): bring up the observability stack on localhost, generate traffic, see the dashboard - then the instructor quietly stops the payment container; the room notices via payment status flipping to 'unavailable' and the Prometheus target going down, localises it, restarts it, watches recovery, and writes a 5-line postmortem together. One full lifecycle lap, at lab scale, on localhost. Game days (rehearsed versions of exactly this) are the habit to take home.</a:t>
             </a:r>
           </a:p>
         </p:txBody>
@@ -1861,7 +1869,7 @@
           <a:lstStyle/>
           <a:p>
             <a:r>
-              <a:t>Close the course deliberately: recap what was built, hand participants a learning roadmap, and make the first week back at work concrete.</a:t>
+              <a:t>45 minutes theory + the platform canvas exercise (25 min, instructor/platform-canvas.md). This module converts the whole course's platform thread into product discipline: users, golden paths, metrics, ROI - and what to deliberately NOT build.</a:t>
             </a:r>
           </a:p>
         </p:txBody>
@@ -1931,7 +1939,7 @@
           <a:lstStyle/>
           <a:p>
             <a:r>
-              <a:t>Walk the list slowly - this is the payoff slide. Every item ran on the participant's own VM and every artifact is in the course repository they keep. Invite one or two participants to say which lab changed how they think about their current work.</a:t>
+              <a:t>Anchor the module: an Internal Developer Platform is the productised sum of everything this course covered - templates, pipelines, runtime, IaC modules, security gates, observability - behind a self-service interface, so stream-aligned teams consume capabilities instead of building them. The product framing is the load-bearing idea: a platform has USERS (your developers), COMPETITORS (do-it-yourself, shadow IT, that one team that loves its own Jenkins), and it lives or dies by voluntary ADOPTION. The moment a platform must be mandated, it has failed as a product - mandates breed resentful compliance and workarounds; attraction breeds pull. Contrast the two failure modes participants have likely met: the rebranded ops team (a ticket queue with a new name - no self-service, no product thinking, just the old bottleneck) and the ivory-tower platform (built in isolation for a year, launched to users who never asked for it - Field of Dreams engineering). The healthy pattern, via Team Topologies' interaction modes from Module 2: COLLABORATE with two or three pilot teams to discover what is actually painful, productise that into X-as-a-Service, repeat. Cognitive load (Module 1) is the value proposition throughout: every capability the platform absorbs is capacity returned to product teams for their actual domain.</a:t>
             </a:r>
           </a:p>
         </p:txBody>
@@ -2001,7 +2009,7 @@
           <a:lstStyle/>
           <a:p>
             <a:r>
-              <a:t>Participants keep the slides, the labs and the sample application - everything reruns on any Ubuntu 24.04 machine via lab-setup/install-ubuntu24.sh. Encourage them to re-run the capstone from scratch within two weeks; retention comes from the second unaided repetition.</a:t>
+              <a:t>Treat developers with the same UX seriousness a product team gives customers - it feels strange the first time and pays immediately. Discovery: interview teams about their path to production and map the journey (idea -&gt; repo -&gt; pipeline -&gt; deploy -&gt; observe); every wait, ticket and confusion point is a product opportunity - Module 1's cognitive-load pains, now itemised. Time-to-first-deploy is the flagship metric because it compresses the whole experience into one number a CTO understands: from 'new team formed' to 'hello-world serving in production' - weeks in ticket-driven organisations, minutes on a good platform (our capstone's golden path is a working miniature: template + pipeline + runtime, and participants time it). Documentation as interface is literal: for most consumers the platform IS its docs and templates - a capable platform with poor docs is, from the user's chair, a poor platform; invest accordingly (quickstarts over reference dumps, tested copy-paste examples, error messages that say what to DO next). Golden paths, Spotify's coinage: the blessed path is supported, maintained and delightful, but not a cage - teams can step off it, accepting they then own what they leave behind; escape hatches prevent the mandate failure mode. TVP (Team Topologies): start with the smallest platform that helps - maybe one great template and one pipeline - and let real demand pull the roadmap; platforms built big-bang from imagined requirements join the ivory-tower graveyard.</a:t>
             </a:r>
           </a:p>
         </p:txBody>
@@ -2071,7 +2079,7 @@
           <a:lstStyle/>
           <a:p>
             <a:r>
-              <a:t>Avoid 'microservices are always better'. They solve organisational scaling problems as much as technical ones.</a:t>
+              <a:t>Frame this as a genuine trade-off, not an upgrade path. A monolith is ONE deployable: simple to run, debug and test locally; transactions are easy; refactoring across the whole domain is an IDE operation. Its costs arrive with scale - of teams more than of traffic: every change redeploys everything, teams queue on one release train, one memory leak takes down all functionality, and technology choices are global. Microservices invert the trade: independent deploy/scale/fail per service and per team - but every arrow in the right-hand picture is a network call that can fail, be slow, or arrive out of order; transactions become sagas; debugging becomes distributed tracing; and 'run it locally' becomes a platform feature. Quote Martin Fowler's 'monolith first' honestly: most successful microservice systems were extracted from monoliths whose seams had become visible; starting greenfield with twenty services means guessing twenty boundaries you will guess wrong. And connect back to Conway (Module 2): the RIGHT reason to split is team autonomy along business domains - if one team owns everything, microservices give you distributed-systems pain with no autonomy payoff. Our two-service app is deliberately minimal: one seam (order calls payment), enough to exhibit every distributed-systems lesson without drowning in them.</a:t>
             </a:r>
           </a:p>
         </p:txBody>
@@ -2141,7 +2149,567 @@
           <a:lstStyle/>
           <a:p>
             <a:r>
-              <a:t>End with commitments: ask each participant to write down the one action they will take in the first week and share it with the room. Hand out the feedback survey, answer final questions, and run the Day 2 quiz if not already done.</a:t>
+              <a:t>A platform consumes real headcount, so it must demonstrate value in numbers leadership respects - give participants the funding conversation on one slide. Adoption is the honest north star precisely because your platform is optional: teams choosing the paved road is a continuous referendum on whether it is actually better than DIY; falling adoption is user feedback, not user disloyalty. Speed: measure DORA metrics (Module 3) of the TEAMS USING the platform - the platform's output is not its own uptime but its customers' delivery performance; if consuming teams do not deploy more often with fewer failures, the platform is decoration. Support load falling while adoption rises is the self-service proof - a rising ticket count means you built a ticket queue with extra steps. Developer NPS and lightweight quarterly surveys catch what metrics miss; the free-text answers are roadmap gold. The ROI arithmetic is simple enough for a slide and strong enough for a budget meeting: hours of infrastructure toil saved per team per month, times number of teams, priced at loaded cost - typically dwarfing a platform team's cost at even modest scale - plus the harder-to-price but very real risk term (one prevented breach or one halved recovery time). Close the loop with Module 9's warning label: measure the SYSTEM, never individuals, and never let platform metrics become team report cards - Module 3's gaming lesson applies doubly here.</a:t>
+            </a:r>
+          </a:p>
+        </p:txBody>
+      </p:sp>
+      <p:sp>
+        <p:nvSpPr>
+          <p:cNvPr id="4" name="Slide Number Placeholder 3"/>
+          <p:cNvSpPr>
+            <a:spLocks noGrp="1"/>
+          </p:cNvSpPr>
+          <p:nvPr>
+            <p:ph type="sldNum" idx="5" sz="quarter"/>
+          </p:nvPr>
+        </p:nvSpPr>
+        <p:spPr/>
+      </p:sp>
+    </p:spTree>
+  </p:cSld>
+  <p:clrMapOvr>
+    <a:masterClrMapping/>
+  </p:clrMapOvr>
+</p:notes>
+</file>
+
+<file path=ppt/notesSlides/notesSlide31.xml><?xml version="1.0" encoding="utf-8"?>
+<p:notes xmlns:a="http://schemas.openxmlformats.org/drawingml/2006/main" xmlns:p="http://schemas.openxmlformats.org/presentationml/2006/main" xmlns:r="http://schemas.openxmlformats.org/officeDocument/2006/relationships">
+  <p:cSld>
+    <p:spTree>
+      <p:nvGrpSpPr>
+        <p:cNvPr id="1" name=""/>
+        <p:cNvGrpSpPr/>
+        <p:nvPr/>
+      </p:nvGrpSpPr>
+      <p:grpSpPr>
+        <a:xfrm>
+          <a:off x="0" y="0"/>
+          <a:ext cx="0" cy="0"/>
+          <a:chOff x="0" y="0"/>
+          <a:chExt cx="0" cy="0"/>
+        </a:xfrm>
+      </p:grpSpPr>
+      <p:sp>
+        <p:nvSpPr>
+          <p:cNvPr id="2" name="Slide Image Placeholder 1"/>
+          <p:cNvSpPr>
+            <a:spLocks noGrp="1"/>
+          </p:cNvSpPr>
+          <p:nvPr>
+            <p:ph type="sldImg" idx="2"/>
+          </p:nvPr>
+        </p:nvSpPr>
+        <p:spPr/>
+      </p:sp>
+      <p:sp>
+        <p:nvSpPr>
+          <p:cNvPr id="3" name="Notes Placeholder 2"/>
+          <p:cNvSpPr>
+            <a:spLocks noGrp="1"/>
+          </p:cNvSpPr>
+          <p:nvPr>
+            <p:ph type="body" idx="3" sz="quarter"/>
+          </p:nvPr>
+        </p:nvSpPr>
+        <p:spPr/>
+        <p:txBody>
+          <a:bodyPr/>
+          <a:lstStyle/>
+          <a:p>
+            <a:r>
+              <a:t>Operating-model failures kill more platforms than technical ones - four traps and their answers. Funding: a project-funded platform 'finishes', its team disbands, and the artifact rots into the legacy it was meant to replace; product funding (a standing team, a roadmap, ongoing discovery) matches the reality that a platform is never done. Production discipline: the platform sits under every team's delivery path, so it needs SLOs (Module 8, applied to yourself), an on-call story, and honest support hours - a platform that goes dark at 17:00 while its consumers are on call is not a product, and eating your own dog food here builds credibility faster than any roadshow. Deprecation: platform churn is a tax on every consumer, so version templates, announce windows, provide migration tooling - trust, once rug-pulled, does not return. Saying no is a product skill: the platform serves the COMMON 80% brilliantly; the exotic 20% uses the escape hatch and owns its choice - a platform that chases every request becomes an unmaintainable everything-store (this is canvas box 9, and it is the box groups struggle with most, which is exactly why it is there). EXERCISE NOW (25 min + debrief, instructor/platform-canvas.md): groups design a platform for an organisation someone at the table knows - then present in two minutes; debrief on boxes 8 and 9, and on whether developers would CHOOSE their platform.</a:t>
+            </a:r>
+          </a:p>
+        </p:txBody>
+      </p:sp>
+      <p:sp>
+        <p:nvSpPr>
+          <p:cNvPr id="4" name="Slide Number Placeholder 3"/>
+          <p:cNvSpPr>
+            <a:spLocks noGrp="1"/>
+          </p:cNvSpPr>
+          <p:nvPr>
+            <p:ph type="sldNum" idx="5" sz="quarter"/>
+          </p:nvPr>
+        </p:nvSpPr>
+        <p:spPr/>
+      </p:sp>
+    </p:spTree>
+  </p:cSld>
+  <p:clrMapOvr>
+    <a:masterClrMapping/>
+  </p:clrMapOvr>
+</p:notes>
+</file>
+
+<file path=ppt/notesSlides/notesSlide32.xml><?xml version="1.0" encoding="utf-8"?>
+<p:notes xmlns:a="http://schemas.openxmlformats.org/drawingml/2006/main" xmlns:p="http://schemas.openxmlformats.org/presentationml/2006/main" xmlns:r="http://schemas.openxmlformats.org/officeDocument/2006/relationships">
+  <p:cSld>
+    <p:spTree>
+      <p:nvGrpSpPr>
+        <p:cNvPr id="1" name=""/>
+        <p:cNvGrpSpPr/>
+        <p:nvPr/>
+      </p:nvGrpSpPr>
+      <p:grpSpPr>
+        <a:xfrm>
+          <a:off x="0" y="0"/>
+          <a:ext cx="0" cy="0"/>
+          <a:chOff x="0" y="0"/>
+          <a:chExt cx="0" cy="0"/>
+        </a:xfrm>
+      </p:grpSpPr>
+      <p:sp>
+        <p:nvSpPr>
+          <p:cNvPr id="2" name="Slide Image Placeholder 1"/>
+          <p:cNvSpPr>
+            <a:spLocks noGrp="1"/>
+          </p:cNvSpPr>
+          <p:nvPr>
+            <p:ph type="sldImg" idx="2"/>
+          </p:nvPr>
+        </p:nvSpPr>
+        <p:spPr/>
+      </p:sp>
+      <p:sp>
+        <p:nvSpPr>
+          <p:cNvPr id="3" name="Notes Placeholder 2"/>
+          <p:cNvSpPr>
+            <a:spLocks noGrp="1"/>
+          </p:cNvSpPr>
+          <p:nvPr>
+            <p:ph type="body" idx="3" sz="quarter"/>
+          </p:nvPr>
+        </p:nvSpPr>
+        <p:spPr/>
+        <p:txBody>
+          <a:bodyPr/>
+          <a:lstStyle/>
+          <a:p>
+            <a:r>
+              <a:t>This module IS the hands-on core of the course, exactly as the outline promises: a basic DevOps pipeline, a microservice built and deployed, and IaC implemented - all on the participant's Ubuntu VM, all on localhost, tied together by the capstone golden path.</a:t>
+            </a:r>
+          </a:p>
+        </p:txBody>
+      </p:sp>
+      <p:sp>
+        <p:nvSpPr>
+          <p:cNvPr id="4" name="Slide Number Placeholder 3"/>
+          <p:cNvSpPr>
+            <a:spLocks noGrp="1"/>
+          </p:cNvSpPr>
+          <p:nvPr>
+            <p:ph type="sldNum" idx="5" sz="quarter"/>
+          </p:nvPr>
+        </p:nvSpPr>
+        <p:spPr/>
+      </p:sp>
+    </p:spTree>
+  </p:cSld>
+  <p:clrMapOvr>
+    <a:masterClrMapping/>
+  </p:clrMapOvr>
+</p:notes>
+</file>
+
+<file path=ppt/notesSlides/notesSlide33.xml><?xml version="1.0" encoding="utf-8"?>
+<p:notes xmlns:a="http://schemas.openxmlformats.org/drawingml/2006/main" xmlns:p="http://schemas.openxmlformats.org/presentationml/2006/main" xmlns:r="http://schemas.openxmlformats.org/officeDocument/2006/relationships">
+  <p:cSld>
+    <p:spTree>
+      <p:nvGrpSpPr>
+        <p:cNvPr id="1" name=""/>
+        <p:cNvGrpSpPr/>
+        <p:nvPr/>
+      </p:nvGrpSpPr>
+      <p:grpSpPr>
+        <a:xfrm>
+          <a:off x="0" y="0"/>
+          <a:ext cx="0" cy="0"/>
+          <a:chOff x="0" y="0"/>
+          <a:chExt cx="0" cy="0"/>
+        </a:xfrm>
+      </p:grpSpPr>
+      <p:sp>
+        <p:nvSpPr>
+          <p:cNvPr id="2" name="Slide Image Placeholder 1"/>
+          <p:cNvSpPr>
+            <a:spLocks noGrp="1"/>
+          </p:cNvSpPr>
+          <p:nvPr>
+            <p:ph type="sldImg" idx="2"/>
+          </p:nvPr>
+        </p:nvSpPr>
+        <p:spPr/>
+      </p:sp>
+      <p:sp>
+        <p:nvSpPr>
+          <p:cNvPr id="3" name="Notes Placeholder 2"/>
+          <p:cNvSpPr>
+            <a:spLocks noGrp="1"/>
+          </p:cNvSpPr>
+          <p:nvPr>
+            <p:ph type="body" idx="3" sz="quarter"/>
+          </p:nvPr>
+        </p:nvSpPr>
+        <p:spPr/>
+        <p:txBody>
+          <a:bodyPr/>
+          <a:lstStyle/>
+          <a:p>
+            <a:r>
+              <a:t>Set expectations before the first workshop: these three blocks are where theory becomes muscle memory, and they use one continuous application so context never resets. Workshop 1 realises Module 5: participants copy the CI workflow into place, read it critically (job graph, permissions, pinned actions, the report-vs-gate Trivy pair), trigger it from a real pull request (or act locally), and watch it go green - Day 1 ends with a working pipeline, which matters emotionally as much as technically. Workshop 2 realises Module 6 end-to-end: build the image and inspect its layers, compose the two-service stack and watch service discovery work, then kind-deploy with probes and limits, scale, roll forward, roll back - the complete container journey in one morning. Workshop 3 realises Module 4: the full Terraform loop against local Docker including the drift experiment, plus the Ansible idempotence bonus - and the explicit read-through of what changes for cloud (one provider block). Timing guidance for the instructor: each workshop guide (workshops/ folder) marks a core path sized to fit the slot and stretch parts for fast finishers; insist on the verification checklists - done means checked, not time elapsed.</a:t>
+            </a:r>
+          </a:p>
+        </p:txBody>
+      </p:sp>
+      <p:sp>
+        <p:nvSpPr>
+          <p:cNvPr id="4" name="Slide Number Placeholder 3"/>
+          <p:cNvSpPr>
+            <a:spLocks noGrp="1"/>
+          </p:cNvSpPr>
+          <p:nvPr>
+            <p:ph type="sldNum" idx="5" sz="quarter"/>
+          </p:nvPr>
+        </p:nvSpPr>
+        <p:spPr/>
+      </p:sp>
+    </p:spTree>
+  </p:cSld>
+  <p:clrMapOvr>
+    <a:masterClrMapping/>
+  </p:clrMapOvr>
+</p:notes>
+</file>
+
+<file path=ppt/notesSlides/notesSlide34.xml><?xml version="1.0" encoding="utf-8"?>
+<p:notes xmlns:a="http://schemas.openxmlformats.org/drawingml/2006/main" xmlns:p="http://schemas.openxmlformats.org/presentationml/2006/main" xmlns:r="http://schemas.openxmlformats.org/officeDocument/2006/relationships">
+  <p:cSld>
+    <p:spTree>
+      <p:nvGrpSpPr>
+        <p:cNvPr id="1" name=""/>
+        <p:cNvGrpSpPr/>
+        <p:nvPr/>
+      </p:nvGrpSpPr>
+      <p:grpSpPr>
+        <a:xfrm>
+          <a:off x="0" y="0"/>
+          <a:ext cx="0" cy="0"/>
+          <a:chOff x="0" y="0"/>
+          <a:chExt cx="0" cy="0"/>
+        </a:xfrm>
+      </p:grpSpPr>
+      <p:sp>
+        <p:nvSpPr>
+          <p:cNvPr id="2" name="Slide Image Placeholder 1"/>
+          <p:cNvSpPr>
+            <a:spLocks noGrp="1"/>
+          </p:cNvSpPr>
+          <p:nvPr>
+            <p:ph type="sldImg" idx="2"/>
+          </p:nvPr>
+        </p:nvSpPr>
+        <p:spPr/>
+      </p:sp>
+      <p:sp>
+        <p:nvSpPr>
+          <p:cNvPr id="3" name="Notes Placeholder 2"/>
+          <p:cNvSpPr>
+            <a:spLocks noGrp="1"/>
+          </p:cNvSpPr>
+          <p:nvPr>
+            <p:ph type="body" idx="3" sz="quarter"/>
+          </p:nvPr>
+        </p:nvSpPr>
+        <p:spPr/>
+        <p:txBody>
+          <a:bodyPr/>
+          <a:lstStyle/>
+          <a:p>
+            <a:r>
+              <a:t>Publish the definition of done up front so nobody optimises for 'got to the end of the page'. Each criterion is testable by the participant themselves - the pipeline is green or it is not, localhost:30080 answers or it does not, terraform destroy leaves zero tf- containers or it does not - which mirrors the whole course's philosophy: verification is automated, not vibes. The capstone at Day 2's end is the integration test of the human, not just the system: running the golden path script exercises every workshop's material in sequence (tests -&gt; images -&gt; scan -&gt; cluster -&gt; deploy -&gt; smoke test), and the PLATFORM-HANDOVER.md document forces the platform-as-product thinking of Module 9 into writing. The last bullet sets lab culture deliberately: hitting errors is designed-in learning, the troubleshooting tables in each guide resolve the common 90%, the ask-three-before-me rule builds peer debugging habits, and instructors circulate rather than lecture. Fast finishers take the stretch goals (they are real: GHCR push, ingress, Terraform modules) rather than idling.</a:t>
+            </a:r>
+          </a:p>
+        </p:txBody>
+      </p:sp>
+      <p:sp>
+        <p:nvSpPr>
+          <p:cNvPr id="4" name="Slide Number Placeholder 3"/>
+          <p:cNvSpPr>
+            <a:spLocks noGrp="1"/>
+          </p:cNvSpPr>
+          <p:nvPr>
+            <p:ph type="sldNum" idx="5" sz="quarter"/>
+          </p:nvPr>
+        </p:nvSpPr>
+        <p:spPr/>
+      </p:sp>
+    </p:spTree>
+  </p:cSld>
+  <p:clrMapOvr>
+    <a:masterClrMapping/>
+  </p:clrMapOvr>
+</p:notes>
+</file>
+
+<file path=ppt/notesSlides/notesSlide35.xml><?xml version="1.0" encoding="utf-8"?>
+<p:notes xmlns:a="http://schemas.openxmlformats.org/drawingml/2006/main" xmlns:p="http://schemas.openxmlformats.org/presentationml/2006/main" xmlns:r="http://schemas.openxmlformats.org/officeDocument/2006/relationships">
+  <p:cSld>
+    <p:spTree>
+      <p:nvGrpSpPr>
+        <p:cNvPr id="1" name=""/>
+        <p:cNvGrpSpPr/>
+        <p:nvPr/>
+      </p:nvGrpSpPr>
+      <p:grpSpPr>
+        <a:xfrm>
+          <a:off x="0" y="0"/>
+          <a:ext cx="0" cy="0"/>
+          <a:chOff x="0" y="0"/>
+          <a:chExt cx="0" cy="0"/>
+        </a:xfrm>
+      </p:grpSpPr>
+      <p:sp>
+        <p:nvSpPr>
+          <p:cNvPr id="2" name="Slide Image Placeholder 1"/>
+          <p:cNvSpPr>
+            <a:spLocks noGrp="1"/>
+          </p:cNvSpPr>
+          <p:nvPr>
+            <p:ph type="sldImg" idx="2"/>
+          </p:nvPr>
+        </p:nvSpPr>
+        <p:spPr/>
+      </p:sp>
+      <p:sp>
+        <p:nvSpPr>
+          <p:cNvPr id="3" name="Notes Placeholder 2"/>
+          <p:cNvSpPr>
+            <a:spLocks noGrp="1"/>
+          </p:cNvSpPr>
+          <p:nvPr>
+            <p:ph type="body" idx="3" sz="quarter"/>
+          </p:nvPr>
+        </p:nvSpPr>
+        <p:spPr/>
+        <p:txBody>
+          <a:bodyPr/>
+          <a:lstStyle/>
+          <a:p>
+            <a:r>
+              <a:t>Close the course deliberately: recap what was built, hand participants a learning roadmap, and make the first week back at work concrete.</a:t>
+            </a:r>
+          </a:p>
+        </p:txBody>
+      </p:sp>
+      <p:sp>
+        <p:nvSpPr>
+          <p:cNvPr id="4" name="Slide Number Placeholder 3"/>
+          <p:cNvSpPr>
+            <a:spLocks noGrp="1"/>
+          </p:cNvSpPr>
+          <p:nvPr>
+            <p:ph type="sldNum" idx="5" sz="quarter"/>
+          </p:nvPr>
+        </p:nvSpPr>
+        <p:spPr/>
+      </p:sp>
+    </p:spTree>
+  </p:cSld>
+  <p:clrMapOvr>
+    <a:masterClrMapping/>
+  </p:clrMapOvr>
+</p:notes>
+</file>
+
+<file path=ppt/notesSlides/notesSlide36.xml><?xml version="1.0" encoding="utf-8"?>
+<p:notes xmlns:a="http://schemas.openxmlformats.org/drawingml/2006/main" xmlns:p="http://schemas.openxmlformats.org/presentationml/2006/main" xmlns:r="http://schemas.openxmlformats.org/officeDocument/2006/relationships">
+  <p:cSld>
+    <p:spTree>
+      <p:nvGrpSpPr>
+        <p:cNvPr id="1" name=""/>
+        <p:cNvGrpSpPr/>
+        <p:nvPr/>
+      </p:nvGrpSpPr>
+      <p:grpSpPr>
+        <a:xfrm>
+          <a:off x="0" y="0"/>
+          <a:ext cx="0" cy="0"/>
+          <a:chOff x="0" y="0"/>
+          <a:chExt cx="0" cy="0"/>
+        </a:xfrm>
+      </p:grpSpPr>
+      <p:sp>
+        <p:nvSpPr>
+          <p:cNvPr id="2" name="Slide Image Placeholder 1"/>
+          <p:cNvSpPr>
+            <a:spLocks noGrp="1"/>
+          </p:cNvSpPr>
+          <p:nvPr>
+            <p:ph type="sldImg" idx="2"/>
+          </p:nvPr>
+        </p:nvSpPr>
+        <p:spPr/>
+      </p:sp>
+      <p:sp>
+        <p:nvSpPr>
+          <p:cNvPr id="3" name="Notes Placeholder 2"/>
+          <p:cNvSpPr>
+            <a:spLocks noGrp="1"/>
+          </p:cNvSpPr>
+          <p:nvPr>
+            <p:ph type="body" idx="3" sz="quarter"/>
+          </p:nvPr>
+        </p:nvSpPr>
+        <p:spPr/>
+        <p:txBody>
+          <a:bodyPr/>
+          <a:lstStyle/>
+          <a:p>
+            <a:r>
+              <a:t>Walk the list slowly - this is the payoff slide. Every item ran on the participant's own VM and every artifact is in the course repository they keep. Invite one or two participants to say which module or workshop changed how they think about their current work.</a:t>
+            </a:r>
+          </a:p>
+        </p:txBody>
+      </p:sp>
+      <p:sp>
+        <p:nvSpPr>
+          <p:cNvPr id="4" name="Slide Number Placeholder 3"/>
+          <p:cNvSpPr>
+            <a:spLocks noGrp="1"/>
+          </p:cNvSpPr>
+          <p:nvPr>
+            <p:ph type="sldNum" idx="5" sz="quarter"/>
+          </p:nvPr>
+        </p:nvSpPr>
+        <p:spPr/>
+      </p:sp>
+    </p:spTree>
+  </p:cSld>
+  <p:clrMapOvr>
+    <a:masterClrMapping/>
+  </p:clrMapOvr>
+</p:notes>
+</file>
+
+<file path=ppt/notesSlides/notesSlide37.xml><?xml version="1.0" encoding="utf-8"?>
+<p:notes xmlns:a="http://schemas.openxmlformats.org/drawingml/2006/main" xmlns:p="http://schemas.openxmlformats.org/presentationml/2006/main" xmlns:r="http://schemas.openxmlformats.org/officeDocument/2006/relationships">
+  <p:cSld>
+    <p:spTree>
+      <p:nvGrpSpPr>
+        <p:cNvPr id="1" name=""/>
+        <p:cNvGrpSpPr/>
+        <p:nvPr/>
+      </p:nvGrpSpPr>
+      <p:grpSpPr>
+        <a:xfrm>
+          <a:off x="0" y="0"/>
+          <a:ext cx="0" cy="0"/>
+          <a:chOff x="0" y="0"/>
+          <a:chExt cx="0" cy="0"/>
+        </a:xfrm>
+      </p:grpSpPr>
+      <p:sp>
+        <p:nvSpPr>
+          <p:cNvPr id="2" name="Slide Image Placeholder 1"/>
+          <p:cNvSpPr>
+            <a:spLocks noGrp="1"/>
+          </p:cNvSpPr>
+          <p:nvPr>
+            <p:ph type="sldImg" idx="2"/>
+          </p:nvPr>
+        </p:nvSpPr>
+        <p:spPr/>
+      </p:sp>
+      <p:sp>
+        <p:nvSpPr>
+          <p:cNvPr id="3" name="Notes Placeholder 2"/>
+          <p:cNvSpPr>
+            <a:spLocks noGrp="1"/>
+          </p:cNvSpPr>
+          <p:nvPr>
+            <p:ph type="body" idx="3" sz="quarter"/>
+          </p:nvPr>
+        </p:nvSpPr>
+        <p:spPr/>
+        <p:txBody>
+          <a:bodyPr/>
+          <a:lstStyle/>
+          <a:p>
+            <a:r>
+              <a:t>Participants keep the slides, the labs and the sample application - everything reruns on any Ubuntu 24.04 machine via lab-setup/install-ubuntu24.sh. Encourage them to re-run the capstone from scratch within two weeks; retention comes from the second unaided repetition. The reading list is ordered deliberately: Phoenix Project for narrative buy-in (give it to managers), Accelerate for the evidence, Team Topologies for org design, SRE books for depth on Module 8.</a:t>
+            </a:r>
+          </a:p>
+        </p:txBody>
+      </p:sp>
+      <p:sp>
+        <p:nvSpPr>
+          <p:cNvPr id="4" name="Slide Number Placeholder 3"/>
+          <p:cNvSpPr>
+            <a:spLocks noGrp="1"/>
+          </p:cNvSpPr>
+          <p:nvPr>
+            <p:ph type="sldNum" idx="5" sz="quarter"/>
+          </p:nvPr>
+        </p:nvSpPr>
+        <p:spPr/>
+      </p:sp>
+    </p:spTree>
+  </p:cSld>
+  <p:clrMapOvr>
+    <a:masterClrMapping/>
+  </p:clrMapOvr>
+</p:notes>
+</file>
+
+<file path=ppt/notesSlides/notesSlide38.xml><?xml version="1.0" encoding="utf-8"?>
+<p:notes xmlns:a="http://schemas.openxmlformats.org/drawingml/2006/main" xmlns:p="http://schemas.openxmlformats.org/presentationml/2006/main" xmlns:r="http://schemas.openxmlformats.org/officeDocument/2006/relationships">
+  <p:cSld>
+    <p:spTree>
+      <p:nvGrpSpPr>
+        <p:cNvPr id="1" name=""/>
+        <p:cNvGrpSpPr/>
+        <p:nvPr/>
+      </p:nvGrpSpPr>
+      <p:grpSpPr>
+        <a:xfrm>
+          <a:off x="0" y="0"/>
+          <a:ext cx="0" cy="0"/>
+          <a:chOff x="0" y="0"/>
+          <a:chExt cx="0" cy="0"/>
+        </a:xfrm>
+      </p:grpSpPr>
+      <p:sp>
+        <p:nvSpPr>
+          <p:cNvPr id="2" name="Slide Image Placeholder 1"/>
+          <p:cNvSpPr>
+            <a:spLocks noGrp="1"/>
+          </p:cNvSpPr>
+          <p:nvPr>
+            <p:ph type="sldImg" idx="2"/>
+          </p:nvPr>
+        </p:nvSpPr>
+        <p:spPr/>
+      </p:sp>
+      <p:sp>
+        <p:nvSpPr>
+          <p:cNvPr id="3" name="Notes Placeholder 2"/>
+          <p:cNvSpPr>
+            <a:spLocks noGrp="1"/>
+          </p:cNvSpPr>
+          <p:nvPr>
+            <p:ph type="body" idx="3" sz="quarter"/>
+          </p:nvPr>
+        </p:nvSpPr>
+        <p:spPr/>
+        <p:txBody>
+          <a:bodyPr/>
+          <a:lstStyle/>
+          <a:p>
+            <a:r>
+              <a:t>End with commitments: ask each participant to write down the one action they will take in the first week and share it with the room - spoken commitments stick. Hand out the feedback survey, answer final questions, and run the Day 2 quiz if not already done.</a:t>
             </a:r>
           </a:p>
         </p:txBody>
@@ -2211,7 +2779,7 @@
           <a:lstStyle/>
           <a:p>
             <a:r>
-              <a:t>Point out that each microservice owns its data and can be scaled, deployed and owned independently.</a:t>
+              <a:t>Bounded context comes from Domain-Driven Design (Eric Evans): a boundary within which a model and its language are consistent - 'order' means one precise thing inside the ordering context. Services cut along these seams change for one business reason at a time; services cut along technical layers (a 'database service', an 'API layer service') change with every feature and force lockstep deploys. Independent deployability is the honest test of any decomposition: if releasing service A always requires releasing B, you have a distributed monolith - all of the network pain, none of the autonomy. Database-per-service is what makes independence real: shared tables are the tightest possible coupling (any schema change breaks unknown others); integration happens through published APIs or events, and yes, that means accepting eventual consistency at boundaries - a price, paid consciously. 'Smart endpoints, dumb pipes' (Fowler/Lewis) encodes the ESB lesson: burying business logic in a clever middleware recreated the monolith in the worst place; keep transport simple (HTTP, plain queues) and logic in owned services. Partial failure is the defining reality: our order service demonstrates the pattern minimally - a 2-second timeout on the payment call, and a degraded-but-alive answer (payment status 'unavailable') when the dependency is down. Participants SEE this behaviour in Workshop 2 and break it on purpose in the Module 8 demo.</a:t>
             </a:r>
           </a:p>
         </p:txBody>
@@ -2281,7 +2849,7 @@
           <a:lstStyle/>
           <a:p>
             <a:r>
-              <a:t>Link to the sample app: one Dockerfile for the order service and another for the payment service, composed together.</a:t>
+              <a:t>The Twelve-Factor App (Heroku, 2011) remains the practical contract between applications and platforms - highlight the five factors that carry the most weight and show where OUR app honours each. Config in environment: the same order-service image reports env 'production' under docker run, 'compose' in the Compose stack, and 'kubernetes' under kind, because APP_ENV and PAYMENT_SERVICE_URL are injected at runtime - the artifact never changes, only its environment does; participants verify this repeatedly via /health. Stateless processes: our in-memory order list is a DELIBERATE violation - in Workshop 2, scaling the payment service to two replicas visibly splits state between them, which is the most convincing statelessness lesson available: real state belongs in a backing service (database, cache), so any replica can serve any request and scaling/rescheduling is free. Logs to stdout: docker logs and kubectl logs work because the app writes to stdout and manages no log files - the platform owns aggregation. Disposability: fast boot and clean SIGTERM handling are what let orchestrators do rolling updates and self-healing - a service that takes three minutes to boot or corrupts on kill fights its platform. Dev/prod parity is the summary factor: identical images, same ports, same probes, laptop to production.</a:t>
             </a:r>
           </a:p>
         </p:txBody>
@@ -2351,7 +2919,7 @@
           <a:lstStyle/>
           <a:p>
             <a:r>
-              <a:t>Do not try to cover every resource. Focus on the minimum viable mental model: desired state declared in YAML, reconciled by controllers.</a:t>
+              <a:t>Demystify the technology - containers stop being magic in about three minutes. A VM virtualises hardware and boots a full guest OS (minutes, gigabytes); a container is ordinary Linux processes wearing isolation: NAMESPACES restrict what the process can see (its own PID tree, network stack, filesystem mounts, users) and CGROUPS meter what it can consume (CPU, memory - the numbers our Kubernetes limits set in Workshop 2). That is why containers start in milliseconds and share the host kernel - and why container security differs from VM security (Module 7: a kernel exploit escapes ALL containers on the host, hence non-root and seccomp defaults). Images: an immutable, content-addressed stack of filesystem layers plus metadata (entrypoint, env, ports), standardised by the OCI so any runtime runs any image. Layer sharing is the economic magic: every image FROM python:3.12-slim shares those base layers on disk and over the network - which is also why layer ORDER matters in Dockerfiles (dependencies before source code = cache hits on every code-only rebuild; participants see this in Workshop 2 when the second build takes seconds). Tags vs digests: a tag like :lab02 is a mutable pointer, the sha256 digest is the true identity - which is why production systems pin digests and why our no-latest-tag policy exists (Module 7).</a:t>
             </a:r>
           </a:p>
         </p:txBody>
@@ -2421,7 +2989,7 @@
           <a:lstStyle/>
           <a:p>
             <a:r>
-              <a:t>The diagram shows a four-worker cluster. Mention that control-plane components can run on dedicated nodes or as Pods themselves (in managed clouds).</a:t>
+              <a:t>Every line here is implemented in the course's two Dockerfiles - open Dockerfile in labs/app on screen and point as you talk. Multi-stage: the builder stage pip-installs with full tooling; the final stage copies only the installed packages - smaller images pull faster, cold-start faster, and expose fewer packages to CVE scanners (participants compare Trivy findings against slim bases in the Module 7 demo). Non-root: our images create appuser (UID 1001) and USER-switch before CMD, so a container escape lands unprivileged - participants verify with whoami in Workshop 2, and Kubernetes enforces it again via runAsNonRoot (defence in depth). Base choice: slim over full (fewer packages, fewer CVEs), distroless as the next step (no shell - harder to debug, harder to exploit), alpine with the musl caveat for Python wheels. Cache ordering is the daily-life win: COPY requirements.txt + install BEFORE COPY source means editing code never re-installs dependencies. HEALTHCHECK lets Compose gate startup ordering (our depends_on: service_healthy) and mirrors the probes Kubernetes will run. The .dockerignore keeps venvs, .git and caches out of the build context - build speed and no accidental secrets in layers.</a:t>
             </a:r>
           </a:p>
         </p:txBody>
@@ -2491,7 +3059,7 @@
           <a:lstStyle/>
           <a:p>
             <a:r>
-              <a:t>These capabilities turn Kubernetes from an orchestrator into a platform substrate. The platform team curates these patterns for the organisation.</a:t>
+              <a:t>Motivate orchestration from the gap participants have personally felt by now: Compose runs a stack on one machine, but who restarts the container at 03:00, moves it when the node dies, adds replicas under load, or shifts traffic during an update? Kubernetes' core idea - the one that makes everything else make sense - is RECONCILIATION: you write desired state (a Deployment saying 'two replicas of this image'), and controllers run an endless loop of observe-diff-act until reality matches, forever. Delete a pod and it reappears; not because something restarted it as a special case, but because the controller noticed reality (1 pod) diverged from desire (2). Connect this explicitly to Module 4: it is Terraform's declare-and-converge model, running continuously at runtime instead of on demand - one mental model, two timescales. Scheduling uses the resource REQUESTS on each container (our manifests set them) to bin-pack pods across nodes; LIMITS cap consumption via cgroups from two slides ago. Self-healing goes beyond restarts: a failing READINESS probe removes a pod from Service load-balancing without killing it; a failing LIVENESS probe restarts it - participants configure both in Workshop 2 and watch them act during the rolling update.</a:t>
             </a:r>
           </a:p>
         </p:txBody>
@@ -2561,7 +3129,7 @@
           <a:lstStyle/>
           <a:p>
             <a:r>
-              <a:t>Security is often the biggest concern for production adoption. Position DevSecOps as shifting security left without shifting all responsibility onto developers.</a:t>
+              <a:t>Keep the tour tight and functional - the exam-level detail is less important than the shape. Control plane: the API SERVER is the single front door (kubectl, controllers, kubelets all speak to it - which is why RBAC on the API server is THE security boundary, Module 7); ETCD stores the entire cluster state (desired and observed - lose etcd without backup, lose the cluster's memory); the SCHEDULER assigns new pods to nodes; the CONTROLLER MANAGER runs the reconciliation loops from the previous slide. Workers: the KUBELET on each node makes assigned pods actually run and reports status back; KUBE-PROXY programs the routing that makes Services work. Emphasise the communication pattern: desired state flows down, observed status flows back up, and NOTHING talks directly to anything except through the API server - that uniformity is what makes Kubernetes extensible (operators, admission controllers) and auditable. Then the kind reveal: in Workshop 2, this entire picture runs inside one Docker container on the participant's VM - same API, same components, same kubectl; which is the course's fidelity claim: everything they practise transfers verbatim to EKS/AKS/GKE, where the control plane is simply someone else's problem (managed).</a:t>
             </a:r>
           </a:p>
         </p:txBody>
@@ -5616,7 +6184,7 @@
                 </a:solidFill>
                 <a:latin typeface="Calibri"/>
               </a:rPr>
-              <a:t>Day 2 — Containers, Security, Observability &amp; Platform Thinking</a:t>
+              <a:t>Day 2 — Containers, Security, Observability, Platform Thinking &amp; Workshops</a:t>
             </a:r>
           </a:p>
         </p:txBody>
@@ -5661,7 +6229,7 @@
                 </a:solidFill>
                 <a:latin typeface="Calibri"/>
               </a:rPr>
-              <a:t>DevSecOps: Security in the Pipeline</a:t>
+              <a:t>The Working Vocabulary: Objects You Will Touch</a:t>
             </a:r>
           </a:p>
         </p:txBody>
@@ -5682,67 +6250,67 @@
           <a:lstStyle/>
           <a:p>
             <a:pPr>
-              <a:defRPr sz="2000">
-                <a:solidFill>
-                  <a:srgbClr val="333333"/>
-                </a:solidFill>
-                <a:latin typeface="Calibri"/>
-              </a:defRPr>
-            </a:pPr>
-            <a:r>
-              <a:t>Security is everyone's responsibility, not a final checkpoint.</a:t>
-            </a:r>
-          </a:p>
-          <a:p>
-            <a:pPr>
-              <a:defRPr sz="2000">
-                <a:solidFill>
-                  <a:srgbClr val="333333"/>
-                </a:solidFill>
-                <a:latin typeface="Calibri"/>
-              </a:defRPr>
-            </a:pPr>
-            <a:r>
-              <a:t>Shift left: detect vulnerabilities as early as possible, when they are cheapest to fix.</a:t>
-            </a:r>
-          </a:p>
-          <a:p>
-            <a:pPr>
-              <a:defRPr sz="2000">
-                <a:solidFill>
-                  <a:srgbClr val="333333"/>
-                </a:solidFill>
-                <a:latin typeface="Calibri"/>
-              </a:defRPr>
-            </a:pPr>
-            <a:r>
-              <a:t>Automate scans: SAST, DAST, dependency, secrets, container image, IaC policy.</a:t>
-            </a:r>
-          </a:p>
-          <a:p>
-            <a:pPr>
-              <a:defRPr sz="2000">
-                <a:solidFill>
-                  <a:srgbClr val="333333"/>
-                </a:solidFill>
-                <a:latin typeface="Calibri"/>
-              </a:defRPr>
-            </a:pPr>
-            <a:r>
-              <a:t>Provide fast, actionable feedback in the tools developers already use.</a:t>
-            </a:r>
-          </a:p>
-          <a:p>
-            <a:pPr>
-              <a:defRPr sz="2000">
-                <a:solidFill>
-                  <a:srgbClr val="333333"/>
-                </a:solidFill>
-                <a:latin typeface="Calibri"/>
-              </a:defRPr>
-            </a:pPr>
-            <a:r>
-              <a:t>Maintain an audit trail through versioned code, pipelines and signed artefacts.</a:t>
+              <a:defRPr sz="1900">
+                <a:solidFill>
+                  <a:srgbClr val="333333"/>
+                </a:solidFill>
+                <a:latin typeface="Calibri"/>
+              </a:defRPr>
+            </a:pPr>
+            <a:r>
+              <a:t>Pod: smallest unit - one or more containers sharing network/storage; mortal by design.</a:t>
+            </a:r>
+          </a:p>
+          <a:p>
+            <a:pPr>
+              <a:defRPr sz="1900">
+                <a:solidFill>
+                  <a:srgbClr val="333333"/>
+                </a:solidFill>
+                <a:latin typeface="Calibri"/>
+              </a:defRPr>
+            </a:pPr>
+            <a:r>
+              <a:t>Deployment: desired replicas + template; owns rolling updates and rollback history.</a:t>
+            </a:r>
+          </a:p>
+          <a:p>
+            <a:pPr>
+              <a:defRPr sz="1900">
+                <a:solidFill>
+                  <a:srgbClr val="333333"/>
+                </a:solidFill>
+                <a:latin typeface="Calibri"/>
+              </a:defRPr>
+            </a:pPr>
+            <a:r>
+              <a:t>Service: stable name + virtual IP load-balancing over pods selected by LABELS.</a:t>
+            </a:r>
+          </a:p>
+          <a:p>
+            <a:pPr>
+              <a:defRPr sz="1900">
+                <a:solidFill>
+                  <a:srgbClr val="333333"/>
+                </a:solidFill>
+                <a:latin typeface="Calibri"/>
+              </a:defRPr>
+            </a:pPr>
+            <a:r>
+              <a:t>ConfigMap / Secret: configuration injected at runtime (12-factor, realised).</a:t>
+            </a:r>
+          </a:p>
+          <a:p>
+            <a:pPr>
+              <a:defRPr sz="1900">
+                <a:solidFill>
+                  <a:srgbClr val="333333"/>
+                </a:solidFill>
+                <a:latin typeface="Calibri"/>
+              </a:defRPr>
+            </a:pPr>
+            <a:r>
+              <a:t>Probes + requests/limits: how the platform knows a pod is well and what it may consume.</a:t>
             </a:r>
           </a:p>
         </p:txBody>
@@ -5779,98 +6347,96 @@
         <p:txBody>
           <a:bodyPr/>
           <a:lstStyle/>
-          <a:p/>
-        </p:txBody>
-      </p:sp>
-      <p:sp>
-        <p:nvSpPr>
-          <p:cNvPr id="3" name="TextBox 2"/>
-          <p:cNvSpPr txBox="1"/>
-          <p:nvPr/>
-        </p:nvSpPr>
-        <p:spPr>
-          <a:xfrm>
-            <a:off x="457200" y="274320"/>
-            <a:ext cx="8229600" cy="731520"/>
-          </a:xfrm>
-          <a:prstGeom prst="rect">
-            <a:avLst/>
-          </a:prstGeom>
-          <a:noFill/>
-        </p:spPr>
-        <p:txBody>
-          <a:bodyPr wrap="none">
-            <a:spAutoFit/>
-          </a:bodyPr>
-          <a:lstStyle/>
-          <a:p>
-            <a:r>
-              <a:rPr sz="3000" b="1">
+          <a:p>
+            <a:r>
+              <a:rPr sz="3200" b="1">
                 <a:solidFill>
                   <a:srgbClr val="1A3C6C"/>
                 </a:solidFill>
                 <a:latin typeface="Calibri"/>
               </a:rPr>
-              <a:t>Shifting Security Left</a:t>
-            </a:r>
-          </a:p>
-        </p:txBody>
-      </p:sp>
-      <p:pic>
-        <p:nvPicPr>
-          <p:cNvPr id="4" name="Picture 3" descr="07-devsecops-shift-left.png"/>
-          <p:cNvPicPr>
-            <a:picLocks noChangeAspect="1"/>
-          </p:cNvPicPr>
-          <p:nvPr/>
-        </p:nvPicPr>
-        <p:blipFill>
-          <a:blip r:embed="rId2"/>
-          <a:stretch>
-            <a:fillRect/>
-          </a:stretch>
-        </p:blipFill>
-        <p:spPr>
-          <a:xfrm>
-            <a:off x="914400" y="1097280"/>
-            <a:ext cx="7315200" cy="3613104"/>
-          </a:xfrm>
-          <a:prstGeom prst="rect">
-            <a:avLst/>
-          </a:prstGeom>
-        </p:spPr>
-      </p:pic>
-      <p:sp>
-        <p:nvSpPr>
-          <p:cNvPr id="5" name="TextBox 4"/>
-          <p:cNvSpPr txBox="1"/>
-          <p:nvPr/>
-        </p:nvSpPr>
-        <p:spPr>
-          <a:xfrm>
-            <a:off x="457200" y="5943600"/>
-            <a:ext cx="8229600" cy="731520"/>
-          </a:xfrm>
-          <a:prstGeom prst="rect">
-            <a:avLst/>
-          </a:prstGeom>
-          <a:noFill/>
-        </p:spPr>
-        <p:txBody>
-          <a:bodyPr wrap="none">
-            <a:spAutoFit/>
-          </a:bodyPr>
-          <a:lstStyle/>
-          <a:p>
-            <a:pPr algn="ctr"/>
-            <a:r>
-              <a:rPr sz="1600" b="0">
-                <a:solidFill>
-                  <a:srgbClr val="333333"/>
-                </a:solidFill>
-                <a:latin typeface="Calibri"/>
-              </a:rPr>
-              <a:t>Security gates at every lifecycle stage, not just before production.</a:t>
+              <a:t>Managing Services at Scale</a:t>
+            </a:r>
+          </a:p>
+        </p:txBody>
+      </p:sp>
+      <p:sp>
+        <p:nvSpPr>
+          <p:cNvPr id="3" name="Content Placeholder 2"/>
+          <p:cNvSpPr>
+            <a:spLocks noGrp="1"/>
+          </p:cNvSpPr>
+          <p:nvPr>
+            <p:ph idx="1"/>
+          </p:nvPr>
+        </p:nvSpPr>
+        <p:spPr/>
+        <p:txBody>
+          <a:bodyPr/>
+          <a:lstStyle/>
+          <a:p>
+            <a:pPr>
+              <a:defRPr sz="1900">
+                <a:solidFill>
+                  <a:srgbClr val="333333"/>
+                </a:solidFill>
+                <a:latin typeface="Calibri"/>
+              </a:defRPr>
+            </a:pPr>
+            <a:r>
+              <a:t>Autoscaling: HPA scales pods on metrics; cluster autoscaler scales nodes; VPA right-sizes.</a:t>
+            </a:r>
+          </a:p>
+          <a:p>
+            <a:pPr>
+              <a:defRPr sz="1900">
+                <a:solidFill>
+                  <a:srgbClr val="333333"/>
+                </a:solidFill>
+                <a:latin typeface="Calibri"/>
+              </a:defRPr>
+            </a:pPr>
+            <a:r>
+              <a:t>Service mesh (Istio, Linkerd): mTLS, retries, traffic-splitting as platform features - at a cost.</a:t>
+            </a:r>
+          </a:p>
+          <a:p>
+            <a:pPr>
+              <a:defRPr sz="1900">
+                <a:solidFill>
+                  <a:srgbClr val="333333"/>
+                </a:solidFill>
+                <a:latin typeface="Calibri"/>
+              </a:defRPr>
+            </a:pPr>
+            <a:r>
+              <a:t>GitOps deployment (Argo CD/Flux): the cluster converges on a Git repo; drift auto-corrects.</a:t>
+            </a:r>
+          </a:p>
+          <a:p>
+            <a:pPr>
+              <a:defRPr sz="1900">
+                <a:solidFill>
+                  <a:srgbClr val="333333"/>
+                </a:solidFill>
+                <a:latin typeface="Calibri"/>
+              </a:defRPr>
+            </a:pPr>
+            <a:r>
+              <a:t>Multi-cluster/multi-region: blast-radius isolation before exotic scaling.</a:t>
+            </a:r>
+          </a:p>
+          <a:p>
+            <a:pPr>
+              <a:defRPr sz="1900">
+                <a:solidFill>
+                  <a:srgbClr val="333333"/>
+                </a:solidFill>
+                <a:latin typeface="Calibri"/>
+              </a:defRPr>
+            </a:pPr>
+            <a:r>
+              <a:t>Scale problems are PLATFORM problems - product teams should inherit the answers.</a:t>
             </a:r>
           </a:p>
         </p:txBody>
@@ -5884,258 +6450,6 @@
 </file>
 
 <file path=ppt/slides/slide12.xml><?xml version="1.0" encoding="utf-8"?>
-<p:sld xmlns:a="http://schemas.openxmlformats.org/drawingml/2006/main" xmlns:p="http://schemas.openxmlformats.org/presentationml/2006/main" xmlns:r="http://schemas.openxmlformats.org/officeDocument/2006/relationships">
-  <p:cSld>
-    <p:spTree>
-      <p:nvGrpSpPr>
-        <p:cNvPr id="1" name=""/>
-        <p:cNvGrpSpPr/>
-        <p:nvPr/>
-      </p:nvGrpSpPr>
-      <p:grpSpPr/>
-      <p:sp>
-        <p:nvSpPr>
-          <p:cNvPr id="2" name="Title 1"/>
-          <p:cNvSpPr>
-            <a:spLocks noGrp="1"/>
-          </p:cNvSpPr>
-          <p:nvPr>
-            <p:ph type="title"/>
-          </p:nvPr>
-        </p:nvSpPr>
-        <p:spPr/>
-        <p:txBody>
-          <a:bodyPr/>
-          <a:lstStyle/>
-          <a:p>
-            <a:r>
-              <a:rPr sz="3200" b="1">
-                <a:solidFill>
-                  <a:srgbClr val="1A3C6C"/>
-                </a:solidFill>
-                <a:latin typeface="Calibri"/>
-              </a:rPr>
-              <a:t>Compliance as Code</a:t>
-            </a:r>
-          </a:p>
-        </p:txBody>
-      </p:sp>
-      <p:sp>
-        <p:nvSpPr>
-          <p:cNvPr id="3" name="Content Placeholder 2"/>
-          <p:cNvSpPr>
-            <a:spLocks noGrp="1"/>
-          </p:cNvSpPr>
-          <p:nvPr>
-            <p:ph idx="1"/>
-          </p:nvPr>
-        </p:nvSpPr>
-        <p:spPr/>
-        <p:txBody>
-          <a:bodyPr/>
-          <a:lstStyle/>
-          <a:p>
-            <a:pPr>
-              <a:defRPr sz="2000">
-                <a:solidFill>
-                  <a:srgbClr val="333333"/>
-                </a:solidFill>
-                <a:latin typeface="Calibri"/>
-              </a:defRPr>
-            </a:pPr>
-            <a:r>
-              <a:t>Encode compliance rules in version-controlled policy definitions.</a:t>
-            </a:r>
-          </a:p>
-          <a:p>
-            <a:pPr>
-              <a:defRPr sz="2000">
-                <a:solidFill>
-                  <a:srgbClr val="333333"/>
-                </a:solidFill>
-                <a:latin typeface="Calibri"/>
-              </a:defRPr>
-            </a:pPr>
-            <a:r>
-              <a:t>Examples: CIS benchmarks, SOC 2 controls, GDPR data-handling rules.</a:t>
-            </a:r>
-          </a:p>
-          <a:p>
-            <a:pPr>
-              <a:defRPr sz="2000">
-                <a:solidFill>
-                  <a:srgbClr val="333333"/>
-                </a:solidFill>
-                <a:latin typeface="Calibri"/>
-              </a:defRPr>
-            </a:pPr>
-            <a:r>
-              <a:t>Tools: Open Policy Agent (OPA), Checkov, Terraform Sentinel, Falco.</a:t>
-            </a:r>
-          </a:p>
-          <a:p>
-            <a:pPr>
-              <a:defRPr sz="2000">
-                <a:solidFill>
-                  <a:srgbClr val="333333"/>
-                </a:solidFill>
-                <a:latin typeface="Calibri"/>
-              </a:defRPr>
-            </a:pPr>
-            <a:r>
-              <a:t>Policy is evaluated automatically in CI/CD, in admission control and at runtime.</a:t>
-            </a:r>
-          </a:p>
-          <a:p>
-            <a:pPr>
-              <a:defRPr sz="2000">
-                <a:solidFill>
-                  <a:srgbClr val="333333"/>
-                </a:solidFill>
-                <a:latin typeface="Calibri"/>
-              </a:defRPr>
-            </a:pPr>
-            <a:r>
-              <a:t>Evidence is generated continuously, making audits easier and less manual.</a:t>
-            </a:r>
-          </a:p>
-        </p:txBody>
-      </p:sp>
-    </p:spTree>
-  </p:cSld>
-  <p:clrMapOvr>
-    <a:masterClrMapping/>
-  </p:clrMapOvr>
-</p:sld>
-</file>
-
-<file path=ppt/slides/slide13.xml><?xml version="1.0" encoding="utf-8"?>
-<p:sld xmlns:a="http://schemas.openxmlformats.org/drawingml/2006/main" xmlns:p="http://schemas.openxmlformats.org/presentationml/2006/main" xmlns:r="http://schemas.openxmlformats.org/officeDocument/2006/relationships">
-  <p:cSld>
-    <p:spTree>
-      <p:nvGrpSpPr>
-        <p:cNvPr id="1" name=""/>
-        <p:cNvGrpSpPr/>
-        <p:nvPr/>
-      </p:nvGrpSpPr>
-      <p:grpSpPr/>
-      <p:sp>
-        <p:nvSpPr>
-          <p:cNvPr id="2" name="Title 1"/>
-          <p:cNvSpPr>
-            <a:spLocks noGrp="1"/>
-          </p:cNvSpPr>
-          <p:nvPr>
-            <p:ph type="title"/>
-          </p:nvPr>
-        </p:nvSpPr>
-        <p:spPr/>
-        <p:txBody>
-          <a:bodyPr/>
-          <a:lstStyle/>
-          <a:p>
-            <a:r>
-              <a:rPr sz="3200" b="1">
-                <a:solidFill>
-                  <a:srgbClr val="1A3C6C"/>
-                </a:solidFill>
-                <a:latin typeface="Calibri"/>
-              </a:rPr>
-              <a:t>Security Best Practices for Platform Engineering</a:t>
-            </a:r>
-          </a:p>
-        </p:txBody>
-      </p:sp>
-      <p:sp>
-        <p:nvSpPr>
-          <p:cNvPr id="3" name="Content Placeholder 2"/>
-          <p:cNvSpPr>
-            <a:spLocks noGrp="1"/>
-          </p:cNvSpPr>
-          <p:nvPr>
-            <p:ph idx="1"/>
-          </p:nvPr>
-        </p:nvSpPr>
-        <p:spPr/>
-        <p:txBody>
-          <a:bodyPr/>
-          <a:lstStyle/>
-          <a:p>
-            <a:pPr>
-              <a:defRPr sz="2000">
-                <a:solidFill>
-                  <a:srgbClr val="333333"/>
-                </a:solidFill>
-                <a:latin typeface="Calibri"/>
-              </a:defRPr>
-            </a:pPr>
-            <a:r>
-              <a:t>Least privilege: narrow RBAC, no shared admin credentials, short-lived tokens.</a:t>
-            </a:r>
-          </a:p>
-          <a:p>
-            <a:pPr>
-              <a:defRPr sz="2000">
-                <a:solidFill>
-                  <a:srgbClr val="333333"/>
-                </a:solidFill>
-                <a:latin typeface="Calibri"/>
-              </a:defRPr>
-            </a:pPr>
-            <a:r>
-              <a:t>Secrets management: Vault, cloud KMS, Kubernetes External Secrets — never commit secrets.</a:t>
-            </a:r>
-          </a:p>
-          <a:p>
-            <a:pPr>
-              <a:defRPr sz="2000">
-                <a:solidFill>
-                  <a:srgbClr val="333333"/>
-                </a:solidFill>
-                <a:latin typeface="Calibri"/>
-              </a:defRPr>
-            </a:pPr>
-            <a:r>
-              <a:t>Immutable images: scan, sign and promote images through environments.</a:t>
-            </a:r>
-          </a:p>
-          <a:p>
-            <a:pPr>
-              <a:defRPr sz="2000">
-                <a:solidFill>
-                  <a:srgbClr val="333333"/>
-                </a:solidFill>
-                <a:latin typeface="Calibri"/>
-              </a:defRPr>
-            </a:pPr>
-            <a:r>
-              <a:t>Network segmentation: policies, service mesh mTLS, egress controls.</a:t>
-            </a:r>
-          </a:p>
-          <a:p>
-            <a:pPr>
-              <a:defRPr sz="2000">
-                <a:solidFill>
-                  <a:srgbClr val="333333"/>
-                </a:solidFill>
-                <a:latin typeface="Calibri"/>
-              </a:defRPr>
-            </a:pPr>
-            <a:r>
-              <a:t>Supply chain security: SBOMs, signed commits, dependency pinning.</a:t>
-            </a:r>
-          </a:p>
-        </p:txBody>
-      </p:sp>
-    </p:spTree>
-  </p:cSld>
-  <p:clrMapOvr>
-    <a:masterClrMapping/>
-  </p:clrMapOvr>
-</p:sld>
-</file>
-
-<file path=ppt/slides/slide14.xml><?xml version="1.0" encoding="utf-8"?>
 <p:sld xmlns:a="http://schemas.openxmlformats.org/drawingml/2006/main" xmlns:p="http://schemas.openxmlformats.org/presentationml/2006/main" xmlns:r="http://schemas.openxmlformats.org/officeDocument/2006/relationships">
   <p:cSld>
     <p:spTree>
@@ -6235,11 +6549,278 @@
                 </a:solidFill>
                 <a:latin typeface="Calibri"/>
               </a:rPr>
-              <a:t>Module 8</a:t>
+              <a:t>Module 7</a:t>
             </a:r>
             <a:br/>
             <a:r>
-              <a:t>Observability and Reliability</a:t>
+              <a:t>Security and Compliance (DevSecOps)</a:t>
+            </a:r>
+          </a:p>
+        </p:txBody>
+      </p:sp>
+    </p:spTree>
+  </p:cSld>
+  <p:clrMapOvr>
+    <a:masterClrMapping/>
+  </p:clrMapOvr>
+</p:sld>
+</file>
+
+<file path=ppt/slides/slide13.xml><?xml version="1.0" encoding="utf-8"?>
+<p:sld xmlns:a="http://schemas.openxmlformats.org/drawingml/2006/main" xmlns:p="http://schemas.openxmlformats.org/presentationml/2006/main" xmlns:r="http://schemas.openxmlformats.org/officeDocument/2006/relationships">
+  <p:cSld>
+    <p:spTree>
+      <p:nvGrpSpPr>
+        <p:cNvPr id="1" name=""/>
+        <p:cNvGrpSpPr/>
+        <p:nvPr/>
+      </p:nvGrpSpPr>
+      <p:grpSpPr/>
+      <p:sp>
+        <p:nvSpPr>
+          <p:cNvPr id="2" name="Title 1"/>
+          <p:cNvSpPr>
+            <a:spLocks noGrp="1"/>
+          </p:cNvSpPr>
+          <p:nvPr>
+            <p:ph type="title"/>
+          </p:nvPr>
+        </p:nvSpPr>
+        <p:spPr/>
+        <p:txBody>
+          <a:bodyPr/>
+          <a:lstStyle/>
+          <a:p/>
+        </p:txBody>
+      </p:sp>
+      <p:sp>
+        <p:nvSpPr>
+          <p:cNvPr id="3" name="TextBox 2"/>
+          <p:cNvSpPr txBox="1"/>
+          <p:nvPr/>
+        </p:nvSpPr>
+        <p:spPr>
+          <a:xfrm>
+            <a:off x="457200" y="274320"/>
+            <a:ext cx="8229600" cy="731520"/>
+          </a:xfrm>
+          <a:prstGeom prst="rect">
+            <a:avLst/>
+          </a:prstGeom>
+          <a:noFill/>
+        </p:spPr>
+        <p:txBody>
+          <a:bodyPr wrap="none">
+            <a:spAutoFit/>
+          </a:bodyPr>
+          <a:lstStyle/>
+          <a:p>
+            <a:r>
+              <a:rPr sz="3000" b="1">
+                <a:solidFill>
+                  <a:srgbClr val="1A3C6C"/>
+                </a:solidFill>
+                <a:latin typeface="Calibri"/>
+              </a:rPr>
+              <a:t>Shift Left - the Economics of Early</a:t>
+            </a:r>
+          </a:p>
+        </p:txBody>
+      </p:sp>
+      <p:pic>
+        <p:nvPicPr>
+          <p:cNvPr id="4" name="Picture 3" descr="07-devsecops-shift-left.png"/>
+          <p:cNvPicPr>
+            <a:picLocks noChangeAspect="1"/>
+          </p:cNvPicPr>
+          <p:nvPr/>
+        </p:nvPicPr>
+        <p:blipFill>
+          <a:blip r:embed="rId2"/>
+          <a:stretch>
+            <a:fillRect/>
+          </a:stretch>
+        </p:blipFill>
+        <p:spPr>
+          <a:xfrm>
+            <a:off x="914400" y="1097280"/>
+            <a:ext cx="7315200" cy="3613104"/>
+          </a:xfrm>
+          <a:prstGeom prst="rect">
+            <a:avLst/>
+          </a:prstGeom>
+        </p:spPr>
+      </p:pic>
+      <p:sp>
+        <p:nvSpPr>
+          <p:cNvPr id="5" name="TextBox 4"/>
+          <p:cNvSpPr txBox="1"/>
+          <p:nvPr/>
+        </p:nvSpPr>
+        <p:spPr>
+          <a:xfrm>
+            <a:off x="457200" y="5943600"/>
+            <a:ext cx="8229600" cy="731520"/>
+          </a:xfrm>
+          <a:prstGeom prst="rect">
+            <a:avLst/>
+          </a:prstGeom>
+          <a:noFill/>
+        </p:spPr>
+        <p:txBody>
+          <a:bodyPr wrap="none">
+            <a:spAutoFit/>
+          </a:bodyPr>
+          <a:lstStyle/>
+          <a:p>
+            <a:pPr algn="ctr"/>
+            <a:r>
+              <a:rPr sz="1600" b="0">
+                <a:solidFill>
+                  <a:srgbClr val="333333"/>
+                </a:solidFill>
+                <a:latin typeface="Calibri"/>
+              </a:rPr>
+              <a:t>The later a flaw is found, the more it costs - and the bigger its blast radius.</a:t>
+            </a:r>
+          </a:p>
+        </p:txBody>
+      </p:sp>
+    </p:spTree>
+  </p:cSld>
+  <p:clrMapOvr>
+    <a:masterClrMapping/>
+  </p:clrMapOvr>
+</p:sld>
+</file>
+
+<file path=ppt/slides/slide14.xml><?xml version="1.0" encoding="utf-8"?>
+<p:sld xmlns:a="http://schemas.openxmlformats.org/drawingml/2006/main" xmlns:p="http://schemas.openxmlformats.org/presentationml/2006/main" xmlns:r="http://schemas.openxmlformats.org/officeDocument/2006/relationships">
+  <p:cSld>
+    <p:spTree>
+      <p:nvGrpSpPr>
+        <p:cNvPr id="1" name=""/>
+        <p:cNvGrpSpPr/>
+        <p:nvPr/>
+      </p:nvGrpSpPr>
+      <p:grpSpPr/>
+      <p:sp>
+        <p:nvSpPr>
+          <p:cNvPr id="2" name="Title 1"/>
+          <p:cNvSpPr>
+            <a:spLocks noGrp="1"/>
+          </p:cNvSpPr>
+          <p:nvPr>
+            <p:ph type="title"/>
+          </p:nvPr>
+        </p:nvSpPr>
+        <p:spPr/>
+        <p:txBody>
+          <a:bodyPr/>
+          <a:lstStyle/>
+          <a:p>
+            <a:r>
+              <a:rPr sz="3200" b="1">
+                <a:solidFill>
+                  <a:srgbClr val="1A3C6C"/>
+                </a:solidFill>
+                <a:latin typeface="Calibri"/>
+              </a:rPr>
+              <a:t>The Scanner Taxonomy - What Checks What, When</a:t>
+            </a:r>
+          </a:p>
+        </p:txBody>
+      </p:sp>
+      <p:sp>
+        <p:nvSpPr>
+          <p:cNvPr id="3" name="Content Placeholder 2"/>
+          <p:cNvSpPr>
+            <a:spLocks noGrp="1"/>
+          </p:cNvSpPr>
+          <p:nvPr>
+            <p:ph idx="1"/>
+          </p:nvPr>
+        </p:nvSpPr>
+        <p:spPr/>
+        <p:txBody>
+          <a:bodyPr/>
+          <a:lstStyle/>
+          <a:p>
+            <a:pPr>
+              <a:defRPr sz="1900">
+                <a:solidFill>
+                  <a:srgbClr val="333333"/>
+                </a:solidFill>
+                <a:latin typeface="Calibri"/>
+              </a:defRPr>
+            </a:pPr>
+            <a:r>
+              <a:t>SAST: reads your source for flaw patterns (injection, crypto misuse) - at PR time.</a:t>
+            </a:r>
+          </a:p>
+          <a:p>
+            <a:pPr>
+              <a:defRPr sz="1900">
+                <a:solidFill>
+                  <a:srgbClr val="333333"/>
+                </a:solidFill>
+                <a:latin typeface="Calibri"/>
+              </a:defRPr>
+            </a:pPr>
+            <a:r>
+              <a:t>SCA: inventories dependencies against CVE databases - most real-world risk lives here.</a:t>
+            </a:r>
+          </a:p>
+          <a:p>
+            <a:pPr>
+              <a:defRPr sz="1900">
+                <a:solidFill>
+                  <a:srgbClr val="333333"/>
+                </a:solidFill>
+                <a:latin typeface="Calibri"/>
+              </a:defRPr>
+            </a:pPr>
+            <a:r>
+              <a:t>Secret scanning: credentials in code/history - at commit AND continuously.</a:t>
+            </a:r>
+          </a:p>
+          <a:p>
+            <a:pPr>
+              <a:defRPr sz="1900">
+                <a:solidFill>
+                  <a:srgbClr val="333333"/>
+                </a:solidFill>
+                <a:latin typeface="Calibri"/>
+              </a:defRPr>
+            </a:pPr>
+            <a:r>
+              <a:t>Container/image scanning: OS + language packages in the artifact (Trivy) - at build.</a:t>
+            </a:r>
+          </a:p>
+          <a:p>
+            <a:pPr>
+              <a:defRPr sz="1900">
+                <a:solidFill>
+                  <a:srgbClr val="333333"/>
+                </a:solidFill>
+                <a:latin typeface="Calibri"/>
+              </a:defRPr>
+            </a:pPr>
+            <a:r>
+              <a:t>IaC/config scanning: misconfigurations in Terraform/K8s (trivy config) - at PR.</a:t>
+            </a:r>
+          </a:p>
+          <a:p>
+            <a:pPr>
+              <a:defRPr sz="1900">
+                <a:solidFill>
+                  <a:srgbClr val="333333"/>
+                </a:solidFill>
+                <a:latin typeface="Calibri"/>
+              </a:defRPr>
+            </a:pPr>
+            <a:r>
+              <a:t>DAST: probes the RUNNING app from outside - staging, scheduled.</a:t>
             </a:r>
           </a:p>
         </p:txBody>
@@ -6276,98 +6857,96 @@
         <p:txBody>
           <a:bodyPr/>
           <a:lstStyle/>
-          <a:p/>
-        </p:txBody>
-      </p:sp>
-      <p:sp>
-        <p:nvSpPr>
-          <p:cNvPr id="3" name="TextBox 2"/>
-          <p:cNvSpPr txBox="1"/>
-          <p:nvPr/>
-        </p:nvSpPr>
-        <p:spPr>
-          <a:xfrm>
-            <a:off x="457200" y="274320"/>
-            <a:ext cx="8229600" cy="731520"/>
-          </a:xfrm>
-          <a:prstGeom prst="rect">
-            <a:avLst/>
-          </a:prstGeom>
-          <a:noFill/>
-        </p:spPr>
-        <p:txBody>
-          <a:bodyPr wrap="none">
-            <a:spAutoFit/>
-          </a:bodyPr>
-          <a:lstStyle/>
-          <a:p>
-            <a:r>
-              <a:rPr sz="3000" b="1">
+          <a:p>
+            <a:r>
+              <a:rPr sz="3200" b="1">
                 <a:solidFill>
                   <a:srgbClr val="1A3C6C"/>
                 </a:solidFill>
                 <a:latin typeface="Calibri"/>
               </a:rPr>
-              <a:t>The Three Pillars of Observability</a:t>
-            </a:r>
-          </a:p>
-        </p:txBody>
-      </p:sp>
-      <p:pic>
-        <p:nvPicPr>
-          <p:cNvPr id="4" name="Picture 3" descr="06-observability-pillars.png"/>
-          <p:cNvPicPr>
-            <a:picLocks noChangeAspect="1"/>
-          </p:cNvPicPr>
-          <p:nvPr/>
-        </p:nvPicPr>
-        <p:blipFill>
-          <a:blip r:embed="rId2"/>
-          <a:stretch>
-            <a:fillRect/>
-          </a:stretch>
-        </p:blipFill>
-        <p:spPr>
-          <a:xfrm>
-            <a:off x="914400" y="1097280"/>
-            <a:ext cx="7315200" cy="4575763"/>
-          </a:xfrm>
-          <a:prstGeom prst="rect">
-            <a:avLst/>
-          </a:prstGeom>
-        </p:spPr>
-      </p:pic>
-      <p:sp>
-        <p:nvSpPr>
-          <p:cNvPr id="5" name="TextBox 4"/>
-          <p:cNvSpPr txBox="1"/>
-          <p:nvPr/>
-        </p:nvSpPr>
-        <p:spPr>
-          <a:xfrm>
-            <a:off x="457200" y="5943600"/>
-            <a:ext cx="8229600" cy="731520"/>
-          </a:xfrm>
-          <a:prstGeom prst="rect">
-            <a:avLst/>
-          </a:prstGeom>
-          <a:noFill/>
-        </p:spPr>
-        <p:txBody>
-          <a:bodyPr wrap="none">
-            <a:spAutoFit/>
-          </a:bodyPr>
-          <a:lstStyle/>
-          <a:p>
-            <a:pPr algn="ctr"/>
-            <a:r>
-              <a:rPr sz="1600" b="0">
-                <a:solidFill>
-                  <a:srgbClr val="333333"/>
-                </a:solidFill>
-                <a:latin typeface="Calibri"/>
-              </a:rPr>
-              <a:t>Metrics, logs and traces answer different operational questions.</a:t>
+              <a:t>Supply Chain Security - Your Pipeline Is a Target</a:t>
+            </a:r>
+          </a:p>
+        </p:txBody>
+      </p:sp>
+      <p:sp>
+        <p:nvSpPr>
+          <p:cNvPr id="3" name="Content Placeholder 2"/>
+          <p:cNvSpPr>
+            <a:spLocks noGrp="1"/>
+          </p:cNvSpPr>
+          <p:nvPr>
+            <p:ph idx="1"/>
+          </p:nvPr>
+        </p:nvSpPr>
+        <p:spPr/>
+        <p:txBody>
+          <a:bodyPr/>
+          <a:lstStyle/>
+          <a:p>
+            <a:pPr>
+              <a:defRPr sz="1900">
+                <a:solidFill>
+                  <a:srgbClr val="333333"/>
+                </a:solidFill>
+                <a:latin typeface="Calibri"/>
+              </a:defRPr>
+            </a:pPr>
+            <a:r>
+              <a:t>SolarWinds: the BUILD SYSTEM was compromised - customers shipped the attacker's code.</a:t>
+            </a:r>
+          </a:p>
+          <a:p>
+            <a:pPr>
+              <a:defRPr sz="1900">
+                <a:solidFill>
+                  <a:srgbClr val="333333"/>
+                </a:solidFill>
+                <a:latin typeface="Calibri"/>
+              </a:defRPr>
+            </a:pPr>
+            <a:r>
+              <a:t>Attack surface: dependencies, base images, CI actions, registries, build infrastructure.</a:t>
+            </a:r>
+          </a:p>
+          <a:p>
+            <a:pPr>
+              <a:defRPr sz="1900">
+                <a:solidFill>
+                  <a:srgbClr val="333333"/>
+                </a:solidFill>
+                <a:latin typeface="Calibri"/>
+              </a:defRPr>
+            </a:pPr>
+            <a:r>
+              <a:t>SBOM: a machine-readable inventory of everything inside your artifact (Trivy can emit one).</a:t>
+            </a:r>
+          </a:p>
+          <a:p>
+            <a:pPr>
+              <a:defRPr sz="1900">
+                <a:solidFill>
+                  <a:srgbClr val="333333"/>
+                </a:solidFill>
+                <a:latin typeface="Calibri"/>
+              </a:defRPr>
+            </a:pPr>
+            <a:r>
+              <a:t>Countermeasures: pin versions AND digests, sign artifacts (cosign), least-privilege tokens.</a:t>
+            </a:r>
+          </a:p>
+          <a:p>
+            <a:pPr>
+              <a:defRPr sz="1900">
+                <a:solidFill>
+                  <a:srgbClr val="333333"/>
+                </a:solidFill>
+                <a:latin typeface="Calibri"/>
+              </a:defRPr>
+            </a:pPr>
+            <a:r>
+              <a:t>SLSA: a maturity ladder for build integrity - know which level you need.</a:t>
             </a:r>
           </a:p>
         </p:txBody>
@@ -6412,7 +6991,7 @@
                 </a:solidFill>
                 <a:latin typeface="Calibri"/>
               </a:rPr>
-              <a:t>Ensuring System Reliability</a:t>
+              <a:t>Compliance as Code (OPA, Rego, Conftest)</a:t>
             </a:r>
           </a:p>
         </p:txBody>
@@ -6433,67 +7012,67 @@
           <a:lstStyle/>
           <a:p>
             <a:pPr>
-              <a:defRPr sz="2000">
-                <a:solidFill>
-                  <a:srgbClr val="333333"/>
-                </a:solidFill>
-                <a:latin typeface="Calibri"/>
-              </a:defRPr>
-            </a:pPr>
-            <a:r>
-              <a:t>Reliability is a feature, not an afterthought.</a:t>
-            </a:r>
-          </a:p>
-          <a:p>
-            <a:pPr>
-              <a:defRPr sz="2000">
-                <a:solidFill>
-                  <a:srgbClr val="333333"/>
-                </a:solidFill>
-                <a:latin typeface="Calibri"/>
-              </a:defRPr>
-            </a:pPr>
-            <a:r>
-              <a:t>SLOs (Service Level Objectives) define acceptable reliability for user journeys.</a:t>
-            </a:r>
-          </a:p>
-          <a:p>
-            <a:pPr>
-              <a:defRPr sz="2000">
-                <a:solidFill>
-                  <a:srgbClr val="333333"/>
-                </a:solidFill>
-                <a:latin typeface="Calibri"/>
-              </a:defRPr>
-            </a:pPr>
-            <a:r>
-              <a:t>SLIs measure it; error budgets balance innovation against stability.</a:t>
-            </a:r>
-          </a:p>
-          <a:p>
-            <a:pPr>
-              <a:defRPr sz="2000">
-                <a:solidFill>
-                  <a:srgbClr val="333333"/>
-                </a:solidFill>
-                <a:latin typeface="Calibri"/>
-              </a:defRPr>
-            </a:pPr>
-            <a:r>
-              <a:t>Design for failure: retries, circuit breakers, bulkheads, graceful degradation.</a:t>
-            </a:r>
-          </a:p>
-          <a:p>
-            <a:pPr>
-              <a:defRPr sz="2000">
-                <a:solidFill>
-                  <a:srgbClr val="333333"/>
-                </a:solidFill>
-                <a:latin typeface="Calibri"/>
-              </a:defRPr>
-            </a:pPr>
-            <a:r>
-              <a:t>Chaos engineering validates assumptions by injecting controlled failures.</a:t>
+              <a:defRPr sz="1900">
+                <a:solidFill>
+                  <a:srgbClr val="333333"/>
+                </a:solidFill>
+                <a:latin typeface="Calibri"/>
+              </a:defRPr>
+            </a:pPr>
+            <a:r>
+              <a:t>Wiki rules are wishes; encoded policies are guarantees - evaluated on every change.</a:t>
+            </a:r>
+          </a:p>
+          <a:p>
+            <a:pPr>
+              <a:defRPr sz="1900">
+                <a:solidFill>
+                  <a:srgbClr val="333333"/>
+                </a:solidFill>
+                <a:latin typeface="Calibri"/>
+              </a:defRPr>
+            </a:pPr>
+            <a:r>
+              <a:t>OPA/Rego: a general policy engine - one language for K8s, Terraform, pipelines, APIs.</a:t>
+            </a:r>
+          </a:p>
+          <a:p>
+            <a:pPr>
+              <a:defRPr sz="1900">
+                <a:solidFill>
+                  <a:srgbClr val="333333"/>
+                </a:solidFill>
+                <a:latin typeface="Calibri"/>
+              </a:defRPr>
+            </a:pPr>
+            <a:r>
+              <a:t>Conftest in CI tests rendered configs; admission controllers enforce at the cluster door.</a:t>
+            </a:r>
+          </a:p>
+          <a:p>
+            <a:pPr>
+              <a:defRPr sz="1900">
+                <a:solidFill>
+                  <a:srgbClr val="333333"/>
+                </a:solidFill>
+                <a:latin typeface="Calibri"/>
+              </a:defRPr>
+            </a:pPr>
+            <a:r>
+              <a:t>Test what SHIPS: rendered output, not raw files (labels added at render time!).</a:t>
+            </a:r>
+          </a:p>
+          <a:p>
+            <a:pPr>
+              <a:defRPr sz="1900">
+                <a:solidFill>
+                  <a:srgbClr val="333333"/>
+                </a:solidFill>
+                <a:latin typeface="Calibri"/>
+              </a:defRPr>
+            </a:pPr>
+            <a:r>
+              <a:t>Audit evidence becomes: the policy file + Git history + pipeline logs. Auditors love it.</a:t>
             </a:r>
           </a:p>
         </p:txBody>
@@ -6530,98 +7109,96 @@
         <p:txBody>
           <a:bodyPr/>
           <a:lstStyle/>
-          <a:p/>
-        </p:txBody>
-      </p:sp>
-      <p:sp>
-        <p:nvSpPr>
-          <p:cNvPr id="3" name="TextBox 2"/>
-          <p:cNvSpPr txBox="1"/>
-          <p:nvPr/>
-        </p:nvSpPr>
-        <p:spPr>
-          <a:xfrm>
-            <a:off x="457200" y="274320"/>
-            <a:ext cx="8229600" cy="731520"/>
-          </a:xfrm>
-          <a:prstGeom prst="rect">
-            <a:avLst/>
-          </a:prstGeom>
-          <a:noFill/>
-        </p:spPr>
-        <p:txBody>
-          <a:bodyPr wrap="none">
-            <a:spAutoFit/>
-          </a:bodyPr>
-          <a:lstStyle/>
-          <a:p>
-            <a:r>
-              <a:rPr sz="3000" b="1">
+          <a:p>
+            <a:r>
+              <a:rPr sz="3200" b="1">
                 <a:solidFill>
                   <a:srgbClr val="1A3C6C"/>
                 </a:solidFill>
                 <a:latin typeface="Calibri"/>
               </a:rPr>
-              <a:t>Incident Response Lifecycle</a:t>
-            </a:r>
-          </a:p>
-        </p:txBody>
-      </p:sp>
-      <p:pic>
-        <p:nvPicPr>
-          <p:cNvPr id="4" name="Picture 3" descr="10-incident-lifecycle.png"/>
-          <p:cNvPicPr>
-            <a:picLocks noChangeAspect="1"/>
-          </p:cNvPicPr>
-          <p:nvPr/>
-        </p:nvPicPr>
-        <p:blipFill>
-          <a:blip r:embed="rId2"/>
-          <a:stretch>
-            <a:fillRect/>
-          </a:stretch>
-        </p:blipFill>
-        <p:spPr>
-          <a:xfrm>
-            <a:off x="914400" y="1097280"/>
-            <a:ext cx="7315200" cy="5439239"/>
-          </a:xfrm>
-          <a:prstGeom prst="rect">
-            <a:avLst/>
-          </a:prstGeom>
-        </p:spPr>
-      </p:pic>
-      <p:sp>
-        <p:nvSpPr>
-          <p:cNvPr id="5" name="TextBox 4"/>
-          <p:cNvSpPr txBox="1"/>
-          <p:nvPr/>
-        </p:nvSpPr>
-        <p:spPr>
-          <a:xfrm>
-            <a:off x="457200" y="5943600"/>
-            <a:ext cx="8229600" cy="731520"/>
-          </a:xfrm>
-          <a:prstGeom prst="rect">
-            <a:avLst/>
-          </a:prstGeom>
-          <a:noFill/>
-        </p:spPr>
-        <p:txBody>
-          <a:bodyPr wrap="none">
-            <a:spAutoFit/>
-          </a:bodyPr>
-          <a:lstStyle/>
-          <a:p>
-            <a:pPr algn="ctr"/>
-            <a:r>
-              <a:rPr sz="1600" b="0">
-                <a:solidFill>
-                  <a:srgbClr val="333333"/>
-                </a:solidFill>
-                <a:latin typeface="Calibri"/>
-              </a:rPr>
-              <a:t>Detect → Triage → Mitigate → Resolve → Postmortem → Remediate.</a:t>
+              <a:t>Runtime Hardening - Platform Defaults, Not Team Chores</a:t>
+            </a:r>
+          </a:p>
+        </p:txBody>
+      </p:sp>
+      <p:sp>
+        <p:nvSpPr>
+          <p:cNvPr id="3" name="Content Placeholder 2"/>
+          <p:cNvSpPr>
+            <a:spLocks noGrp="1"/>
+          </p:cNvSpPr>
+          <p:nvPr>
+            <p:ph idx="1"/>
+          </p:nvPr>
+        </p:nvSpPr>
+        <p:spPr/>
+        <p:txBody>
+          <a:bodyPr/>
+          <a:lstStyle/>
+          <a:p>
+            <a:pPr>
+              <a:defRPr sz="1900">
+                <a:solidFill>
+                  <a:srgbClr val="333333"/>
+                </a:solidFill>
+                <a:latin typeface="Calibri"/>
+              </a:defRPr>
+            </a:pPr>
+            <a:r>
+              <a:t>Containers: non-root user, read-only root filesystem, drop ALL capabilities, seccomp.</a:t>
+            </a:r>
+          </a:p>
+          <a:p>
+            <a:pPr>
+              <a:defRPr sz="1900">
+                <a:solidFill>
+                  <a:srgbClr val="333333"/>
+                </a:solidFill>
+                <a:latin typeface="Calibri"/>
+              </a:defRPr>
+            </a:pPr>
+            <a:r>
+              <a:t>Cluster: RBAC least-privilege, NetworkPolicies (default-deny), no wildcard admin bindings.</a:t>
+            </a:r>
+          </a:p>
+          <a:p>
+            <a:pPr>
+              <a:defRPr sz="1900">
+                <a:solidFill>
+                  <a:srgbClr val="333333"/>
+                </a:solidFill>
+                <a:latin typeface="Calibri"/>
+              </a:defRPr>
+            </a:pPr>
+            <a:r>
+              <a:t>Secrets: a manager (Vault/KMS/external-secrets), rotation, never env-dumped or committed.</a:t>
+            </a:r>
+          </a:p>
+          <a:p>
+            <a:pPr>
+              <a:defRPr sz="1900">
+                <a:solidFill>
+                  <a:srgbClr val="333333"/>
+                </a:solidFill>
+                <a:latin typeface="Calibri"/>
+              </a:defRPr>
+            </a:pPr>
+            <a:r>
+              <a:t>Least privilege EVERYWHERE: pipeline tokens, service accounts, registry access.</a:t>
+            </a:r>
+          </a:p>
+          <a:p>
+            <a:pPr>
+              <a:defRPr sz="1900">
+                <a:solidFill>
+                  <a:srgbClr val="333333"/>
+                </a:solidFill>
+                <a:latin typeface="Calibri"/>
+              </a:defRPr>
+            </a:pPr>
+            <a:r>
+              <a:t>The golden path ships hardened - teams inherit security instead of re-deriving it.</a:t>
             </a:r>
           </a:p>
         </p:txBody>
@@ -6666,7 +7243,7 @@
                 </a:solidFill>
                 <a:latin typeface="Calibri"/>
               </a:rPr>
-              <a:t>Postmortems and Learning</a:t>
+              <a:t>Triage Discipline - Living With Scanner Output</a:t>
             </a:r>
           </a:p>
         </p:txBody>
@@ -6687,67 +7264,67 @@
           <a:lstStyle/>
           <a:p>
             <a:pPr>
-              <a:defRPr sz="2000">
-                <a:solidFill>
-                  <a:srgbClr val="333333"/>
-                </a:solidFill>
-                <a:latin typeface="Calibri"/>
-              </a:defRPr>
-            </a:pPr>
-            <a:r>
-              <a:t>Blameless postmortems focus on system and process, not individual fault.</a:t>
-            </a:r>
-          </a:p>
-          <a:p>
-            <a:pPr>
-              <a:defRPr sz="2000">
-                <a:solidFill>
-                  <a:srgbClr val="333333"/>
-                </a:solidFill>
-                <a:latin typeface="Calibri"/>
-              </a:defRPr>
-            </a:pPr>
-            <a:r>
-              <a:t>Capture timeline, impact, root causes, mitigations and action items.</a:t>
-            </a:r>
-          </a:p>
-          <a:p>
-            <a:pPr>
-              <a:defRPr sz="2000">
-                <a:solidFill>
-                  <a:srgbClr val="333333"/>
-                </a:solidFill>
-                <a:latin typeface="Calibri"/>
-              </a:defRPr>
-            </a:pPr>
-            <a:r>
-              <a:t>Publish internally to spread learning and prevent recurrence.</a:t>
-            </a:r>
-          </a:p>
-          <a:p>
-            <a:pPr>
-              <a:defRPr sz="2000">
-                <a:solidFill>
-                  <a:srgbClr val="333333"/>
-                </a:solidFill>
-                <a:latin typeface="Calibri"/>
-              </a:defRPr>
-            </a:pPr>
-            <a:r>
-              <a:t>Track action items like any other backlog work, with owners and due dates.</a:t>
-            </a:r>
-          </a:p>
-          <a:p>
-            <a:pPr>
-              <a:defRPr sz="2000">
-                <a:solidFill>
-                  <a:srgbClr val="333333"/>
-                </a:solidFill>
-                <a:latin typeface="Calibri"/>
-              </a:defRPr>
-            </a:pPr>
-            <a:r>
-              <a:t>Celebrate the response as well as diagnosing the cause.</a:t>
+              <a:defRPr sz="1900">
+                <a:solidFill>
+                  <a:srgbClr val="333333"/>
+                </a:solidFill>
+                <a:latin typeface="Calibri"/>
+              </a:defRPr>
+            </a:pPr>
+            <a:r>
+              <a:t>Severity (CVSS) is not risk: context - exposure, reachability, data - changes everything.</a:t>
+            </a:r>
+          </a:p>
+          <a:p>
+            <a:pPr>
+              <a:defRPr sz="1900">
+                <a:solidFill>
+                  <a:srgbClr val="333333"/>
+                </a:solidFill>
+                <a:latin typeface="Calibri"/>
+              </a:defRPr>
+            </a:pPr>
+            <a:r>
+              <a:t>First questions: is it FIXABLE? is the vulnerable path even reachable in our usage?</a:t>
+            </a:r>
+          </a:p>
+          <a:p>
+            <a:pPr>
+              <a:defRPr sz="1900">
+                <a:solidFill>
+                  <a:srgbClr val="333333"/>
+                </a:solidFill>
+                <a:latin typeface="Calibri"/>
+              </a:defRPr>
+            </a:pPr>
+            <a:r>
+              <a:t>--ignore-unfixed in gates: block only what a developer can action today.</a:t>
+            </a:r>
+          </a:p>
+          <a:p>
+            <a:pPr>
+              <a:defRPr sz="1900">
+                <a:solidFill>
+                  <a:srgbClr val="333333"/>
+                </a:solidFill>
+                <a:latin typeface="Calibri"/>
+              </a:defRPr>
+            </a:pPr>
+            <a:r>
+              <a:t>Accepted risks get an owner and an EXPIRY date - never a permanent ignore file.</a:t>
+            </a:r>
+          </a:p>
+          <a:p>
+            <a:pPr>
+              <a:defRPr sz="1900">
+                <a:solidFill>
+                  <a:srgbClr val="333333"/>
+                </a:solidFill>
+                <a:latin typeface="Calibri"/>
+              </a:defRPr>
+            </a:pPr>
+            <a:r>
+              <a:t>Track vulnerability debt like tech debt; watch the trend, not just today's count.</a:t>
             </a:r>
           </a:p>
         </p:txBody>
@@ -6784,6 +7361,30 @@
         <p:txBody>
           <a:bodyPr/>
           <a:lstStyle/>
+          <a:p/>
+        </p:txBody>
+      </p:sp>
+      <p:sp>
+        <p:nvSpPr>
+          <p:cNvPr id="3" name="TextBox 2"/>
+          <p:cNvSpPr txBox="1"/>
+          <p:nvPr/>
+        </p:nvSpPr>
+        <p:spPr>
+          <a:xfrm>
+            <a:off x="457200" y="274320"/>
+            <a:ext cx="8229600" cy="731520"/>
+          </a:xfrm>
+          <a:prstGeom prst="rect">
+            <a:avLst/>
+          </a:prstGeom>
+          <a:noFill/>
+        </p:spPr>
+        <p:txBody>
+          <a:bodyPr wrap="none">
+            <a:spAutoFit/>
+          </a:bodyPr>
+          <a:lstStyle/>
           <a:p>
             <a:r>
               <a:rPr sz="3200" b="1">
@@ -6792,88 +7393,77 @@
                 </a:solidFill>
                 <a:latin typeface="Calibri"/>
               </a:rPr>
-              <a:t>Game Days: Practise Before It Hurts</a:t>
-            </a:r>
-          </a:p>
-        </p:txBody>
-      </p:sp>
-      <p:sp>
-        <p:nvSpPr>
-          <p:cNvPr id="3" name="Content Placeholder 2"/>
-          <p:cNvSpPr>
-            <a:spLocks noGrp="1"/>
-          </p:cNvSpPr>
-          <p:nvPr>
-            <p:ph idx="1"/>
-          </p:nvPr>
-        </p:nvSpPr>
-        <p:spPr/>
-        <p:txBody>
-          <a:bodyPr/>
-          <a:lstStyle/>
-          <a:p>
-            <a:pPr>
-              <a:defRPr sz="2000">
-                <a:solidFill>
-                  <a:srgbClr val="333333"/>
-                </a:solidFill>
-                <a:latin typeface="Calibri"/>
-              </a:defRPr>
-            </a:pPr>
-            <a:r>
-              <a:t>A game day is a rehearsed incident: someone breaks a system on purpose.</a:t>
-            </a:r>
-          </a:p>
-          <a:p>
-            <a:pPr>
-              <a:defRPr sz="2000">
-                <a:solidFill>
-                  <a:srgbClr val="333333"/>
-                </a:solidFill>
-                <a:latin typeface="Calibri"/>
-              </a:defRPr>
-            </a:pPr>
-            <a:r>
-              <a:t>Responders use only their observability tools - no peeking at the cause.</a:t>
-            </a:r>
-          </a:p>
-          <a:p>
-            <a:pPr>
-              <a:defRPr sz="2000">
-                <a:solidFill>
-                  <a:srgbClr val="333333"/>
-                </a:solidFill>
-                <a:latin typeface="Calibri"/>
-              </a:defRPr>
-            </a:pPr>
-            <a:r>
-              <a:t>Measures the real MTTD and MTTR of your tooling and your team.</a:t>
-            </a:r>
-          </a:p>
-          <a:p>
-            <a:pPr>
-              <a:defRPr sz="2000">
-                <a:solidFill>
-                  <a:srgbClr val="333333"/>
-                </a:solidFill>
-                <a:latin typeface="Calibri"/>
-              </a:defRPr>
-            </a:pPr>
-            <a:r>
-              <a:t>Ends with the same blameless postmortem as a real incident.</a:t>
-            </a:r>
-          </a:p>
-          <a:p>
-            <a:pPr>
-              <a:defRPr sz="2000">
-                <a:solidFill>
-                  <a:srgbClr val="333333"/>
-                </a:solidFill>
-                <a:latin typeface="Calibri"/>
-              </a:defRPr>
-            </a:pPr>
-            <a:r>
-              <a:t>Lab 08 Part G: your neighbour stops the payment service - find it, fix it, write it up.</a:t>
+              <a:t>Module 7 - Key Takeaway</a:t>
+            </a:r>
+          </a:p>
+        </p:txBody>
+      </p:sp>
+      <p:sp>
+        <p:nvSpPr>
+          <p:cNvPr id="4" name="TextBox 3"/>
+          <p:cNvSpPr txBox="1"/>
+          <p:nvPr/>
+        </p:nvSpPr>
+        <p:spPr>
+          <a:xfrm>
+            <a:off x="914400" y="1828800"/>
+            <a:ext cx="7315200" cy="3200400"/>
+          </a:xfrm>
+          <a:prstGeom prst="rect">
+            <a:avLst/>
+          </a:prstGeom>
+          <a:noFill/>
+        </p:spPr>
+        <p:txBody>
+          <a:bodyPr wrap="square">
+            <a:spAutoFit/>
+          </a:bodyPr>
+          <a:lstStyle/>
+          <a:p>
+            <a:pPr algn="ctr"/>
+            <a:r>
+              <a:rPr sz="2800" b="0">
+                <a:solidFill>
+                  <a:srgbClr val="4A90D9"/>
+                </a:solidFill>
+                <a:latin typeface="Calibri"/>
+              </a:rPr>
+              <a:t>"Make the secure path the easy path. Scanners inform, gates enforce, policies encode the rules, and the platform ships it all as the default - so security happens even on a deadline."</a:t>
+            </a:r>
+          </a:p>
+        </p:txBody>
+      </p:sp>
+      <p:sp>
+        <p:nvSpPr>
+          <p:cNvPr id="5" name="TextBox 4"/>
+          <p:cNvSpPr txBox="1"/>
+          <p:nvPr/>
+        </p:nvSpPr>
+        <p:spPr>
+          <a:xfrm>
+            <a:off x="914400" y="5029200"/>
+            <a:ext cx="7315200" cy="731520"/>
+          </a:xfrm>
+          <a:prstGeom prst="rect">
+            <a:avLst/>
+          </a:prstGeom>
+          <a:noFill/>
+        </p:spPr>
+        <p:txBody>
+          <a:bodyPr wrap="none">
+            <a:spAutoFit/>
+          </a:bodyPr>
+          <a:lstStyle/>
+          <a:p>
+            <a:pPr algn="r"/>
+            <a:r>
+              <a:rPr sz="1800" b="0">
+                <a:solidFill>
+                  <a:srgbClr val="333333"/>
+                </a:solidFill>
+                <a:latin typeface="Calibri"/>
+              </a:rPr>
+              <a:t>— Course synthesis</a:t>
             </a:r>
           </a:p>
         </p:txBody>
@@ -7103,11 +7693,11 @@
                 </a:solidFill>
                 <a:latin typeface="Calibri"/>
               </a:rPr>
-              <a:t>Module 9</a:t>
+              <a:t>Module 8</a:t>
             </a:r>
             <a:br/>
             <a:r>
-              <a:t>Platform as a Product</a:t>
+              <a:t>Observability and Reliability</a:t>
             </a:r>
           </a:p>
         </p:txBody>
@@ -7144,98 +7734,96 @@
         <p:txBody>
           <a:bodyPr/>
           <a:lstStyle/>
-          <a:p/>
-        </p:txBody>
-      </p:sp>
-      <p:sp>
-        <p:nvSpPr>
-          <p:cNvPr id="3" name="TextBox 2"/>
-          <p:cNvSpPr txBox="1"/>
-          <p:nvPr/>
-        </p:nvSpPr>
-        <p:spPr>
-          <a:xfrm>
-            <a:off x="457200" y="274320"/>
-            <a:ext cx="8229600" cy="731520"/>
-          </a:xfrm>
-          <a:prstGeom prst="rect">
-            <a:avLst/>
-          </a:prstGeom>
-          <a:noFill/>
-        </p:spPr>
-        <p:txBody>
-          <a:bodyPr wrap="none">
-            <a:spAutoFit/>
-          </a:bodyPr>
-          <a:lstStyle/>
-          <a:p>
-            <a:r>
-              <a:rPr sz="3000" b="1">
+          <a:p>
+            <a:r>
+              <a:rPr sz="3200" b="1">
                 <a:solidFill>
                   <a:srgbClr val="1A3C6C"/>
                 </a:solidFill>
                 <a:latin typeface="Calibri"/>
               </a:rPr>
-              <a:t>Platform as a Product</a:t>
-            </a:r>
-          </a:p>
-        </p:txBody>
-      </p:sp>
-      <p:pic>
-        <p:nvPicPr>
-          <p:cNvPr id="4" name="Picture 3" descr="08-platform-as-product.png"/>
-          <p:cNvPicPr>
-            <a:picLocks noChangeAspect="1"/>
-          </p:cNvPicPr>
-          <p:nvPr/>
-        </p:nvPicPr>
-        <p:blipFill>
-          <a:blip r:embed="rId2"/>
-          <a:stretch>
-            <a:fillRect/>
-          </a:stretch>
-        </p:blipFill>
-        <p:spPr>
-          <a:xfrm>
-            <a:off x="914400" y="1097280"/>
-            <a:ext cx="7315200" cy="4332707"/>
-          </a:xfrm>
-          <a:prstGeom prst="rect">
-            <a:avLst/>
-          </a:prstGeom>
-        </p:spPr>
-      </p:pic>
-      <p:sp>
-        <p:nvSpPr>
-          <p:cNvPr id="5" name="TextBox 4"/>
-          <p:cNvSpPr txBox="1"/>
-          <p:nvPr/>
-        </p:nvSpPr>
-        <p:spPr>
-          <a:xfrm>
-            <a:off x="457200" y="5943600"/>
-            <a:ext cx="8229600" cy="731520"/>
-          </a:xfrm>
-          <a:prstGeom prst="rect">
-            <a:avLst/>
-          </a:prstGeom>
-          <a:noFill/>
-        </p:spPr>
-        <p:txBody>
-          <a:bodyPr wrap="none">
-            <a:spAutoFit/>
-          </a:bodyPr>
-          <a:lstStyle/>
-          <a:p>
-            <a:pPr algn="ctr"/>
-            <a:r>
-              <a:rPr sz="1600" b="0">
-                <a:solidFill>
-                  <a:srgbClr val="333333"/>
-                </a:solidFill>
-                <a:latin typeface="Calibri"/>
-              </a:rPr>
-              <a:t>A self-service internal platform accelerates stream-aligned teams.</a:t>
+              <a:t>Monitoring Asks Known Questions; Observability Answers New Ones</a:t>
+            </a:r>
+          </a:p>
+        </p:txBody>
+      </p:sp>
+      <p:sp>
+        <p:nvSpPr>
+          <p:cNvPr id="3" name="Content Placeholder 2"/>
+          <p:cNvSpPr>
+            <a:spLocks noGrp="1"/>
+          </p:cNvSpPr>
+          <p:nvPr>
+            <p:ph idx="1"/>
+          </p:nvPr>
+        </p:nvSpPr>
+        <p:spPr/>
+        <p:txBody>
+          <a:bodyPr/>
+          <a:lstStyle/>
+          <a:p>
+            <a:pPr>
+              <a:defRPr sz="1900">
+                <a:solidFill>
+                  <a:srgbClr val="333333"/>
+                </a:solidFill>
+                <a:latin typeface="Calibri"/>
+              </a:defRPr>
+            </a:pPr>
+            <a:r>
+              <a:t>Monitoring: predefined checks for failures you ANTICIPATED (disk full, service down).</a:t>
+            </a:r>
+          </a:p>
+          <a:p>
+            <a:pPr>
+              <a:defRPr sz="1900">
+                <a:solidFill>
+                  <a:srgbClr val="333333"/>
+                </a:solidFill>
+                <a:latin typeface="Calibri"/>
+              </a:defRPr>
+            </a:pPr>
+            <a:r>
+              <a:t>Observability: can you interrogate the system about failures you NEVER predicted?</a:t>
+            </a:r>
+          </a:p>
+          <a:p>
+            <a:pPr>
+              <a:defRPr sz="1900">
+                <a:solidFill>
+                  <a:srgbClr val="333333"/>
+                </a:solidFill>
+                <a:latin typeface="Calibri"/>
+              </a:defRPr>
+            </a:pPr>
+            <a:r>
+              <a:t>Distributed systems fail in emergent ways - the interesting outage is always novel.</a:t>
+            </a:r>
+          </a:p>
+          <a:p>
+            <a:pPr>
+              <a:defRPr sz="1900">
+                <a:solidFill>
+                  <a:srgbClr val="333333"/>
+                </a:solidFill>
+                <a:latin typeface="Calibri"/>
+              </a:defRPr>
+            </a:pPr>
+            <a:r>
+              <a:t>Property of the system: rich telemetry with labels/context you can slice ad hoc.</a:t>
+            </a:r>
+          </a:p>
+          <a:p>
+            <a:pPr>
+              <a:defRPr sz="1900">
+                <a:solidFill>
+                  <a:srgbClr val="333333"/>
+                </a:solidFill>
+                <a:latin typeface="Calibri"/>
+              </a:defRPr>
+            </a:pPr>
+            <a:r>
+              <a:t>Test: 'orders from one customer segment are slow - why?' answerable without a new deploy?</a:t>
             </a:r>
           </a:p>
         </p:txBody>
@@ -7272,96 +7860,98 @@
         <p:txBody>
           <a:bodyPr/>
           <a:lstStyle/>
-          <a:p>
-            <a:r>
-              <a:rPr sz="3200" b="1">
+          <a:p/>
+        </p:txBody>
+      </p:sp>
+      <p:sp>
+        <p:nvSpPr>
+          <p:cNvPr id="3" name="TextBox 2"/>
+          <p:cNvSpPr txBox="1"/>
+          <p:nvPr/>
+        </p:nvSpPr>
+        <p:spPr>
+          <a:xfrm>
+            <a:off x="457200" y="274320"/>
+            <a:ext cx="8229600" cy="731520"/>
+          </a:xfrm>
+          <a:prstGeom prst="rect">
+            <a:avLst/>
+          </a:prstGeom>
+          <a:noFill/>
+        </p:spPr>
+        <p:txBody>
+          <a:bodyPr wrap="none">
+            <a:spAutoFit/>
+          </a:bodyPr>
+          <a:lstStyle/>
+          <a:p>
+            <a:r>
+              <a:rPr sz="3000" b="1">
                 <a:solidFill>
                   <a:srgbClr val="1A3C6C"/>
                 </a:solidFill>
                 <a:latin typeface="Calibri"/>
               </a:rPr>
-              <a:t>User-Centric Design for Internal Platforms</a:t>
-            </a:r>
-          </a:p>
-        </p:txBody>
-      </p:sp>
-      <p:sp>
-        <p:nvSpPr>
-          <p:cNvPr id="3" name="Content Placeholder 2"/>
-          <p:cNvSpPr>
-            <a:spLocks noGrp="1"/>
-          </p:cNvSpPr>
-          <p:nvPr>
-            <p:ph idx="1"/>
-          </p:nvPr>
-        </p:nvSpPr>
-        <p:spPr/>
-        <p:txBody>
-          <a:bodyPr/>
-          <a:lstStyle/>
-          <a:p>
-            <a:pPr>
-              <a:defRPr sz="2000">
-                <a:solidFill>
-                  <a:srgbClr val="333333"/>
-                </a:solidFill>
-                <a:latin typeface="Calibri"/>
-              </a:defRPr>
-            </a:pPr>
-            <a:r>
-              <a:t>Interview teams, map developer journeys and identify pain points.</a:t>
-            </a:r>
-          </a:p>
-          <a:p>
-            <a:pPr>
-              <a:defRPr sz="2000">
-                <a:solidFill>
-                  <a:srgbClr val="333333"/>
-                </a:solidFill>
-                <a:latin typeface="Calibri"/>
-              </a:defRPr>
-            </a:pPr>
-            <a:r>
-              <a:t>Build golden paths: the easiest way to do the right thing.</a:t>
-            </a:r>
-          </a:p>
-          <a:p>
-            <a:pPr>
-              <a:defRPr sz="2000">
-                <a:solidFill>
-                  <a:srgbClr val="333333"/>
-                </a:solidFill>
-                <a:latin typeface="Calibri"/>
-              </a:defRPr>
-            </a:pPr>
-            <a:r>
-              <a:t>Provide clear documentation, runnable samples and sensible defaults.</a:t>
-            </a:r>
-          </a:p>
-          <a:p>
-            <a:pPr>
-              <a:defRPr sz="2000">
-                <a:solidFill>
-                  <a:srgbClr val="333333"/>
-                </a:solidFill>
-                <a:latin typeface="Calibri"/>
-              </a:defRPr>
-            </a:pPr>
-            <a:r>
-              <a:t>Offer an escape hatch for edge cases, with documented guard rails.</a:t>
-            </a:r>
-          </a:p>
-          <a:p>
-            <a:pPr>
-              <a:defRPr sz="2000">
-                <a:solidFill>
-                  <a:srgbClr val="333333"/>
-                </a:solidFill>
-                <a:latin typeface="Calibri"/>
-              </a:defRPr>
-            </a:pPr>
-            <a:r>
-              <a:t>Measure developer experience (DevEx) with surveys and usage metrics.</a:t>
+              <a:t>The Three Pillars in Depth</a:t>
+            </a:r>
+          </a:p>
+        </p:txBody>
+      </p:sp>
+      <p:pic>
+        <p:nvPicPr>
+          <p:cNvPr id="4" name="Picture 3" descr="06-observability-pillars.png"/>
+          <p:cNvPicPr>
+            <a:picLocks noChangeAspect="1"/>
+          </p:cNvPicPr>
+          <p:nvPr/>
+        </p:nvPicPr>
+        <p:blipFill>
+          <a:blip r:embed="rId2"/>
+          <a:stretch>
+            <a:fillRect/>
+          </a:stretch>
+        </p:blipFill>
+        <p:spPr>
+          <a:xfrm>
+            <a:off x="914400" y="1097280"/>
+            <a:ext cx="7315200" cy="4575763"/>
+          </a:xfrm>
+          <a:prstGeom prst="rect">
+            <a:avLst/>
+          </a:prstGeom>
+        </p:spPr>
+      </p:pic>
+      <p:sp>
+        <p:nvSpPr>
+          <p:cNvPr id="5" name="TextBox 4"/>
+          <p:cNvSpPr txBox="1"/>
+          <p:nvPr/>
+        </p:nvSpPr>
+        <p:spPr>
+          <a:xfrm>
+            <a:off x="457200" y="5943600"/>
+            <a:ext cx="8229600" cy="731520"/>
+          </a:xfrm>
+          <a:prstGeom prst="rect">
+            <a:avLst/>
+          </a:prstGeom>
+          <a:noFill/>
+        </p:spPr>
+        <p:txBody>
+          <a:bodyPr wrap="none">
+            <a:spAutoFit/>
+          </a:bodyPr>
+          <a:lstStyle/>
+          <a:p>
+            <a:pPr algn="ctr"/>
+            <a:r>
+              <a:rPr sz="1600" b="0">
+                <a:solidFill>
+                  <a:srgbClr val="333333"/>
+                </a:solidFill>
+                <a:latin typeface="Calibri"/>
+              </a:rPr>
+              <a:t>Metrics: how much/how fast. Logs: what exactly. Traces: where in the chain.</a:t>
             </a:r>
           </a:p>
         </p:txBody>
@@ -7406,7 +7996,7 @@
                 </a:solidFill>
                 <a:latin typeface="Calibri"/>
               </a:rPr>
-              <a:t>Measuring Success and ROI</a:t>
+              <a:t>SLI, SLO, SLA - and the Error Budget</a:t>
             </a:r>
           </a:p>
         </p:txBody>
@@ -7427,67 +8017,80 @@
           <a:lstStyle/>
           <a:p>
             <a:pPr>
-              <a:defRPr sz="2000">
-                <a:solidFill>
-                  <a:srgbClr val="333333"/>
-                </a:solidFill>
-                <a:latin typeface="Calibri"/>
-              </a:defRPr>
-            </a:pPr>
-            <a:r>
-              <a:t>Outcome metrics: lead time, deployment frequency, change failure rate, MTTR.</a:t>
-            </a:r>
-          </a:p>
-          <a:p>
-            <a:pPr>
-              <a:defRPr sz="2000">
-                <a:solidFill>
-                  <a:srgbClr val="333333"/>
-                </a:solidFill>
-                <a:latin typeface="Calibri"/>
-              </a:defRPr>
-            </a:pPr>
-            <a:r>
-              <a:t>Platform metrics: adoption rate, time-to-first-service, support tickets, uptime.</a:t>
-            </a:r>
-          </a:p>
-          <a:p>
-            <a:pPr>
-              <a:defRPr sz="2000">
-                <a:solidFill>
-                  <a:srgbClr val="333333"/>
-                </a:solidFill>
-                <a:latin typeface="Calibri"/>
-              </a:defRPr>
-            </a:pPr>
-            <a:r>
-              <a:t>Developer experience: NPS-style surveys, cognitive-load assessments.</a:t>
-            </a:r>
-          </a:p>
-          <a:p>
-            <a:pPr>
-              <a:defRPr sz="2000">
-                <a:solidFill>
-                  <a:srgbClr val="333333"/>
-                </a:solidFill>
-                <a:latin typeface="Calibri"/>
-              </a:defRPr>
-            </a:pPr>
-            <a:r>
-              <a:t>Cost metrics: cloud spend efficiency, toil hours avoided.</a:t>
-            </a:r>
-          </a:p>
-          <a:p>
-            <a:pPr>
-              <a:defRPr sz="2000">
-                <a:solidFill>
-                  <a:srgbClr val="333333"/>
-                </a:solidFill>
-                <a:latin typeface="Calibri"/>
-              </a:defRPr>
-            </a:pPr>
-            <a:r>
-              <a:t>Tell the story: connect platform improvements to business value.</a:t>
+              <a:defRPr sz="1900">
+                <a:solidFill>
+                  <a:srgbClr val="333333"/>
+                </a:solidFill>
+                <a:latin typeface="Calibri"/>
+              </a:defRPr>
+            </a:pPr>
+            <a:r>
+              <a:t>SLI: a measured indicator of user experience (success rate, p95 latency).</a:t>
+            </a:r>
+          </a:p>
+          <a:p>
+            <a:pPr>
+              <a:defRPr sz="1900">
+                <a:solidFill>
+                  <a:srgbClr val="333333"/>
+                </a:solidFill>
+                <a:latin typeface="Calibri"/>
+              </a:defRPr>
+            </a:pPr>
+            <a:r>
+              <a:t>SLO: your internal target for it (99% of /orders requests succeed, 30-day window).</a:t>
+            </a:r>
+          </a:p>
+          <a:p>
+            <a:pPr>
+              <a:defRPr sz="1900">
+                <a:solidFill>
+                  <a:srgbClr val="333333"/>
+                </a:solidFill>
+                <a:latin typeface="Calibri"/>
+              </a:defRPr>
+            </a:pPr>
+            <a:r>
+              <a:t>SLA: the external CONTRACT with penalties - always looser than the SLO.</a:t>
+            </a:r>
+          </a:p>
+          <a:p>
+            <a:pPr>
+              <a:defRPr sz="1900">
+                <a:solidFill>
+                  <a:srgbClr val="333333"/>
+                </a:solidFill>
+                <a:latin typeface="Calibri"/>
+              </a:defRPr>
+            </a:pPr>
+            <a:r>
+              <a:t>Error budget: 100% minus SLO = permitted failure. 99% over 30 days = ~7.2 hours.</a:t>
+            </a:r>
+          </a:p>
+          <a:p>
+            <a:pPr>
+              <a:defRPr sz="1900">
+                <a:solidFill>
+                  <a:srgbClr val="333333"/>
+                </a:solidFill>
+                <a:latin typeface="Calibri"/>
+              </a:defRPr>
+            </a:pPr>
+            <a:r>
+              <a:t>Budget healthy: ship fast. Budget spent: reliability work wins - by prior agreement.</a:t>
+            </a:r>
+          </a:p>
+          <a:p>
+            <a:pPr>
+              <a:defRPr sz="1900">
+                <a:solidFill>
+                  <a:srgbClr val="333333"/>
+                </a:solidFill>
+                <a:latin typeface="Calibri"/>
+              </a:defRPr>
+            </a:pPr>
+            <a:r>
+              <a:t>100% is the wrong target: each nine multiplies cost, and users cannot tell past a point.</a:t>
             </a:r>
           </a:p>
         </p:txBody>
@@ -7501,6 +8104,386 @@
 </file>
 
 <file path=ppt/slides/slide24.xml><?xml version="1.0" encoding="utf-8"?>
+<p:sld xmlns:a="http://schemas.openxmlformats.org/drawingml/2006/main" xmlns:p="http://schemas.openxmlformats.org/presentationml/2006/main" xmlns:r="http://schemas.openxmlformats.org/officeDocument/2006/relationships">
+  <p:cSld>
+    <p:spTree>
+      <p:nvGrpSpPr>
+        <p:cNvPr id="1" name=""/>
+        <p:cNvGrpSpPr/>
+        <p:nvPr/>
+      </p:nvGrpSpPr>
+      <p:grpSpPr/>
+      <p:sp>
+        <p:nvSpPr>
+          <p:cNvPr id="2" name="Title 1"/>
+          <p:cNvSpPr>
+            <a:spLocks noGrp="1"/>
+          </p:cNvSpPr>
+          <p:nvPr>
+            <p:ph type="title"/>
+          </p:nvPr>
+        </p:nvSpPr>
+        <p:spPr/>
+        <p:txBody>
+          <a:bodyPr/>
+          <a:lstStyle/>
+          <a:p>
+            <a:r>
+              <a:rPr sz="3200" b="1">
+                <a:solidFill>
+                  <a:srgbClr val="1A3C6C"/>
+                </a:solidFill>
+                <a:latin typeface="Calibri"/>
+              </a:rPr>
+              <a:t>Alerting That Respects Humans</a:t>
+            </a:r>
+          </a:p>
+        </p:txBody>
+      </p:sp>
+      <p:sp>
+        <p:nvSpPr>
+          <p:cNvPr id="3" name="Content Placeholder 2"/>
+          <p:cNvSpPr>
+            <a:spLocks noGrp="1"/>
+          </p:cNvSpPr>
+          <p:nvPr>
+            <p:ph idx="1"/>
+          </p:nvPr>
+        </p:nvSpPr>
+        <p:spPr/>
+        <p:txBody>
+          <a:bodyPr/>
+          <a:lstStyle/>
+          <a:p>
+            <a:pPr>
+              <a:defRPr sz="1900">
+                <a:solidFill>
+                  <a:srgbClr val="333333"/>
+                </a:solidFill>
+                <a:latin typeface="Calibri"/>
+              </a:defRPr>
+            </a:pPr>
+            <a:r>
+              <a:t>Page on SYMPTOMS (users hurting), ticket on causes (disk trending full).</a:t>
+            </a:r>
+          </a:p>
+          <a:p>
+            <a:pPr>
+              <a:defRPr sz="1900">
+                <a:solidFill>
+                  <a:srgbClr val="333333"/>
+                </a:solidFill>
+                <a:latin typeface="Calibri"/>
+              </a:defRPr>
+            </a:pPr>
+            <a:r>
+              <a:t>Alert on error-budget BURN RATE, not raw thresholds - two windows: fast and slow.</a:t>
+            </a:r>
+          </a:p>
+          <a:p>
+            <a:pPr>
+              <a:defRPr sz="1900">
+                <a:solidFill>
+                  <a:srgbClr val="333333"/>
+                </a:solidFill>
+                <a:latin typeface="Calibri"/>
+              </a:defRPr>
+            </a:pPr>
+            <a:r>
+              <a:t>Every page must be: actionable, urgent, and novel. Otherwise it is noise.</a:t>
+            </a:r>
+          </a:p>
+          <a:p>
+            <a:pPr>
+              <a:defRPr sz="1900">
+                <a:solidFill>
+                  <a:srgbClr val="333333"/>
+                </a:solidFill>
+                <a:latin typeface="Calibri"/>
+              </a:defRPr>
+            </a:pPr>
+            <a:r>
+              <a:t>Alert fatigue is a safety failure: ignored pages are how big outages get missed.</a:t>
+            </a:r>
+          </a:p>
+          <a:p>
+            <a:pPr>
+              <a:defRPr sz="1900">
+                <a:solidFill>
+                  <a:srgbClr val="333333"/>
+                </a:solidFill>
+                <a:latin typeface="Calibri"/>
+              </a:defRPr>
+            </a:pPr>
+            <a:r>
+              <a:t>Every alert links a runbook; every false page gets tuned or deleted - budget your alerts too.</a:t>
+            </a:r>
+          </a:p>
+        </p:txBody>
+      </p:sp>
+    </p:spTree>
+  </p:cSld>
+  <p:clrMapOvr>
+    <a:masterClrMapping/>
+  </p:clrMapOvr>
+</p:sld>
+</file>
+
+<file path=ppt/slides/slide25.xml><?xml version="1.0" encoding="utf-8"?>
+<p:sld xmlns:a="http://schemas.openxmlformats.org/drawingml/2006/main" xmlns:p="http://schemas.openxmlformats.org/presentationml/2006/main" xmlns:r="http://schemas.openxmlformats.org/officeDocument/2006/relationships">
+  <p:cSld>
+    <p:spTree>
+      <p:nvGrpSpPr>
+        <p:cNvPr id="1" name=""/>
+        <p:cNvGrpSpPr/>
+        <p:nvPr/>
+      </p:nvGrpSpPr>
+      <p:grpSpPr/>
+      <p:sp>
+        <p:nvSpPr>
+          <p:cNvPr id="2" name="Title 1"/>
+          <p:cNvSpPr>
+            <a:spLocks noGrp="1"/>
+          </p:cNvSpPr>
+          <p:nvPr>
+            <p:ph type="title"/>
+          </p:nvPr>
+        </p:nvSpPr>
+        <p:spPr/>
+        <p:txBody>
+          <a:bodyPr/>
+          <a:lstStyle/>
+          <a:p>
+            <a:r>
+              <a:rPr sz="3200" b="1">
+                <a:solidFill>
+                  <a:srgbClr val="1A3C6C"/>
+                </a:solidFill>
+                <a:latin typeface="Calibri"/>
+              </a:rPr>
+              <a:t>Designing for Failure - Reliability Patterns</a:t>
+            </a:r>
+          </a:p>
+        </p:txBody>
+      </p:sp>
+      <p:sp>
+        <p:nvSpPr>
+          <p:cNvPr id="3" name="Content Placeholder 2"/>
+          <p:cNvSpPr>
+            <a:spLocks noGrp="1"/>
+          </p:cNvSpPr>
+          <p:nvPr>
+            <p:ph idx="1"/>
+          </p:nvPr>
+        </p:nvSpPr>
+        <p:spPr/>
+        <p:txBody>
+          <a:bodyPr/>
+          <a:lstStyle/>
+          <a:p>
+            <a:pPr>
+              <a:defRPr sz="1900">
+                <a:solidFill>
+                  <a:srgbClr val="333333"/>
+                </a:solidFill>
+                <a:latin typeface="Calibri"/>
+              </a:defRPr>
+            </a:pPr>
+            <a:r>
+              <a:t>Assume dependencies WILL fail; the design question is what happens then.</a:t>
+            </a:r>
+          </a:p>
+          <a:p>
+            <a:pPr>
+              <a:defRPr sz="1900">
+                <a:solidFill>
+                  <a:srgbClr val="333333"/>
+                </a:solidFill>
+                <a:latin typeface="Calibri"/>
+              </a:defRPr>
+            </a:pPr>
+            <a:r>
+              <a:t>Timeouts everywhere (no infinite waits) + retries with backoff AND jitter - budgeted.</a:t>
+            </a:r>
+          </a:p>
+          <a:p>
+            <a:pPr>
+              <a:defRPr sz="1900">
+                <a:solidFill>
+                  <a:srgbClr val="333333"/>
+                </a:solidFill>
+                <a:latin typeface="Calibri"/>
+              </a:defRPr>
+            </a:pPr>
+            <a:r>
+              <a:t>Circuit breakers: stop hammering a sick dependency; probe for recovery.</a:t>
+            </a:r>
+          </a:p>
+          <a:p>
+            <a:pPr>
+              <a:defRPr sz="1900">
+                <a:solidFill>
+                  <a:srgbClr val="333333"/>
+                </a:solidFill>
+                <a:latin typeface="Calibri"/>
+              </a:defRPr>
+            </a:pPr>
+            <a:r>
+              <a:t>Graceful degradation: reduced service beats no service (our 'payment unavailable').</a:t>
+            </a:r>
+          </a:p>
+          <a:p>
+            <a:pPr>
+              <a:defRPr sz="1900">
+                <a:solidFill>
+                  <a:srgbClr val="333333"/>
+                </a:solidFill>
+                <a:latin typeface="Calibri"/>
+              </a:defRPr>
+            </a:pPr>
+            <a:r>
+              <a:t>Redundancy + fast rollback: recovery speed often beats failure prevention.</a:t>
+            </a:r>
+          </a:p>
+        </p:txBody>
+      </p:sp>
+    </p:spTree>
+  </p:cSld>
+  <p:clrMapOvr>
+    <a:masterClrMapping/>
+  </p:clrMapOvr>
+</p:sld>
+</file>
+
+<file path=ppt/slides/slide26.xml><?xml version="1.0" encoding="utf-8"?>
+<p:sld xmlns:a="http://schemas.openxmlformats.org/drawingml/2006/main" xmlns:p="http://schemas.openxmlformats.org/presentationml/2006/main" xmlns:r="http://schemas.openxmlformats.org/officeDocument/2006/relationships">
+  <p:cSld>
+    <p:spTree>
+      <p:nvGrpSpPr>
+        <p:cNvPr id="1" name=""/>
+        <p:cNvGrpSpPr/>
+        <p:nvPr/>
+      </p:nvGrpSpPr>
+      <p:grpSpPr/>
+      <p:sp>
+        <p:nvSpPr>
+          <p:cNvPr id="2" name="Title 1"/>
+          <p:cNvSpPr>
+            <a:spLocks noGrp="1"/>
+          </p:cNvSpPr>
+          <p:nvPr>
+            <p:ph type="title"/>
+          </p:nvPr>
+        </p:nvSpPr>
+        <p:spPr/>
+        <p:txBody>
+          <a:bodyPr/>
+          <a:lstStyle/>
+          <a:p/>
+        </p:txBody>
+      </p:sp>
+      <p:sp>
+        <p:nvSpPr>
+          <p:cNvPr id="3" name="TextBox 2"/>
+          <p:cNvSpPr txBox="1"/>
+          <p:nvPr/>
+        </p:nvSpPr>
+        <p:spPr>
+          <a:xfrm>
+            <a:off x="457200" y="274320"/>
+            <a:ext cx="8229600" cy="731520"/>
+          </a:xfrm>
+          <a:prstGeom prst="rect">
+            <a:avLst/>
+          </a:prstGeom>
+          <a:noFill/>
+        </p:spPr>
+        <p:txBody>
+          <a:bodyPr wrap="none">
+            <a:spAutoFit/>
+          </a:bodyPr>
+          <a:lstStyle/>
+          <a:p>
+            <a:r>
+              <a:rPr sz="3000" b="1">
+                <a:solidFill>
+                  <a:srgbClr val="1A3C6C"/>
+                </a:solidFill>
+                <a:latin typeface="Calibri"/>
+              </a:rPr>
+              <a:t>The Incident Lifecycle - and Practising It</a:t>
+            </a:r>
+          </a:p>
+        </p:txBody>
+      </p:sp>
+      <p:pic>
+        <p:nvPicPr>
+          <p:cNvPr id="4" name="Picture 3" descr="10-incident-lifecycle.png"/>
+          <p:cNvPicPr>
+            <a:picLocks noChangeAspect="1"/>
+          </p:cNvPicPr>
+          <p:nvPr/>
+        </p:nvPicPr>
+        <p:blipFill>
+          <a:blip r:embed="rId2"/>
+          <a:stretch>
+            <a:fillRect/>
+          </a:stretch>
+        </p:blipFill>
+        <p:spPr>
+          <a:xfrm>
+            <a:off x="914400" y="1097280"/>
+            <a:ext cx="7315200" cy="5439239"/>
+          </a:xfrm>
+          <a:prstGeom prst="rect">
+            <a:avLst/>
+          </a:prstGeom>
+        </p:spPr>
+      </p:pic>
+      <p:sp>
+        <p:nvSpPr>
+          <p:cNvPr id="5" name="TextBox 4"/>
+          <p:cNvSpPr txBox="1"/>
+          <p:nvPr/>
+        </p:nvSpPr>
+        <p:spPr>
+          <a:xfrm>
+            <a:off x="457200" y="5943600"/>
+            <a:ext cx="8229600" cy="731520"/>
+          </a:xfrm>
+          <a:prstGeom prst="rect">
+            <a:avLst/>
+          </a:prstGeom>
+          <a:noFill/>
+        </p:spPr>
+        <p:txBody>
+          <a:bodyPr wrap="none">
+            <a:spAutoFit/>
+          </a:bodyPr>
+          <a:lstStyle/>
+          <a:p>
+            <a:pPr algn="ctr"/>
+            <a:r>
+              <a:rPr sz="1600" b="0">
+                <a:solidFill>
+                  <a:srgbClr val="333333"/>
+                </a:solidFill>
+                <a:latin typeface="Calibri"/>
+              </a:rPr>
+              <a:t>Detect, triage, mitigate, resolve - then the learning half: postmortem, remediate.</a:t>
+            </a:r>
+          </a:p>
+        </p:txBody>
+      </p:sp>
+    </p:spTree>
+  </p:cSld>
+  <p:clrMapOvr>
+    <a:masterClrMapping/>
+  </p:clrMapOvr>
+</p:sld>
+</file>
+
+<file path=ppt/slides/slide27.xml><?xml version="1.0" encoding="utf-8"?>
 <p:sld xmlns:a="http://schemas.openxmlformats.org/drawingml/2006/main" xmlns:p="http://schemas.openxmlformats.org/presentationml/2006/main" xmlns:r="http://schemas.openxmlformats.org/officeDocument/2006/relationships">
   <p:cSld>
     <p:spTree>
@@ -7600,11 +8583,11 @@
                 </a:solidFill>
                 <a:latin typeface="Calibri"/>
               </a:rPr>
-              <a:t>Module 10</a:t>
+              <a:t>Module 9</a:t>
             </a:r>
             <a:br/>
             <a:r>
-              <a:t>Hands-On Workshops &amp; Capstone</a:t>
+              <a:t>Platform as a Product</a:t>
             </a:r>
           </a:p>
         </p:txBody>
@@ -7617,7 +8600,7 @@
 </p:sld>
 </file>
 
-<file path=ppt/slides/slide25.xml><?xml version="1.0" encoding="utf-8"?>
+<file path=ppt/slides/slide28.xml><?xml version="1.0" encoding="utf-8"?>
 <p:sld xmlns:a="http://schemas.openxmlformats.org/drawingml/2006/main" xmlns:p="http://schemas.openxmlformats.org/presentationml/2006/main" xmlns:r="http://schemas.openxmlformats.org/officeDocument/2006/relationships">
   <p:cSld>
     <p:spTree>
@@ -7641,96 +8624,98 @@
         <p:txBody>
           <a:bodyPr/>
           <a:lstStyle/>
-          <a:p>
-            <a:r>
-              <a:rPr sz="3200" b="1">
+          <a:p/>
+        </p:txBody>
+      </p:sp>
+      <p:sp>
+        <p:nvSpPr>
+          <p:cNvPr id="3" name="TextBox 2"/>
+          <p:cNvSpPr txBox="1"/>
+          <p:nvPr/>
+        </p:nvSpPr>
+        <p:spPr>
+          <a:xfrm>
+            <a:off x="457200" y="274320"/>
+            <a:ext cx="8229600" cy="731520"/>
+          </a:xfrm>
+          <a:prstGeom prst="rect">
+            <a:avLst/>
+          </a:prstGeom>
+          <a:noFill/>
+        </p:spPr>
+        <p:txBody>
+          <a:bodyPr wrap="none">
+            <a:spAutoFit/>
+          </a:bodyPr>
+          <a:lstStyle/>
+          <a:p>
+            <a:r>
+              <a:rPr sz="3000" b="1">
                 <a:solidFill>
                   <a:srgbClr val="1A3C6C"/>
                 </a:solidFill>
                 <a:latin typeface="Calibri"/>
               </a:rPr>
-              <a:t>Workshop Objectives</a:t>
-            </a:r>
-          </a:p>
-        </p:txBody>
-      </p:sp>
-      <p:sp>
-        <p:nvSpPr>
-          <p:cNvPr id="3" name="Content Placeholder 2"/>
-          <p:cNvSpPr>
-            <a:spLocks noGrp="1"/>
-          </p:cNvSpPr>
-          <p:nvPr>
-            <p:ph idx="1"/>
-          </p:nvPr>
-        </p:nvSpPr>
-        <p:spPr/>
-        <p:txBody>
-          <a:bodyPr/>
-          <a:lstStyle/>
-          <a:p>
-            <a:pPr>
-              <a:defRPr sz="2000">
-                <a:solidFill>
-                  <a:srgbClr val="333333"/>
-                </a:solidFill>
-                <a:latin typeface="Calibri"/>
-              </a:defRPr>
-            </a:pPr>
-            <a:r>
-              <a:t>Set up a basic DevOps pipeline that builds, tests and publishes a container image.</a:t>
-            </a:r>
-          </a:p>
-          <a:p>
-            <a:pPr>
-              <a:defRPr sz="2000">
-                <a:solidFill>
-                  <a:srgbClr val="333333"/>
-                </a:solidFill>
-                <a:latin typeface="Calibri"/>
-              </a:defRPr>
-            </a:pPr>
-            <a:r>
-              <a:t>Build and deploy a microservice locally and to Kubernetes.</a:t>
-            </a:r>
-          </a:p>
-          <a:p>
-            <a:pPr>
-              <a:defRPr sz="2000">
-                <a:solidFill>
-                  <a:srgbClr val="333333"/>
-                </a:solidFill>
-                <a:latin typeface="Calibri"/>
-              </a:defRPr>
-            </a:pPr>
-            <a:r>
-              <a:t>Implement IaC for cloud-style infrastructure using Terraform.</a:t>
-            </a:r>
-          </a:p>
-          <a:p>
-            <a:pPr>
-              <a:defRPr sz="2000">
-                <a:solidFill>
-                  <a:srgbClr val="333333"/>
-                </a:solidFill>
-                <a:latin typeface="Calibri"/>
-              </a:defRPr>
-            </a:pPr>
-            <a:r>
-              <a:t>Add security scanning and observability hooks.</a:t>
-            </a:r>
-          </a:p>
-          <a:p>
-            <a:pPr>
-              <a:defRPr sz="2000">
-                <a:solidFill>
-                  <a:srgbClr val="333333"/>
-                </a:solidFill>
-                <a:latin typeface="Calibri"/>
-              </a:defRPr>
-            </a:pPr>
-            <a:r>
-              <a:t>Experience the 'golden path' that a platform team provides.</a:t>
+              <a:t>The Internal Developer Platform</a:t>
+            </a:r>
+          </a:p>
+        </p:txBody>
+      </p:sp>
+      <p:pic>
+        <p:nvPicPr>
+          <p:cNvPr id="4" name="Picture 3" descr="08-platform-as-product.png"/>
+          <p:cNvPicPr>
+            <a:picLocks noChangeAspect="1"/>
+          </p:cNvPicPr>
+          <p:nvPr/>
+        </p:nvPicPr>
+        <p:blipFill>
+          <a:blip r:embed="rId2"/>
+          <a:stretch>
+            <a:fillRect/>
+          </a:stretch>
+        </p:blipFill>
+        <p:spPr>
+          <a:xfrm>
+            <a:off x="914400" y="1097280"/>
+            <a:ext cx="7315200" cy="4332707"/>
+          </a:xfrm>
+          <a:prstGeom prst="rect">
+            <a:avLst/>
+          </a:prstGeom>
+        </p:spPr>
+      </p:pic>
+      <p:sp>
+        <p:nvSpPr>
+          <p:cNvPr id="5" name="TextBox 4"/>
+          <p:cNvSpPr txBox="1"/>
+          <p:nvPr/>
+        </p:nvSpPr>
+        <p:spPr>
+          <a:xfrm>
+            <a:off x="457200" y="5943600"/>
+            <a:ext cx="8229600" cy="731520"/>
+          </a:xfrm>
+          <a:prstGeom prst="rect">
+            <a:avLst/>
+          </a:prstGeom>
+          <a:noFill/>
+        </p:spPr>
+        <p:txBody>
+          <a:bodyPr wrap="none">
+            <a:spAutoFit/>
+          </a:bodyPr>
+          <a:lstStyle/>
+          <a:p>
+            <a:pPr algn="ctr"/>
+            <a:r>
+              <a:rPr sz="1600" b="0">
+                <a:solidFill>
+                  <a:srgbClr val="333333"/>
+                </a:solidFill>
+                <a:latin typeface="Calibri"/>
+              </a:rPr>
+              <a:t>A paved road developers CHOOSE - because it is genuinely the best way to ship.</a:t>
             </a:r>
           </a:p>
         </p:txBody>
@@ -7743,7 +8728,7 @@
 </p:sld>
 </file>
 
-<file path=ppt/slides/slide26.xml><?xml version="1.0" encoding="utf-8"?>
+<file path=ppt/slides/slide29.xml><?xml version="1.0" encoding="utf-8"?>
 <p:sld xmlns:a="http://schemas.openxmlformats.org/drawingml/2006/main" xmlns:p="http://schemas.openxmlformats.org/presentationml/2006/main" xmlns:r="http://schemas.openxmlformats.org/officeDocument/2006/relationships">
   <p:cSld>
     <p:spTree>
@@ -7775,7 +8760,7 @@
                 </a:solidFill>
                 <a:latin typeface="Calibri"/>
               </a:rPr>
-              <a:t>Capstone Scenario</a:t>
+              <a:t>User-Centric Design for Internal Platforms</a:t>
             </a:r>
           </a:p>
         </p:txBody>
@@ -7796,67 +8781,67 @@
           <a:lstStyle/>
           <a:p>
             <a:pPr>
-              <a:defRPr sz="2000">
-                <a:solidFill>
-                  <a:srgbClr val="333333"/>
-                </a:solidFill>
-                <a:latin typeface="Calibri"/>
-              </a:defRPr>
-            </a:pPr>
-            <a:r>
-              <a:t>You are the platform team enabling a stream-aligned order-processing squad.</a:t>
-            </a:r>
-          </a:p>
-          <a:p>
-            <a:pPr>
-              <a:defRPr sz="2000">
-                <a:solidFill>
-                  <a:srgbClr val="333333"/>
-                </a:solidFill>
-                <a:latin typeface="Calibri"/>
-              </a:defRPr>
-            </a:pPr>
-            <a:r>
-              <a:t>Provide a GitHub Actions workflow, Terraform module and Kubernetes manifests.</a:t>
-            </a:r>
-          </a:p>
-          <a:p>
-            <a:pPr>
-              <a:defRPr sz="2000">
-                <a:solidFill>
-                  <a:srgbClr val="333333"/>
-                </a:solidFill>
-                <a:latin typeface="Calibri"/>
-              </a:defRPr>
-            </a:pPr>
-            <a:r>
-              <a:t>A developer commits code; the pipeline builds, scans, plans and deploys automatically.</a:t>
-            </a:r>
-          </a:p>
-          <a:p>
-            <a:pPr>
-              <a:defRPr sz="2000">
-                <a:solidFill>
-                  <a:srgbClr val="333333"/>
-                </a:solidFill>
-                <a:latin typeface="Calibri"/>
-              </a:defRPr>
-            </a:pPr>
-            <a:r>
-              <a:t>Prometheus monitors the service; an SLO is defined and visible in Grafana.</a:t>
-            </a:r>
-          </a:p>
-          <a:p>
-            <a:pPr>
-              <a:defRPr sz="2000">
-                <a:solidFill>
-                  <a:srgbClr val="333333"/>
-                </a:solidFill>
-                <a:latin typeface="Calibri"/>
-              </a:defRPr>
-            </a:pPr>
-            <a:r>
-              <a:t>Document the internal platform offering so other teams can self-serve.</a:t>
+              <a:defRPr sz="1900">
+                <a:solidFill>
+                  <a:srgbClr val="333333"/>
+                </a:solidFill>
+                <a:latin typeface="Calibri"/>
+              </a:defRPr>
+            </a:pPr>
+            <a:r>
+              <a:t>Your users are developers - so do real product discovery: interviews, journey maps, personas.</a:t>
+            </a:r>
+          </a:p>
+          <a:p>
+            <a:pPr>
+              <a:defRPr sz="1900">
+                <a:solidFill>
+                  <a:srgbClr val="333333"/>
+                </a:solidFill>
+                <a:latin typeface="Calibri"/>
+              </a:defRPr>
+            </a:pPr>
+            <a:r>
+              <a:t>Measure the journey: time-to-first-deploy for a NEW team is the flagship UX metric.</a:t>
+            </a:r>
+          </a:p>
+          <a:p>
+            <a:pPr>
+              <a:defRPr sz="1900">
+                <a:solidFill>
+                  <a:srgbClr val="333333"/>
+                </a:solidFill>
+                <a:latin typeface="Calibri"/>
+              </a:defRPr>
+            </a:pPr>
+            <a:r>
+              <a:t>Documentation IS the interface: quickstarts, copy-paste examples, honest error messages.</a:t>
+            </a:r>
+          </a:p>
+          <a:p>
+            <a:pPr>
+              <a:defRPr sz="1900">
+                <a:solidFill>
+                  <a:srgbClr val="333333"/>
+                </a:solidFill>
+                <a:latin typeface="Calibri"/>
+              </a:defRPr>
+            </a:pPr>
+            <a:r>
+              <a:t>Golden paths (Spotify's term): the supported, delightful default - with escape hatches.</a:t>
+            </a:r>
+          </a:p>
+          <a:p>
+            <a:pPr>
+              <a:defRPr sz="1900">
+                <a:solidFill>
+                  <a:srgbClr val="333333"/>
+                </a:solidFill>
+                <a:latin typeface="Calibri"/>
+              </a:defRPr>
+            </a:pPr>
+            <a:r>
+              <a:t>Start from the Thinnest Viable Platform; grow by demand, not by roadmap fantasy.</a:t>
             </a:r>
           </a:p>
         </p:txBody>
@@ -7869,7 +8854,387 @@
 </p:sld>
 </file>
 
-<file path=ppt/slides/slide27.xml><?xml version="1.0" encoding="utf-8"?>
+<file path=ppt/slides/slide3.xml><?xml version="1.0" encoding="utf-8"?>
+<p:sld xmlns:a="http://schemas.openxmlformats.org/drawingml/2006/main" xmlns:p="http://schemas.openxmlformats.org/presentationml/2006/main" xmlns:r="http://schemas.openxmlformats.org/officeDocument/2006/relationships">
+  <p:cSld>
+    <p:spTree>
+      <p:nvGrpSpPr>
+        <p:cNvPr id="1" name=""/>
+        <p:cNvGrpSpPr/>
+        <p:nvPr/>
+      </p:nvGrpSpPr>
+      <p:grpSpPr/>
+      <p:sp>
+        <p:nvSpPr>
+          <p:cNvPr id="2" name="Title 1"/>
+          <p:cNvSpPr>
+            <a:spLocks noGrp="1"/>
+          </p:cNvSpPr>
+          <p:nvPr>
+            <p:ph type="title"/>
+          </p:nvPr>
+        </p:nvSpPr>
+        <p:spPr/>
+        <p:txBody>
+          <a:bodyPr/>
+          <a:lstStyle/>
+          <a:p/>
+        </p:txBody>
+      </p:sp>
+      <p:sp>
+        <p:nvSpPr>
+          <p:cNvPr id="3" name="TextBox 2"/>
+          <p:cNvSpPr txBox="1"/>
+          <p:nvPr/>
+        </p:nvSpPr>
+        <p:spPr>
+          <a:xfrm>
+            <a:off x="457200" y="274320"/>
+            <a:ext cx="8229600" cy="731520"/>
+          </a:xfrm>
+          <a:prstGeom prst="rect">
+            <a:avLst/>
+          </a:prstGeom>
+          <a:noFill/>
+        </p:spPr>
+        <p:txBody>
+          <a:bodyPr wrap="none">
+            <a:spAutoFit/>
+          </a:bodyPr>
+          <a:lstStyle/>
+          <a:p>
+            <a:r>
+              <a:rPr sz="3000" b="1">
+                <a:solidFill>
+                  <a:srgbClr val="1A3C6C"/>
+                </a:solidFill>
+                <a:latin typeface="Calibri"/>
+              </a:rPr>
+              <a:t>Monolith vs Microservices - the Real Trade-off</a:t>
+            </a:r>
+          </a:p>
+        </p:txBody>
+      </p:sp>
+      <p:pic>
+        <p:nvPicPr>
+          <p:cNvPr id="4" name="Picture 3" descr="05-monolith-vs-microservices.png"/>
+          <p:cNvPicPr>
+            <a:picLocks noChangeAspect="1"/>
+          </p:cNvPicPr>
+          <p:nvPr/>
+        </p:nvPicPr>
+        <p:blipFill>
+          <a:blip r:embed="rId2"/>
+          <a:stretch>
+            <a:fillRect/>
+          </a:stretch>
+        </p:blipFill>
+        <p:spPr>
+          <a:xfrm>
+            <a:off x="914400" y="1097280"/>
+            <a:ext cx="7315200" cy="4373991"/>
+          </a:xfrm>
+          <a:prstGeom prst="rect">
+            <a:avLst/>
+          </a:prstGeom>
+        </p:spPr>
+      </p:pic>
+      <p:sp>
+        <p:nvSpPr>
+          <p:cNvPr id="5" name="TextBox 4"/>
+          <p:cNvSpPr txBox="1"/>
+          <p:nvPr/>
+        </p:nvSpPr>
+        <p:spPr>
+          <a:xfrm>
+            <a:off x="457200" y="5943600"/>
+            <a:ext cx="8229600" cy="731520"/>
+          </a:xfrm>
+          <a:prstGeom prst="rect">
+            <a:avLst/>
+          </a:prstGeom>
+          <a:noFill/>
+        </p:spPr>
+        <p:txBody>
+          <a:bodyPr wrap="none">
+            <a:spAutoFit/>
+          </a:bodyPr>
+          <a:lstStyle/>
+          <a:p>
+            <a:pPr algn="ctr"/>
+            <a:r>
+              <a:rPr sz="1600" b="0">
+                <a:solidFill>
+                  <a:srgbClr val="333333"/>
+                </a:solidFill>
+                <a:latin typeface="Calibri"/>
+              </a:rPr>
+              <a:t>The unit of deployment changes everything - in both directions.</a:t>
+            </a:r>
+          </a:p>
+        </p:txBody>
+      </p:sp>
+    </p:spTree>
+  </p:cSld>
+  <p:clrMapOvr>
+    <a:masterClrMapping/>
+  </p:clrMapOvr>
+</p:sld>
+</file>
+
+<file path=ppt/slides/slide30.xml><?xml version="1.0" encoding="utf-8"?>
+<p:sld xmlns:a="http://schemas.openxmlformats.org/drawingml/2006/main" xmlns:p="http://schemas.openxmlformats.org/presentationml/2006/main" xmlns:r="http://schemas.openxmlformats.org/officeDocument/2006/relationships">
+  <p:cSld>
+    <p:spTree>
+      <p:nvGrpSpPr>
+        <p:cNvPr id="1" name=""/>
+        <p:cNvGrpSpPr/>
+        <p:nvPr/>
+      </p:nvGrpSpPr>
+      <p:grpSpPr/>
+      <p:sp>
+        <p:nvSpPr>
+          <p:cNvPr id="2" name="Title 1"/>
+          <p:cNvSpPr>
+            <a:spLocks noGrp="1"/>
+          </p:cNvSpPr>
+          <p:nvPr>
+            <p:ph type="title"/>
+          </p:nvPr>
+        </p:nvSpPr>
+        <p:spPr/>
+        <p:txBody>
+          <a:bodyPr/>
+          <a:lstStyle/>
+          <a:p>
+            <a:r>
+              <a:rPr sz="3200" b="1">
+                <a:solidFill>
+                  <a:srgbClr val="1A3C6C"/>
+                </a:solidFill>
+                <a:latin typeface="Calibri"/>
+              </a:rPr>
+              <a:t>Measuring Success and ROI</a:t>
+            </a:r>
+          </a:p>
+        </p:txBody>
+      </p:sp>
+      <p:sp>
+        <p:nvSpPr>
+          <p:cNvPr id="3" name="Content Placeholder 2"/>
+          <p:cNvSpPr>
+            <a:spLocks noGrp="1"/>
+          </p:cNvSpPr>
+          <p:nvPr>
+            <p:ph idx="1"/>
+          </p:nvPr>
+        </p:nvSpPr>
+        <p:spPr/>
+        <p:txBody>
+          <a:bodyPr/>
+          <a:lstStyle/>
+          <a:p>
+            <a:pPr>
+              <a:defRPr sz="1900">
+                <a:solidFill>
+                  <a:srgbClr val="333333"/>
+                </a:solidFill>
+                <a:latin typeface="Calibri"/>
+              </a:defRPr>
+            </a:pPr>
+            <a:r>
+              <a:t>Adoption: % of services on the golden path - and the trend. Voluntary adoption is the vote.</a:t>
+            </a:r>
+          </a:p>
+          <a:p>
+            <a:pPr>
+              <a:defRPr sz="1900">
+                <a:solidFill>
+                  <a:srgbClr val="333333"/>
+                </a:solidFill>
+                <a:latin typeface="Calibri"/>
+              </a:defRPr>
+            </a:pPr>
+            <a:r>
+              <a:t>Speed: time-to-first-deploy; DORA metrics OF CONSUMING TEAMS (the platform's real output).</a:t>
+            </a:r>
+          </a:p>
+          <a:p>
+            <a:pPr>
+              <a:defRPr sz="1900">
+                <a:solidFill>
+                  <a:srgbClr val="333333"/>
+                </a:solidFill>
+                <a:latin typeface="Calibri"/>
+              </a:defRPr>
+            </a:pPr>
+            <a:r>
+              <a:t>Load: support tickets per team per month should FALL as self-service rises.</a:t>
+            </a:r>
+          </a:p>
+          <a:p>
+            <a:pPr>
+              <a:defRPr sz="1900">
+                <a:solidFill>
+                  <a:srgbClr val="333333"/>
+                </a:solidFill>
+                <a:latin typeface="Calibri"/>
+              </a:defRPr>
+            </a:pPr>
+            <a:r>
+              <a:t>Experience: developer NPS / quarterly surveys - would they recommend the platform?</a:t>
+            </a:r>
+          </a:p>
+          <a:p>
+            <a:pPr>
+              <a:defRPr sz="1900">
+                <a:solidFill>
+                  <a:srgbClr val="333333"/>
+                </a:solidFill>
+                <a:latin typeface="Calibri"/>
+              </a:defRPr>
+            </a:pPr>
+            <a:r>
+              <a:t>ROI story: (per-team toil hours saved x teams) + risk reduction vs platform team cost.</a:t>
+            </a:r>
+          </a:p>
+        </p:txBody>
+      </p:sp>
+    </p:spTree>
+  </p:cSld>
+  <p:clrMapOvr>
+    <a:masterClrMapping/>
+  </p:clrMapOvr>
+</p:sld>
+</file>
+
+<file path=ppt/slides/slide31.xml><?xml version="1.0" encoding="utf-8"?>
+<p:sld xmlns:a="http://schemas.openxmlformats.org/drawingml/2006/main" xmlns:p="http://schemas.openxmlformats.org/presentationml/2006/main" xmlns:r="http://schemas.openxmlformats.org/officeDocument/2006/relationships">
+  <p:cSld>
+    <p:spTree>
+      <p:nvGrpSpPr>
+        <p:cNvPr id="1" name=""/>
+        <p:cNvGrpSpPr/>
+        <p:nvPr/>
+      </p:nvGrpSpPr>
+      <p:grpSpPr/>
+      <p:sp>
+        <p:nvSpPr>
+          <p:cNvPr id="2" name="Title 1"/>
+          <p:cNvSpPr>
+            <a:spLocks noGrp="1"/>
+          </p:cNvSpPr>
+          <p:nvPr>
+            <p:ph type="title"/>
+          </p:nvPr>
+        </p:nvSpPr>
+        <p:spPr/>
+        <p:txBody>
+          <a:bodyPr/>
+          <a:lstStyle/>
+          <a:p>
+            <a:r>
+              <a:rPr sz="3200" b="1">
+                <a:solidFill>
+                  <a:srgbClr val="1A3C6C"/>
+                </a:solidFill>
+                <a:latin typeface="Calibri"/>
+              </a:rPr>
+              <a:t>Operating Model - and What NOT to Build</a:t>
+            </a:r>
+          </a:p>
+        </p:txBody>
+      </p:sp>
+      <p:sp>
+        <p:nvSpPr>
+          <p:cNvPr id="3" name="Content Placeholder 2"/>
+          <p:cNvSpPr>
+            <a:spLocks noGrp="1"/>
+          </p:cNvSpPr>
+          <p:nvPr>
+            <p:ph idx="1"/>
+          </p:nvPr>
+        </p:nvSpPr>
+        <p:spPr/>
+        <p:txBody>
+          <a:bodyPr/>
+          <a:lstStyle/>
+          <a:p>
+            <a:pPr>
+              <a:defRPr sz="1900">
+                <a:solidFill>
+                  <a:srgbClr val="333333"/>
+                </a:solidFill>
+                <a:latin typeface="Calibri"/>
+              </a:defRPr>
+            </a:pPr>
+            <a:r>
+              <a:t>Product-fund the platform (a team with a roadmap), not project-fund (a deliverable that 'ends').</a:t>
+            </a:r>
+          </a:p>
+          <a:p>
+            <a:pPr>
+              <a:defRPr sz="1900">
+                <a:solidFill>
+                  <a:srgbClr val="333333"/>
+                </a:solidFill>
+                <a:latin typeface="Calibri"/>
+              </a:defRPr>
+            </a:pPr>
+            <a:r>
+              <a:t>The platform has SLOs and support hours - it is production, with customers.</a:t>
+            </a:r>
+          </a:p>
+          <a:p>
+            <a:pPr>
+              <a:defRPr sz="1900">
+                <a:solidFill>
+                  <a:srgbClr val="333333"/>
+                </a:solidFill>
+                <a:latin typeface="Calibri"/>
+              </a:defRPr>
+            </a:pPr>
+            <a:r>
+              <a:t>Deprecation policy: versioned templates, migration windows, no rug-pulls.</a:t>
+            </a:r>
+          </a:p>
+          <a:p>
+            <a:pPr>
+              <a:defRPr sz="1900">
+                <a:solidFill>
+                  <a:srgbClr val="333333"/>
+                </a:solidFill>
+                <a:latin typeface="Calibri"/>
+              </a:defRPr>
+            </a:pPr>
+            <a:r>
+              <a:t>Say NO deliberately: exotic needs stay with the teams that have them (escape hatch, not feature).</a:t>
+            </a:r>
+          </a:p>
+          <a:p>
+            <a:pPr>
+              <a:defRPr sz="1900">
+                <a:solidFill>
+                  <a:srgbClr val="333333"/>
+                </a:solidFill>
+                <a:latin typeface="Calibri"/>
+              </a:defRPr>
+            </a:pPr>
+            <a:r>
+              <a:t>The platform team is a stream-aligned team whose product is the platform.</a:t>
+            </a:r>
+          </a:p>
+        </p:txBody>
+      </p:sp>
+    </p:spTree>
+  </p:cSld>
+  <p:clrMapOvr>
+    <a:masterClrMapping/>
+  </p:clrMapOvr>
+</p:sld>
+</file>
+
+<file path=ppt/slides/slide32.xml><?xml version="1.0" encoding="utf-8"?>
 <p:sld xmlns:a="http://schemas.openxmlformats.org/drawingml/2006/main" xmlns:p="http://schemas.openxmlformats.org/presentationml/2006/main" xmlns:r="http://schemas.openxmlformats.org/officeDocument/2006/relationships">
   <p:cSld>
     <p:spTree>
@@ -7969,11 +9334,11 @@
                 </a:solidFill>
                 <a:latin typeface="Calibri"/>
               </a:rPr>
-              <a:t>Module 11</a:t>
+              <a:t>Module 10</a:t>
             </a:r>
             <a:br/>
             <a:r>
-              <a:t>Summary and Next Steps</a:t>
+              <a:t>Hands-On Workshops</a:t>
             </a:r>
           </a:p>
         </p:txBody>
@@ -7986,7 +9351,7 @@
 </p:sld>
 </file>
 
-<file path=ppt/slides/slide28.xml><?xml version="1.0" encoding="utf-8"?>
+<file path=ppt/slides/slide33.xml><?xml version="1.0" encoding="utf-8"?>
 <p:sld xmlns:a="http://schemas.openxmlformats.org/drawingml/2006/main" xmlns:p="http://schemas.openxmlformats.org/presentationml/2006/main" xmlns:r="http://schemas.openxmlformats.org/officeDocument/2006/relationships">
   <p:cSld>
     <p:spTree>
@@ -8018,7 +9383,7 @@
                 </a:solidFill>
                 <a:latin typeface="Calibri"/>
               </a:rPr>
-              <a:t>What You Built in Two Days</a:t>
+              <a:t>The Three Workshops - Map</a:t>
             </a:r>
           </a:p>
         </p:txBody>
@@ -8039,80 +9404,67 @@
           <a:lstStyle/>
           <a:p>
             <a:pPr>
-              <a:defRPr sz="2000">
-                <a:solidFill>
-                  <a:srgbClr val="333333"/>
-                </a:solidFill>
-                <a:latin typeface="Calibri"/>
-              </a:defRPr>
-            </a:pPr>
-            <a:r>
-              <a:t>A microservice tested, containerised and orchestrated (Labs 00-03).</a:t>
-            </a:r>
-          </a:p>
-          <a:p>
-            <a:pPr>
-              <a:defRPr sz="2000">
-                <a:solidFill>
-                  <a:srgbClr val="333333"/>
-                </a:solidFill>
-                <a:latin typeface="Calibri"/>
-              </a:defRPr>
-            </a:pPr>
-            <a:r>
-              <a:t>A CI pipeline with a real security gate (Lab 04).</a:t>
-            </a:r>
-          </a:p>
-          <a:p>
-            <a:pPr>
-              <a:defRPr sz="2000">
-                <a:solidFill>
-                  <a:srgbClr val="333333"/>
-                </a:solidFill>
-                <a:latin typeface="Calibri"/>
-              </a:defRPr>
-            </a:pPr>
-            <a:r>
-              <a:t>Infrastructure declared as code, with drift detection (Lab 05).</a:t>
-            </a:r>
-          </a:p>
-          <a:p>
-            <a:pPr>
-              <a:defRPr sz="2000">
-                <a:solidFill>
-                  <a:srgbClr val="333333"/>
-                </a:solidFill>
-                <a:latin typeface="Calibri"/>
-              </a:defRPr>
-            </a:pPr>
-            <a:r>
-              <a:t>A Kubernetes deployment with probes, limits and rolling updates (Lab 06).</a:t>
-            </a:r>
-          </a:p>
-          <a:p>
-            <a:pPr>
-              <a:defRPr sz="2000">
-                <a:solidFill>
-                  <a:srgbClr val="333333"/>
-                </a:solidFill>
-                <a:latin typeface="Calibri"/>
-              </a:defRPr>
-            </a:pPr>
-            <a:r>
-              <a:t>Policies, scans, dashboards, an SLO - and one survived incident (Labs 07-08).</a:t>
-            </a:r>
-          </a:p>
-          <a:p>
-            <a:pPr>
-              <a:defRPr sz="2000">
-                <a:solidFill>
-                  <a:srgbClr val="333333"/>
-                </a:solidFill>
-                <a:latin typeface="Calibri"/>
-              </a:defRPr>
-            </a:pPr>
-            <a:r>
-              <a:t>A golden path handed over as a platform product (Lab 09).</a:t>
+              <a:defRPr sz="1900">
+                <a:solidFill>
+                  <a:srgbClr val="333333"/>
+                </a:solidFill>
+                <a:latin typeface="Calibri"/>
+              </a:defRPr>
+            </a:pPr>
+            <a:r>
+              <a:t>W1 (Day 1 pm): Setting up a basic DevOps pipeline - GitHub Actions: test, build, scan+gate.</a:t>
+            </a:r>
+          </a:p>
+          <a:p>
+            <a:pPr>
+              <a:defRPr sz="1900">
+                <a:solidFill>
+                  <a:srgbClr val="333333"/>
+                </a:solidFill>
+                <a:latin typeface="Calibri"/>
+              </a:defRPr>
+            </a:pPr>
+            <a:r>
+              <a:t>W2 (Day 2 am): Building and deploying a microservice - Docker -&gt; Compose -&gt; Kubernetes.</a:t>
+            </a:r>
+          </a:p>
+          <a:p>
+            <a:pPr>
+              <a:defRPr sz="1900">
+                <a:solidFill>
+                  <a:srgbClr val="333333"/>
+                </a:solidFill>
+                <a:latin typeface="Calibri"/>
+              </a:defRPr>
+            </a:pPr>
+            <a:r>
+              <a:t>W3 (Day 2 pm): Implementing IaC - Terraform init/plan/apply/destroy + drift, on local Docker.</a:t>
+            </a:r>
+          </a:p>
+          <a:p>
+            <a:pPr>
+              <a:defRPr sz="1900">
+                <a:solidFill>
+                  <a:srgbClr val="333333"/>
+                </a:solidFill>
+                <a:latin typeface="Calibri"/>
+              </a:defRPr>
+            </a:pPr>
+            <a:r>
+              <a:t>Same application throughout: the order+payment services you know from the demos.</a:t>
+            </a:r>
+          </a:p>
+          <a:p>
+            <a:pPr>
+              <a:defRPr sz="1900">
+                <a:solidFill>
+                  <a:srgbClr val="333333"/>
+                </a:solidFill>
+                <a:latin typeface="Calibri"/>
+              </a:defRPr>
+            </a:pPr>
+            <a:r>
+              <a:t>Finale: the capstone runs all three as ONE golden path (workshops/ folder has the guides).</a:t>
             </a:r>
           </a:p>
         </p:txBody>
@@ -8125,7 +9477,7 @@
 </p:sld>
 </file>
 
-<file path=ppt/slides/slide29.xml><?xml version="1.0" encoding="utf-8"?>
+<file path=ppt/slides/slide34.xml><?xml version="1.0" encoding="utf-8"?>
 <p:sld xmlns:a="http://schemas.openxmlformats.org/drawingml/2006/main" xmlns:p="http://schemas.openxmlformats.org/presentationml/2006/main" xmlns:r="http://schemas.openxmlformats.org/officeDocument/2006/relationships">
   <p:cSld>
     <p:spTree>
@@ -8157,7 +9509,7 @@
                 </a:solidFill>
                 <a:latin typeface="Calibri"/>
               </a:rPr>
-              <a:t>Continuing the Journey</a:t>
+              <a:t>Workshop Success Criteria</a:t>
             </a:r>
           </a:p>
         </p:txBody>
@@ -8178,67 +9530,67 @@
           <a:lstStyle/>
           <a:p>
             <a:pPr>
-              <a:defRPr sz="2000">
-                <a:solidFill>
-                  <a:srgbClr val="333333"/>
-                </a:solidFill>
-                <a:latin typeface="Calibri"/>
-              </a:defRPr>
-            </a:pPr>
-            <a:r>
-              <a:t>Kubernetes: CKAD / CKA certifications; kind and minikube for practice.</a:t>
-            </a:r>
-          </a:p>
-          <a:p>
-            <a:pPr>
-              <a:defRPr sz="2000">
-                <a:solidFill>
-                  <a:srgbClr val="333333"/>
-                </a:solidFill>
-                <a:latin typeface="Calibri"/>
-              </a:defRPr>
-            </a:pPr>
-            <a:r>
-              <a:t>IaC: HashiCorp Terraform Associate; Ansible for configuration management.</a:t>
-            </a:r>
-          </a:p>
-          <a:p>
-            <a:pPr>
-              <a:defRPr sz="2000">
-                <a:solidFill>
-                  <a:srgbClr val="333333"/>
-                </a:solidFill>
-                <a:latin typeface="Calibri"/>
-              </a:defRPr>
-            </a:pPr>
-            <a:r>
-              <a:t>CI/CD: GitHub Actions docs and the 'act' local runner you already installed.</a:t>
-            </a:r>
-          </a:p>
-          <a:p>
-            <a:pPr>
-              <a:defRPr sz="2000">
-                <a:solidFill>
-                  <a:srgbClr val="333333"/>
-                </a:solidFill>
-                <a:latin typeface="Calibri"/>
-              </a:defRPr>
-            </a:pPr>
-            <a:r>
-              <a:t>Reading: Accelerate (DORA), Team Topologies, the Google SRE books (free online).</a:t>
-            </a:r>
-          </a:p>
-          <a:p>
-            <a:pPr>
-              <a:defRPr sz="2000">
-                <a:solidFill>
-                  <a:srgbClr val="333333"/>
-                </a:solidFill>
-                <a:latin typeface="Calibri"/>
-              </a:defRPr>
-            </a:pPr>
-            <a:r>
-              <a:t>Communities: platformengineering.org, CNCF projects, local DevOps meetups.</a:t>
+              <a:defRPr sz="1900">
+                <a:solidFill>
+                  <a:srgbClr val="333333"/>
+                </a:solidFill>
+                <a:latin typeface="Calibri"/>
+              </a:defRPr>
+            </a:pPr>
+            <a:r>
+              <a:t>W1 done = PR triggers pipeline; test+build green; you can explain report vs gate.</a:t>
+            </a:r>
+          </a:p>
+          <a:p>
+            <a:pPr>
+              <a:defRPr sz="1900">
+                <a:solidFill>
+                  <a:srgbClr val="333333"/>
+                </a:solidFill>
+                <a:latin typeface="Calibri"/>
+              </a:defRPr>
+            </a:pPr>
+            <a:r>
+              <a:t>W2 done = /health serves from Kubernetes on localhost:30080; rolled forward AND back.</a:t>
+            </a:r>
+          </a:p>
+          <a:p>
+            <a:pPr>
+              <a:defRPr sz="1900">
+                <a:solidFill>
+                  <a:srgbClr val="333333"/>
+                </a:solidFill>
+                <a:latin typeface="Calibri"/>
+              </a:defRPr>
+            </a:pPr>
+            <a:r>
+              <a:t>W3 done = plan shows 3 resources; apply serves on :8090; drift detected; destroy leaves nothing.</a:t>
+            </a:r>
+          </a:p>
+          <a:p>
+            <a:pPr>
+              <a:defRPr sz="1900">
+                <a:solidFill>
+                  <a:srgbClr val="333333"/>
+                </a:solidFill>
+                <a:latin typeface="Calibri"/>
+              </a:defRPr>
+            </a:pPr>
+            <a:r>
+              <a:t>Capstone done = ./run-capstone.sh green end-to-end + your PLATFORM-HANDOVER.md.</a:t>
+            </a:r>
+          </a:p>
+          <a:p>
+            <a:pPr>
+              <a:defRPr sz="1900">
+                <a:solidFill>
+                  <a:srgbClr val="333333"/>
+                </a:solidFill>
+                <a:latin typeface="Calibri"/>
+              </a:defRPr>
+            </a:pPr>
+            <a:r>
+              <a:t>Struggling is the point - use the troubleshooting tables, then ask three, then ask me.</a:t>
             </a:r>
           </a:p>
         </p:txBody>
@@ -8251,893 +9603,7 @@
 </p:sld>
 </file>
 
-<file path=ppt/slides/slide3.xml><?xml version="1.0" encoding="utf-8"?>
-<p:sld xmlns:a="http://schemas.openxmlformats.org/drawingml/2006/main" xmlns:p="http://schemas.openxmlformats.org/presentationml/2006/main" xmlns:r="http://schemas.openxmlformats.org/officeDocument/2006/relationships">
-  <p:cSld>
-    <p:spTree>
-      <p:nvGrpSpPr>
-        <p:cNvPr id="1" name=""/>
-        <p:cNvGrpSpPr/>
-        <p:nvPr/>
-      </p:nvGrpSpPr>
-      <p:grpSpPr/>
-      <p:sp>
-        <p:nvSpPr>
-          <p:cNvPr id="2" name="Title 1"/>
-          <p:cNvSpPr>
-            <a:spLocks noGrp="1"/>
-          </p:cNvSpPr>
-          <p:nvPr>
-            <p:ph type="title"/>
-          </p:nvPr>
-        </p:nvSpPr>
-        <p:spPr/>
-        <p:txBody>
-          <a:bodyPr/>
-          <a:lstStyle/>
-          <a:p>
-            <a:r>
-              <a:rPr sz="3200" b="1">
-                <a:solidFill>
-                  <a:srgbClr val="1A3C6C"/>
-                </a:solidFill>
-                <a:latin typeface="Calibri"/>
-              </a:rPr>
-              <a:t>Microservices Architecture</a:t>
-            </a:r>
-          </a:p>
-        </p:txBody>
-      </p:sp>
-      <p:sp>
-        <p:nvSpPr>
-          <p:cNvPr id="3" name="Content Placeholder 2"/>
-          <p:cNvSpPr>
-            <a:spLocks noGrp="1"/>
-          </p:cNvSpPr>
-          <p:nvPr>
-            <p:ph idx="1"/>
-          </p:nvPr>
-        </p:nvSpPr>
-        <p:spPr/>
-        <p:txBody>
-          <a:bodyPr/>
-          <a:lstStyle/>
-          <a:p>
-            <a:pPr>
-              <a:defRPr sz="2000">
-                <a:solidFill>
-                  <a:srgbClr val="333333"/>
-                </a:solidFill>
-                <a:latin typeface="Calibri"/>
-              </a:defRPr>
-            </a:pPr>
-            <a:r>
-              <a:t>Services are small, independently deployable and model bounded business contexts.</a:t>
-            </a:r>
-          </a:p>
-          <a:p>
-            <a:pPr>
-              <a:defRPr sz="2000">
-                <a:solidFill>
-                  <a:srgbClr val="333333"/>
-                </a:solidFill>
-                <a:latin typeface="Calibri"/>
-              </a:defRPr>
-            </a:pPr>
-            <a:r>
-              <a:t>Benefits: team autonomy, polyglot technology, independent scaling, faster releases.</a:t>
-            </a:r>
-          </a:p>
-          <a:p>
-            <a:pPr>
-              <a:defRPr sz="2000">
-                <a:solidFill>
-                  <a:srgbClr val="333333"/>
-                </a:solidFill>
-                <a:latin typeface="Calibri"/>
-              </a:defRPr>
-            </a:pPr>
-            <a:r>
-              <a:t>Costs: distributed-system complexity, network latency, data consistency challenges.</a:t>
-            </a:r>
-          </a:p>
-          <a:p>
-            <a:pPr>
-              <a:defRPr sz="2000">
-                <a:solidFill>
-                  <a:srgbClr val="333333"/>
-                </a:solidFill>
-                <a:latin typeface="Calibri"/>
-              </a:defRPr>
-            </a:pPr>
-            <a:r>
-              <a:t>Use microservices when the organisational and scaling benefits outweigh the overhead.</a:t>
-            </a:r>
-          </a:p>
-          <a:p>
-            <a:pPr>
-              <a:defRPr sz="2000">
-                <a:solidFill>
-                  <a:srgbClr val="333333"/>
-                </a:solidFill>
-                <a:latin typeface="Calibri"/>
-              </a:defRPr>
-            </a:pPr>
-            <a:r>
-              <a:t>Monolith-first is still a valid, often recommended, starting point.</a:t>
-            </a:r>
-          </a:p>
-        </p:txBody>
-      </p:sp>
-    </p:spTree>
-  </p:cSld>
-  <p:clrMapOvr>
-    <a:masterClrMapping/>
-  </p:clrMapOvr>
-</p:sld>
-</file>
-
-<file path=ppt/slides/slide30.xml><?xml version="1.0" encoding="utf-8"?>
-<p:sld xmlns:a="http://schemas.openxmlformats.org/drawingml/2006/main" xmlns:p="http://schemas.openxmlformats.org/presentationml/2006/main" xmlns:r="http://schemas.openxmlformats.org/officeDocument/2006/relationships">
-  <p:cSld>
-    <p:spTree>
-      <p:nvGrpSpPr>
-        <p:cNvPr id="1" name=""/>
-        <p:cNvGrpSpPr/>
-        <p:nvPr/>
-      </p:nvGrpSpPr>
-      <p:grpSpPr/>
-      <p:sp>
-        <p:nvSpPr>
-          <p:cNvPr id="2" name="Title 1"/>
-          <p:cNvSpPr>
-            <a:spLocks noGrp="1"/>
-          </p:cNvSpPr>
-          <p:nvPr>
-            <p:ph type="title"/>
-          </p:nvPr>
-        </p:nvSpPr>
-        <p:spPr/>
-        <p:txBody>
-          <a:bodyPr/>
-          <a:lstStyle/>
-          <a:p>
-            <a:r>
-              <a:rPr sz="3200" b="1">
-                <a:solidFill>
-                  <a:srgbClr val="1A3C6C"/>
-                </a:solidFill>
-                <a:latin typeface="Calibri"/>
-              </a:rPr>
-              <a:t>Your First Week Back at Work</a:t>
-            </a:r>
-          </a:p>
-        </p:txBody>
-      </p:sp>
-      <p:sp>
-        <p:nvSpPr>
-          <p:cNvPr id="3" name="Content Placeholder 2"/>
-          <p:cNvSpPr>
-            <a:spLocks noGrp="1"/>
-          </p:cNvSpPr>
-          <p:nvPr>
-            <p:ph idx="1"/>
-          </p:nvPr>
-        </p:nvSpPr>
-        <p:spPr/>
-        <p:txBody>
-          <a:bodyPr/>
-          <a:lstStyle/>
-          <a:p>
-            <a:pPr>
-              <a:defRPr sz="2000">
-                <a:solidFill>
-                  <a:srgbClr val="333333"/>
-                </a:solidFill>
-                <a:latin typeface="Calibri"/>
-              </a:defRPr>
-            </a:pPr>
-            <a:r>
-              <a:t>Pick ONE painful manual path and automate it end to end - small and finished beats big and abandoned.</a:t>
-            </a:r>
-          </a:p>
-          <a:p>
-            <a:pPr>
-              <a:defRPr sz="2000">
-                <a:solidFill>
-                  <a:srgbClr val="333333"/>
-                </a:solidFill>
-                <a:latin typeface="Calibri"/>
-              </a:defRPr>
-            </a:pPr>
-            <a:r>
-              <a:t>Add a real gate to an existing pipeline: tests or a fixable-critical scan.</a:t>
-            </a:r>
-          </a:p>
-          <a:p>
-            <a:pPr>
-              <a:defRPr sz="2000">
-                <a:solidFill>
-                  <a:srgbClr val="333333"/>
-                </a:solidFill>
-                <a:latin typeface="Calibri"/>
-              </a:defRPr>
-            </a:pPr>
-            <a:r>
-              <a:t>Write the first blameless postmortem after your next incident - share it.</a:t>
-            </a:r>
-          </a:p>
-          <a:p>
-            <a:pPr>
-              <a:defRPr sz="2000">
-                <a:solidFill>
-                  <a:srgbClr val="333333"/>
-                </a:solidFill>
-                <a:latin typeface="Calibri"/>
-              </a:defRPr>
-            </a:pPr>
-            <a:r>
-              <a:t>Measure a baseline: your team's deployment frequency and lead time this month.</a:t>
-            </a:r>
-          </a:p>
-          <a:p>
-            <a:pPr>
-              <a:defRPr sz="2000">
-                <a:solidFill>
-                  <a:srgbClr val="333333"/>
-                </a:solidFill>
-                <a:latin typeface="Calibri"/>
-              </a:defRPr>
-            </a:pPr>
-            <a:r>
-              <a:t>Start the platform conversation: which golden path would help most teams?</a:t>
-            </a:r>
-          </a:p>
-        </p:txBody>
-      </p:sp>
-    </p:spTree>
-  </p:cSld>
-  <p:clrMapOvr>
-    <a:masterClrMapping/>
-  </p:clrMapOvr>
-</p:sld>
-</file>
-
-<file path=ppt/slides/slide4.xml><?xml version="1.0" encoding="utf-8"?>
-<p:sld xmlns:a="http://schemas.openxmlformats.org/drawingml/2006/main" xmlns:p="http://schemas.openxmlformats.org/presentationml/2006/main" xmlns:r="http://schemas.openxmlformats.org/officeDocument/2006/relationships">
-  <p:cSld>
-    <p:spTree>
-      <p:nvGrpSpPr>
-        <p:cNvPr id="1" name=""/>
-        <p:cNvGrpSpPr/>
-        <p:nvPr/>
-      </p:nvGrpSpPr>
-      <p:grpSpPr/>
-      <p:sp>
-        <p:nvSpPr>
-          <p:cNvPr id="2" name="Title 1"/>
-          <p:cNvSpPr>
-            <a:spLocks noGrp="1"/>
-          </p:cNvSpPr>
-          <p:nvPr>
-            <p:ph type="title"/>
-          </p:nvPr>
-        </p:nvSpPr>
-        <p:spPr/>
-        <p:txBody>
-          <a:bodyPr/>
-          <a:lstStyle/>
-          <a:p/>
-        </p:txBody>
-      </p:sp>
-      <p:sp>
-        <p:nvSpPr>
-          <p:cNvPr id="3" name="TextBox 2"/>
-          <p:cNvSpPr txBox="1"/>
-          <p:nvPr/>
-        </p:nvSpPr>
-        <p:spPr>
-          <a:xfrm>
-            <a:off x="457200" y="274320"/>
-            <a:ext cx="8229600" cy="731520"/>
-          </a:xfrm>
-          <a:prstGeom prst="rect">
-            <a:avLst/>
-          </a:prstGeom>
-          <a:noFill/>
-        </p:spPr>
-        <p:txBody>
-          <a:bodyPr wrap="none">
-            <a:spAutoFit/>
-          </a:bodyPr>
-          <a:lstStyle/>
-          <a:p>
-            <a:r>
-              <a:rPr sz="3000" b="1">
-                <a:solidFill>
-                  <a:srgbClr val="1A3C6C"/>
-                </a:solidFill>
-                <a:latin typeface="Calibri"/>
-              </a:rPr>
-              <a:t>Monolith vs Microservices</a:t>
-            </a:r>
-          </a:p>
-        </p:txBody>
-      </p:sp>
-      <p:pic>
-        <p:nvPicPr>
-          <p:cNvPr id="4" name="Picture 3" descr="05-monolith-vs-microservices.png"/>
-          <p:cNvPicPr>
-            <a:picLocks noChangeAspect="1"/>
-          </p:cNvPicPr>
-          <p:nvPr/>
-        </p:nvPicPr>
-        <p:blipFill>
-          <a:blip r:embed="rId2"/>
-          <a:stretch>
-            <a:fillRect/>
-          </a:stretch>
-        </p:blipFill>
-        <p:spPr>
-          <a:xfrm>
-            <a:off x="914400" y="1097280"/>
-            <a:ext cx="7315200" cy="4373991"/>
-          </a:xfrm>
-          <a:prstGeom prst="rect">
-            <a:avLst/>
-          </a:prstGeom>
-        </p:spPr>
-      </p:pic>
-      <p:sp>
-        <p:nvSpPr>
-          <p:cNvPr id="5" name="TextBox 4"/>
-          <p:cNvSpPr txBox="1"/>
-          <p:nvPr/>
-        </p:nvSpPr>
-        <p:spPr>
-          <a:xfrm>
-            <a:off x="457200" y="5943600"/>
-            <a:ext cx="8229600" cy="731520"/>
-          </a:xfrm>
-          <a:prstGeom prst="rect">
-            <a:avLst/>
-          </a:prstGeom>
-          <a:noFill/>
-        </p:spPr>
-        <p:txBody>
-          <a:bodyPr wrap="none">
-            <a:spAutoFit/>
-          </a:bodyPr>
-          <a:lstStyle/>
-          <a:p>
-            <a:pPr algn="ctr"/>
-            <a:r>
-              <a:rPr sz="1600" b="0">
-                <a:solidFill>
-                  <a:srgbClr val="333333"/>
-                </a:solidFill>
-                <a:latin typeface="Calibri"/>
-              </a:rPr>
-              <a:t>Microservices trade deployment independence for operational complexity.</a:t>
-            </a:r>
-          </a:p>
-        </p:txBody>
-      </p:sp>
-    </p:spTree>
-  </p:cSld>
-  <p:clrMapOvr>
-    <a:masterClrMapping/>
-  </p:clrMapOvr>
-</p:sld>
-</file>
-
-<file path=ppt/slides/slide5.xml><?xml version="1.0" encoding="utf-8"?>
-<p:sld xmlns:a="http://schemas.openxmlformats.org/drawingml/2006/main" xmlns:p="http://schemas.openxmlformats.org/presentationml/2006/main" xmlns:r="http://schemas.openxmlformats.org/officeDocument/2006/relationships">
-  <p:cSld>
-    <p:spTree>
-      <p:nvGrpSpPr>
-        <p:cNvPr id="1" name=""/>
-        <p:cNvGrpSpPr/>
-        <p:nvPr/>
-      </p:nvGrpSpPr>
-      <p:grpSpPr/>
-      <p:sp>
-        <p:nvSpPr>
-          <p:cNvPr id="2" name="Title 1"/>
-          <p:cNvSpPr>
-            <a:spLocks noGrp="1"/>
-          </p:cNvSpPr>
-          <p:nvPr>
-            <p:ph type="title"/>
-          </p:nvPr>
-        </p:nvSpPr>
-        <p:spPr/>
-        <p:txBody>
-          <a:bodyPr/>
-          <a:lstStyle/>
-          <a:p>
-            <a:r>
-              <a:rPr sz="3200" b="1">
-                <a:solidFill>
-                  <a:srgbClr val="1A3C6C"/>
-                </a:solidFill>
-                <a:latin typeface="Calibri"/>
-              </a:rPr>
-              <a:t>Containerization with Docker</a:t>
-            </a:r>
-          </a:p>
-        </p:txBody>
-      </p:sp>
-      <p:sp>
-        <p:nvSpPr>
-          <p:cNvPr id="3" name="Content Placeholder 2"/>
-          <p:cNvSpPr>
-            <a:spLocks noGrp="1"/>
-          </p:cNvSpPr>
-          <p:nvPr>
-            <p:ph idx="1"/>
-          </p:nvPr>
-        </p:nvSpPr>
-        <p:spPr/>
-        <p:txBody>
-          <a:bodyPr/>
-          <a:lstStyle/>
-          <a:p>
-            <a:pPr>
-              <a:defRPr sz="2000">
-                <a:solidFill>
-                  <a:srgbClr val="333333"/>
-                </a:solidFill>
-                <a:latin typeface="Calibri"/>
-              </a:defRPr>
-            </a:pPr>
-            <a:r>
-              <a:t>Containers package an application plus its dependencies into a portable image.</a:t>
-            </a:r>
-          </a:p>
-          <a:p>
-            <a:pPr>
-              <a:defRPr sz="2000">
-                <a:solidFill>
-                  <a:srgbClr val="333333"/>
-                </a:solidFill>
-                <a:latin typeface="Calibri"/>
-              </a:defRPr>
-            </a:pPr>
-            <a:r>
-              <a:t>Images are layered and immutable; containers are runtime instances.</a:t>
-            </a:r>
-          </a:p>
-          <a:p>
-            <a:pPr>
-              <a:defRPr sz="2000">
-                <a:solidFill>
-                  <a:srgbClr val="333333"/>
-                </a:solidFill>
-                <a:latin typeface="Calibri"/>
-              </a:defRPr>
-            </a:pPr>
-            <a:r>
-              <a:t>Dockerfile best practices: small base images, multi-stage builds, non-root users, health checks.</a:t>
-            </a:r>
-          </a:p>
-          <a:p>
-            <a:pPr>
-              <a:defRPr sz="2000">
-                <a:solidFill>
-                  <a:srgbClr val="333333"/>
-                </a:solidFill>
-                <a:latin typeface="Calibri"/>
-              </a:defRPr>
-            </a:pPr>
-            <a:r>
-              <a:t>Images belong in a registry; tags tie them to versions and pipelines.</a:t>
-            </a:r>
-          </a:p>
-          <a:p>
-            <a:pPr>
-              <a:defRPr sz="2000">
-                <a:solidFill>
-                  <a:srgbClr val="333333"/>
-                </a:solidFill>
-                <a:latin typeface="Calibri"/>
-              </a:defRPr>
-            </a:pPr>
-            <a:r>
-              <a:t>Docker Compose orchestrates multiple containers on a single host.</a:t>
-            </a:r>
-          </a:p>
-        </p:txBody>
-      </p:sp>
-    </p:spTree>
-  </p:cSld>
-  <p:clrMapOvr>
-    <a:masterClrMapping/>
-  </p:clrMapOvr>
-</p:sld>
-</file>
-
-<file path=ppt/slides/slide6.xml><?xml version="1.0" encoding="utf-8"?>
-<p:sld xmlns:a="http://schemas.openxmlformats.org/drawingml/2006/main" xmlns:p="http://schemas.openxmlformats.org/presentationml/2006/main" xmlns:r="http://schemas.openxmlformats.org/officeDocument/2006/relationships">
-  <p:cSld>
-    <p:spTree>
-      <p:nvGrpSpPr>
-        <p:cNvPr id="1" name=""/>
-        <p:cNvGrpSpPr/>
-        <p:nvPr/>
-      </p:nvGrpSpPr>
-      <p:grpSpPr/>
-      <p:sp>
-        <p:nvSpPr>
-          <p:cNvPr id="2" name="Title 1"/>
-          <p:cNvSpPr>
-            <a:spLocks noGrp="1"/>
-          </p:cNvSpPr>
-          <p:nvPr>
-            <p:ph type="title"/>
-          </p:nvPr>
-        </p:nvSpPr>
-        <p:spPr/>
-        <p:txBody>
-          <a:bodyPr/>
-          <a:lstStyle/>
-          <a:p>
-            <a:r>
-              <a:rPr sz="3200" b="1">
-                <a:solidFill>
-                  <a:srgbClr val="1A3C6C"/>
-                </a:solidFill>
-                <a:latin typeface="Calibri"/>
-              </a:rPr>
-              <a:t>Kubernetes Fundamentals</a:t>
-            </a:r>
-          </a:p>
-        </p:txBody>
-      </p:sp>
-      <p:sp>
-        <p:nvSpPr>
-          <p:cNvPr id="3" name="Content Placeholder 2"/>
-          <p:cNvSpPr>
-            <a:spLocks noGrp="1"/>
-          </p:cNvSpPr>
-          <p:nvPr>
-            <p:ph idx="1"/>
-          </p:nvPr>
-        </p:nvSpPr>
-        <p:spPr/>
-        <p:txBody>
-          <a:bodyPr/>
-          <a:lstStyle/>
-          <a:p>
-            <a:pPr>
-              <a:defRPr sz="2000">
-                <a:solidFill>
-                  <a:srgbClr val="333333"/>
-                </a:solidFill>
-                <a:latin typeface="Calibri"/>
-              </a:defRPr>
-            </a:pPr>
-            <a:r>
-              <a:t>Kubernetes automates deployment, scaling and management of containerised applications.</a:t>
-            </a:r>
-          </a:p>
-          <a:p>
-            <a:pPr>
-              <a:defRPr sz="2000">
-                <a:solidFill>
-                  <a:srgbClr val="333333"/>
-                </a:solidFill>
-                <a:latin typeface="Calibri"/>
-              </a:defRPr>
-            </a:pPr>
-            <a:r>
-              <a:t>Control plane: API server, etcd, scheduler, controller manager.</a:t>
-            </a:r>
-          </a:p>
-          <a:p>
-            <a:pPr>
-              <a:defRPr sz="2000">
-                <a:solidFill>
-                  <a:srgbClr val="333333"/>
-                </a:solidFill>
-                <a:latin typeface="Calibri"/>
-              </a:defRPr>
-            </a:pPr>
-            <a:r>
-              <a:t>Worker nodes run kubelet, kube-proxy and Pods (one or more containers).</a:t>
-            </a:r>
-          </a:p>
-          <a:p>
-            <a:pPr>
-              <a:defRPr sz="2000">
-                <a:solidFill>
-                  <a:srgbClr val="333333"/>
-                </a:solidFill>
-                <a:latin typeface="Calibri"/>
-              </a:defRPr>
-            </a:pPr>
-            <a:r>
-              <a:t>Key resources: Deployment, Service, ConfigMap, Secret, Ingress, Namespace.</a:t>
-            </a:r>
-          </a:p>
-          <a:p>
-            <a:pPr>
-              <a:defRPr sz="2000">
-                <a:solidFill>
-                  <a:srgbClr val="333333"/>
-                </a:solidFill>
-                <a:latin typeface="Calibri"/>
-              </a:defRPr>
-            </a:pPr>
-            <a:r>
-              <a:t>Declarative YAML manifests are stored in Git and applied by CI/CD or GitOps agents.</a:t>
-            </a:r>
-          </a:p>
-        </p:txBody>
-      </p:sp>
-    </p:spTree>
-  </p:cSld>
-  <p:clrMapOvr>
-    <a:masterClrMapping/>
-  </p:clrMapOvr>
-</p:sld>
-</file>
-
-<file path=ppt/slides/slide7.xml><?xml version="1.0" encoding="utf-8"?>
-<p:sld xmlns:a="http://schemas.openxmlformats.org/drawingml/2006/main" xmlns:p="http://schemas.openxmlformats.org/presentationml/2006/main" xmlns:r="http://schemas.openxmlformats.org/officeDocument/2006/relationships">
-  <p:cSld>
-    <p:spTree>
-      <p:nvGrpSpPr>
-        <p:cNvPr id="1" name=""/>
-        <p:cNvGrpSpPr/>
-        <p:nvPr/>
-      </p:nvGrpSpPr>
-      <p:grpSpPr/>
-      <p:sp>
-        <p:nvSpPr>
-          <p:cNvPr id="2" name="Title 1"/>
-          <p:cNvSpPr>
-            <a:spLocks noGrp="1"/>
-          </p:cNvSpPr>
-          <p:nvPr>
-            <p:ph type="title"/>
-          </p:nvPr>
-        </p:nvSpPr>
-        <p:spPr/>
-        <p:txBody>
-          <a:bodyPr/>
-          <a:lstStyle/>
-          <a:p/>
-        </p:txBody>
-      </p:sp>
-      <p:sp>
-        <p:nvSpPr>
-          <p:cNvPr id="3" name="TextBox 2"/>
-          <p:cNvSpPr txBox="1"/>
-          <p:nvPr/>
-        </p:nvSpPr>
-        <p:spPr>
-          <a:xfrm>
-            <a:off x="457200" y="274320"/>
-            <a:ext cx="8229600" cy="731520"/>
-          </a:xfrm>
-          <a:prstGeom prst="rect">
-            <a:avLst/>
-          </a:prstGeom>
-          <a:noFill/>
-        </p:spPr>
-        <p:txBody>
-          <a:bodyPr wrap="none">
-            <a:spAutoFit/>
-          </a:bodyPr>
-          <a:lstStyle/>
-          <a:p>
-            <a:r>
-              <a:rPr sz="3000" b="1">
-                <a:solidFill>
-                  <a:srgbClr val="1A3C6C"/>
-                </a:solidFill>
-                <a:latin typeface="Calibri"/>
-              </a:rPr>
-              <a:t>Kubernetes Architecture</a:t>
-            </a:r>
-          </a:p>
-        </p:txBody>
-      </p:sp>
-      <p:pic>
-        <p:nvPicPr>
-          <p:cNvPr id="4" name="Picture 3" descr="04-kubernetes-architecture.png"/>
-          <p:cNvPicPr>
-            <a:picLocks noChangeAspect="1"/>
-          </p:cNvPicPr>
-          <p:nvPr/>
-        </p:nvPicPr>
-        <p:blipFill>
-          <a:blip r:embed="rId2"/>
-          <a:stretch>
-            <a:fillRect/>
-          </a:stretch>
-        </p:blipFill>
-        <p:spPr>
-          <a:xfrm>
-            <a:off x="914400" y="1097280"/>
-            <a:ext cx="7315200" cy="4507480"/>
-          </a:xfrm>
-          <a:prstGeom prst="rect">
-            <a:avLst/>
-          </a:prstGeom>
-        </p:spPr>
-      </p:pic>
-      <p:sp>
-        <p:nvSpPr>
-          <p:cNvPr id="5" name="TextBox 4"/>
-          <p:cNvSpPr txBox="1"/>
-          <p:nvPr/>
-        </p:nvSpPr>
-        <p:spPr>
-          <a:xfrm>
-            <a:off x="457200" y="5943600"/>
-            <a:ext cx="8229600" cy="731520"/>
-          </a:xfrm>
-          <a:prstGeom prst="rect">
-            <a:avLst/>
-          </a:prstGeom>
-          <a:noFill/>
-        </p:spPr>
-        <p:txBody>
-          <a:bodyPr wrap="none">
-            <a:spAutoFit/>
-          </a:bodyPr>
-          <a:lstStyle/>
-          <a:p>
-            <a:pPr algn="ctr"/>
-            <a:r>
-              <a:rPr sz="1600" b="0">
-                <a:solidFill>
-                  <a:srgbClr val="333333"/>
-                </a:solidFill>
-                <a:latin typeface="Calibri"/>
-              </a:rPr>
-              <a:t>Control plane manages desired state; worker nodes run Pods.</a:t>
-            </a:r>
-          </a:p>
-        </p:txBody>
-      </p:sp>
-    </p:spTree>
-  </p:cSld>
-  <p:clrMapOvr>
-    <a:masterClrMapping/>
-  </p:clrMapOvr>
-</p:sld>
-</file>
-
-<file path=ppt/slides/slide8.xml><?xml version="1.0" encoding="utf-8"?>
-<p:sld xmlns:a="http://schemas.openxmlformats.org/drawingml/2006/main" xmlns:p="http://schemas.openxmlformats.org/presentationml/2006/main" xmlns:r="http://schemas.openxmlformats.org/officeDocument/2006/relationships">
-  <p:cSld>
-    <p:spTree>
-      <p:nvGrpSpPr>
-        <p:cNvPr id="1" name=""/>
-        <p:cNvGrpSpPr/>
-        <p:nvPr/>
-      </p:nvGrpSpPr>
-      <p:grpSpPr/>
-      <p:sp>
-        <p:nvSpPr>
-          <p:cNvPr id="2" name="Title 1"/>
-          <p:cNvSpPr>
-            <a:spLocks noGrp="1"/>
-          </p:cNvSpPr>
-          <p:nvPr>
-            <p:ph type="title"/>
-          </p:nvPr>
-        </p:nvSpPr>
-        <p:spPr/>
-        <p:txBody>
-          <a:bodyPr/>
-          <a:lstStyle/>
-          <a:p>
-            <a:r>
-              <a:rPr sz="3200" b="1">
-                <a:solidFill>
-                  <a:srgbClr val="1A3C6C"/>
-                </a:solidFill>
-                <a:latin typeface="Calibri"/>
-              </a:rPr>
-              <a:t>Managing Services at Scale</a:t>
-            </a:r>
-          </a:p>
-        </p:txBody>
-      </p:sp>
-      <p:sp>
-        <p:nvSpPr>
-          <p:cNvPr id="3" name="Content Placeholder 2"/>
-          <p:cNvSpPr>
-            <a:spLocks noGrp="1"/>
-          </p:cNvSpPr>
-          <p:nvPr>
-            <p:ph idx="1"/>
-          </p:nvPr>
-        </p:nvSpPr>
-        <p:spPr/>
-        <p:txBody>
-          <a:bodyPr/>
-          <a:lstStyle/>
-          <a:p>
-            <a:pPr>
-              <a:defRPr sz="2000">
-                <a:solidFill>
-                  <a:srgbClr val="333333"/>
-                </a:solidFill>
-                <a:latin typeface="Calibri"/>
-              </a:defRPr>
-            </a:pPr>
-            <a:r>
-              <a:t>Service discovery and load balancing are built in via Services and DNS.</a:t>
-            </a:r>
-          </a:p>
-          <a:p>
-            <a:pPr>
-              <a:defRPr sz="2000">
-                <a:solidFill>
-                  <a:srgbClr val="333333"/>
-                </a:solidFill>
-                <a:latin typeface="Calibri"/>
-              </a:defRPr>
-            </a:pPr>
-            <a:r>
-              <a:t>Horizontal Pod Autoscaling adjusts replicas based on CPU, memory or custom metrics.</a:t>
-            </a:r>
-          </a:p>
-          <a:p>
-            <a:pPr>
-              <a:defRPr sz="2000">
-                <a:solidFill>
-                  <a:srgbClr val="333333"/>
-                </a:solidFill>
-                <a:latin typeface="Calibri"/>
-              </a:defRPr>
-            </a:pPr>
-            <a:r>
-              <a:t>Rolling updates and rollbacks reduce deployment risk.</a:t>
-            </a:r>
-          </a:p>
-          <a:p>
-            <a:pPr>
-              <a:defRPr sz="2000">
-                <a:solidFill>
-                  <a:srgbClr val="333333"/>
-                </a:solidFill>
-                <a:latin typeface="Calibri"/>
-              </a:defRPr>
-            </a:pPr>
-            <a:r>
-              <a:t>Resource requests and limits prevent noisy neighbours.</a:t>
-            </a:r>
-          </a:p>
-          <a:p>
-            <a:pPr>
-              <a:defRPr sz="2000">
-                <a:solidFill>
-                  <a:srgbClr val="333333"/>
-                </a:solidFill>
-                <a:latin typeface="Calibri"/>
-              </a:defRPr>
-            </a:pPr>
-            <a:r>
-              <a:t>Namespaces isolate environments and teams on a shared cluster.</a:t>
-            </a:r>
-          </a:p>
-        </p:txBody>
-      </p:sp>
-    </p:spTree>
-  </p:cSld>
-  <p:clrMapOvr>
-    <a:masterClrMapping/>
-  </p:clrMapOvr>
-</p:sld>
-</file>
-
-<file path=ppt/slides/slide9.xml><?xml version="1.0" encoding="utf-8"?>
+<file path=ppt/slides/slide35.xml><?xml version="1.0" encoding="utf-8"?>
 <p:sld xmlns:a="http://schemas.openxmlformats.org/drawingml/2006/main" xmlns:p="http://schemas.openxmlformats.org/presentationml/2006/main" xmlns:r="http://schemas.openxmlformats.org/officeDocument/2006/relationships">
   <p:cSld>
     <p:spTree>
@@ -9237,11 +9703,1160 @@
                 </a:solidFill>
                 <a:latin typeface="Calibri"/>
               </a:rPr>
-              <a:t>Module 7</a:t>
+              <a:t>Module 11</a:t>
             </a:r>
             <a:br/>
             <a:r>
-              <a:t>Security and Compliance (DevSecOps)</a:t>
+              <a:t>Summary and Next Steps</a:t>
+            </a:r>
+          </a:p>
+        </p:txBody>
+      </p:sp>
+    </p:spTree>
+  </p:cSld>
+  <p:clrMapOvr>
+    <a:masterClrMapping/>
+  </p:clrMapOvr>
+</p:sld>
+</file>
+
+<file path=ppt/slides/slide36.xml><?xml version="1.0" encoding="utf-8"?>
+<p:sld xmlns:a="http://schemas.openxmlformats.org/drawingml/2006/main" xmlns:p="http://schemas.openxmlformats.org/presentationml/2006/main" xmlns:r="http://schemas.openxmlformats.org/officeDocument/2006/relationships">
+  <p:cSld>
+    <p:spTree>
+      <p:nvGrpSpPr>
+        <p:cNvPr id="1" name=""/>
+        <p:cNvGrpSpPr/>
+        <p:nvPr/>
+      </p:nvGrpSpPr>
+      <p:grpSpPr/>
+      <p:sp>
+        <p:nvSpPr>
+          <p:cNvPr id="2" name="Title 1"/>
+          <p:cNvSpPr>
+            <a:spLocks noGrp="1"/>
+          </p:cNvSpPr>
+          <p:nvPr>
+            <p:ph type="title"/>
+          </p:nvPr>
+        </p:nvSpPr>
+        <p:spPr/>
+        <p:txBody>
+          <a:bodyPr/>
+          <a:lstStyle/>
+          <a:p>
+            <a:r>
+              <a:rPr sz="3200" b="1">
+                <a:solidFill>
+                  <a:srgbClr val="1A3C6C"/>
+                </a:solidFill>
+                <a:latin typeface="Calibri"/>
+              </a:rPr>
+              <a:t>What You Built in Two Days</a:t>
+            </a:r>
+          </a:p>
+        </p:txBody>
+      </p:sp>
+      <p:sp>
+        <p:nvSpPr>
+          <p:cNvPr id="3" name="Content Placeholder 2"/>
+          <p:cNvSpPr>
+            <a:spLocks noGrp="1"/>
+          </p:cNvSpPr>
+          <p:nvPr>
+            <p:ph idx="1"/>
+          </p:nvPr>
+        </p:nvSpPr>
+        <p:spPr/>
+        <p:txBody>
+          <a:bodyPr/>
+          <a:lstStyle/>
+          <a:p>
+            <a:pPr>
+              <a:defRPr sz="1900">
+                <a:solidFill>
+                  <a:srgbClr val="333333"/>
+                </a:solidFill>
+                <a:latin typeface="Calibri"/>
+              </a:defRPr>
+            </a:pPr>
+            <a:r>
+              <a:t>A microservice tested, containerised and orchestrated (demos + Workshop 2).</a:t>
+            </a:r>
+          </a:p>
+          <a:p>
+            <a:pPr>
+              <a:defRPr sz="1900">
+                <a:solidFill>
+                  <a:srgbClr val="333333"/>
+                </a:solidFill>
+                <a:latin typeface="Calibri"/>
+              </a:defRPr>
+            </a:pPr>
+            <a:r>
+              <a:t>A CI pipeline with a real security gate (Workshop 1).</a:t>
+            </a:r>
+          </a:p>
+          <a:p>
+            <a:pPr>
+              <a:defRPr sz="1900">
+                <a:solidFill>
+                  <a:srgbClr val="333333"/>
+                </a:solidFill>
+                <a:latin typeface="Calibri"/>
+              </a:defRPr>
+            </a:pPr>
+            <a:r>
+              <a:t>Infrastructure declared as code, with drift detection (Workshop 3).</a:t>
+            </a:r>
+          </a:p>
+          <a:p>
+            <a:pPr>
+              <a:defRPr sz="1900">
+                <a:solidFill>
+                  <a:srgbClr val="333333"/>
+                </a:solidFill>
+                <a:latin typeface="Calibri"/>
+              </a:defRPr>
+            </a:pPr>
+            <a:r>
+              <a:t>A Kubernetes deployment with probes, limits and rolling updates - rolled back on command.</a:t>
+            </a:r>
+          </a:p>
+          <a:p>
+            <a:pPr>
+              <a:defRPr sz="1900">
+                <a:solidFill>
+                  <a:srgbClr val="333333"/>
+                </a:solidFill>
+                <a:latin typeface="Calibri"/>
+              </a:defRPr>
+            </a:pPr>
+            <a:r>
+              <a:t>Policies, scans, dashboards, an SLO - and one survived incident (module demos).</a:t>
+            </a:r>
+          </a:p>
+          <a:p>
+            <a:pPr>
+              <a:defRPr sz="1900">
+                <a:solidFill>
+                  <a:srgbClr val="333333"/>
+                </a:solidFill>
+                <a:latin typeface="Calibri"/>
+              </a:defRPr>
+            </a:pPr>
+            <a:r>
+              <a:t>A golden path handed over as a platform product (capstone).</a:t>
+            </a:r>
+          </a:p>
+        </p:txBody>
+      </p:sp>
+    </p:spTree>
+  </p:cSld>
+  <p:clrMapOvr>
+    <a:masterClrMapping/>
+  </p:clrMapOvr>
+</p:sld>
+</file>
+
+<file path=ppt/slides/slide37.xml><?xml version="1.0" encoding="utf-8"?>
+<p:sld xmlns:a="http://schemas.openxmlformats.org/drawingml/2006/main" xmlns:p="http://schemas.openxmlformats.org/presentationml/2006/main" xmlns:r="http://schemas.openxmlformats.org/officeDocument/2006/relationships">
+  <p:cSld>
+    <p:spTree>
+      <p:nvGrpSpPr>
+        <p:cNvPr id="1" name=""/>
+        <p:cNvGrpSpPr/>
+        <p:nvPr/>
+      </p:nvGrpSpPr>
+      <p:grpSpPr/>
+      <p:sp>
+        <p:nvSpPr>
+          <p:cNvPr id="2" name="Title 1"/>
+          <p:cNvSpPr>
+            <a:spLocks noGrp="1"/>
+          </p:cNvSpPr>
+          <p:nvPr>
+            <p:ph type="title"/>
+          </p:nvPr>
+        </p:nvSpPr>
+        <p:spPr/>
+        <p:txBody>
+          <a:bodyPr/>
+          <a:lstStyle/>
+          <a:p>
+            <a:r>
+              <a:rPr sz="3200" b="1">
+                <a:solidFill>
+                  <a:srgbClr val="1A3C6C"/>
+                </a:solidFill>
+                <a:latin typeface="Calibri"/>
+              </a:rPr>
+              <a:t>Continuing the Journey</a:t>
+            </a:r>
+          </a:p>
+        </p:txBody>
+      </p:sp>
+      <p:sp>
+        <p:nvSpPr>
+          <p:cNvPr id="3" name="Content Placeholder 2"/>
+          <p:cNvSpPr>
+            <a:spLocks noGrp="1"/>
+          </p:cNvSpPr>
+          <p:nvPr>
+            <p:ph idx="1"/>
+          </p:nvPr>
+        </p:nvSpPr>
+        <p:spPr/>
+        <p:txBody>
+          <a:bodyPr/>
+          <a:lstStyle/>
+          <a:p>
+            <a:pPr>
+              <a:defRPr sz="1900">
+                <a:solidFill>
+                  <a:srgbClr val="333333"/>
+                </a:solidFill>
+                <a:latin typeface="Calibri"/>
+              </a:defRPr>
+            </a:pPr>
+            <a:r>
+              <a:t>Kubernetes: CKAD / CKA certifications; kind and minikube for practice.</a:t>
+            </a:r>
+          </a:p>
+          <a:p>
+            <a:pPr>
+              <a:defRPr sz="1900">
+                <a:solidFill>
+                  <a:srgbClr val="333333"/>
+                </a:solidFill>
+                <a:latin typeface="Calibri"/>
+              </a:defRPr>
+            </a:pPr>
+            <a:r>
+              <a:t>IaC: HashiCorp Terraform Associate; Ansible for configuration management.</a:t>
+            </a:r>
+          </a:p>
+          <a:p>
+            <a:pPr>
+              <a:defRPr sz="1900">
+                <a:solidFill>
+                  <a:srgbClr val="333333"/>
+                </a:solidFill>
+                <a:latin typeface="Calibri"/>
+              </a:defRPr>
+            </a:pPr>
+            <a:r>
+              <a:t>CI/CD: GitHub Actions docs and the act local runner you already installed.</a:t>
+            </a:r>
+          </a:p>
+          <a:p>
+            <a:pPr>
+              <a:defRPr sz="1900">
+                <a:solidFill>
+                  <a:srgbClr val="333333"/>
+                </a:solidFill>
+                <a:latin typeface="Calibri"/>
+              </a:defRPr>
+            </a:pPr>
+            <a:r>
+              <a:t>Reading: Accelerate (DORA), Team Topologies, The Phoenix Project, Google SRE books (free online).</a:t>
+            </a:r>
+          </a:p>
+          <a:p>
+            <a:pPr>
+              <a:defRPr sz="1900">
+                <a:solidFill>
+                  <a:srgbClr val="333333"/>
+                </a:solidFill>
+                <a:latin typeface="Calibri"/>
+              </a:defRPr>
+            </a:pPr>
+            <a:r>
+              <a:t>Communities: platformengineering.org, CNCF projects, local DevOps meetups.</a:t>
+            </a:r>
+          </a:p>
+        </p:txBody>
+      </p:sp>
+    </p:spTree>
+  </p:cSld>
+  <p:clrMapOvr>
+    <a:masterClrMapping/>
+  </p:clrMapOvr>
+</p:sld>
+</file>
+
+<file path=ppt/slides/slide38.xml><?xml version="1.0" encoding="utf-8"?>
+<p:sld xmlns:a="http://schemas.openxmlformats.org/drawingml/2006/main" xmlns:p="http://schemas.openxmlformats.org/presentationml/2006/main" xmlns:r="http://schemas.openxmlformats.org/officeDocument/2006/relationships">
+  <p:cSld>
+    <p:spTree>
+      <p:nvGrpSpPr>
+        <p:cNvPr id="1" name=""/>
+        <p:cNvGrpSpPr/>
+        <p:nvPr/>
+      </p:nvGrpSpPr>
+      <p:grpSpPr/>
+      <p:sp>
+        <p:nvSpPr>
+          <p:cNvPr id="2" name="Title 1"/>
+          <p:cNvSpPr>
+            <a:spLocks noGrp="1"/>
+          </p:cNvSpPr>
+          <p:nvPr>
+            <p:ph type="title"/>
+          </p:nvPr>
+        </p:nvSpPr>
+        <p:spPr/>
+        <p:txBody>
+          <a:bodyPr/>
+          <a:lstStyle/>
+          <a:p>
+            <a:r>
+              <a:rPr sz="3200" b="1">
+                <a:solidFill>
+                  <a:srgbClr val="1A3C6C"/>
+                </a:solidFill>
+                <a:latin typeface="Calibri"/>
+              </a:rPr>
+              <a:t>Your First Week Back at Work</a:t>
+            </a:r>
+          </a:p>
+        </p:txBody>
+      </p:sp>
+      <p:sp>
+        <p:nvSpPr>
+          <p:cNvPr id="3" name="Content Placeholder 2"/>
+          <p:cNvSpPr>
+            <a:spLocks noGrp="1"/>
+          </p:cNvSpPr>
+          <p:nvPr>
+            <p:ph idx="1"/>
+          </p:nvPr>
+        </p:nvSpPr>
+        <p:spPr/>
+        <p:txBody>
+          <a:bodyPr/>
+          <a:lstStyle/>
+          <a:p>
+            <a:pPr>
+              <a:defRPr sz="1900">
+                <a:solidFill>
+                  <a:srgbClr val="333333"/>
+                </a:solidFill>
+                <a:latin typeface="Calibri"/>
+              </a:defRPr>
+            </a:pPr>
+            <a:r>
+              <a:t>Pick ONE painful manual path and automate it end to end - small and finished beats big and abandoned.</a:t>
+            </a:r>
+          </a:p>
+          <a:p>
+            <a:pPr>
+              <a:defRPr sz="1900">
+                <a:solidFill>
+                  <a:srgbClr val="333333"/>
+                </a:solidFill>
+                <a:latin typeface="Calibri"/>
+              </a:defRPr>
+            </a:pPr>
+            <a:r>
+              <a:t>Add a real gate to an existing pipeline: tests or a fixable-critical scan.</a:t>
+            </a:r>
+          </a:p>
+          <a:p>
+            <a:pPr>
+              <a:defRPr sz="1900">
+                <a:solidFill>
+                  <a:srgbClr val="333333"/>
+                </a:solidFill>
+                <a:latin typeface="Calibri"/>
+              </a:defRPr>
+            </a:pPr>
+            <a:r>
+              <a:t>Write the first blameless postmortem after your next incident - and share it.</a:t>
+            </a:r>
+          </a:p>
+          <a:p>
+            <a:pPr>
+              <a:defRPr sz="1900">
+                <a:solidFill>
+                  <a:srgbClr val="333333"/>
+                </a:solidFill>
+                <a:latin typeface="Calibri"/>
+              </a:defRPr>
+            </a:pPr>
+            <a:r>
+              <a:t>Measure a baseline: your team's deployment frequency and lead time this month.</a:t>
+            </a:r>
+          </a:p>
+          <a:p>
+            <a:pPr>
+              <a:defRPr sz="1900">
+                <a:solidFill>
+                  <a:srgbClr val="333333"/>
+                </a:solidFill>
+                <a:latin typeface="Calibri"/>
+              </a:defRPr>
+            </a:pPr>
+            <a:r>
+              <a:t>Start the platform conversation: which golden path would help the most teams?</a:t>
+            </a:r>
+          </a:p>
+        </p:txBody>
+      </p:sp>
+    </p:spTree>
+  </p:cSld>
+  <p:clrMapOvr>
+    <a:masterClrMapping/>
+  </p:clrMapOvr>
+</p:sld>
+</file>
+
+<file path=ppt/slides/slide4.xml><?xml version="1.0" encoding="utf-8"?>
+<p:sld xmlns:a="http://schemas.openxmlformats.org/drawingml/2006/main" xmlns:p="http://schemas.openxmlformats.org/presentationml/2006/main" xmlns:r="http://schemas.openxmlformats.org/officeDocument/2006/relationships">
+  <p:cSld>
+    <p:spTree>
+      <p:nvGrpSpPr>
+        <p:cNvPr id="1" name=""/>
+        <p:cNvGrpSpPr/>
+        <p:nvPr/>
+      </p:nvGrpSpPr>
+      <p:grpSpPr/>
+      <p:sp>
+        <p:nvSpPr>
+          <p:cNvPr id="2" name="Title 1"/>
+          <p:cNvSpPr>
+            <a:spLocks noGrp="1"/>
+          </p:cNvSpPr>
+          <p:nvPr>
+            <p:ph type="title"/>
+          </p:nvPr>
+        </p:nvSpPr>
+        <p:spPr/>
+        <p:txBody>
+          <a:bodyPr/>
+          <a:lstStyle/>
+          <a:p>
+            <a:r>
+              <a:rPr sz="3200" b="1">
+                <a:solidFill>
+                  <a:srgbClr val="1A3C6C"/>
+                </a:solidFill>
+                <a:latin typeface="Calibri"/>
+              </a:rPr>
+              <a:t>Microservice Design Principles</a:t>
+            </a:r>
+          </a:p>
+        </p:txBody>
+      </p:sp>
+      <p:sp>
+        <p:nvSpPr>
+          <p:cNvPr id="3" name="Content Placeholder 2"/>
+          <p:cNvSpPr>
+            <a:spLocks noGrp="1"/>
+          </p:cNvSpPr>
+          <p:nvPr>
+            <p:ph idx="1"/>
+          </p:nvPr>
+        </p:nvSpPr>
+        <p:spPr/>
+        <p:txBody>
+          <a:bodyPr/>
+          <a:lstStyle/>
+          <a:p>
+            <a:pPr>
+              <a:defRPr sz="1900">
+                <a:solidFill>
+                  <a:srgbClr val="333333"/>
+                </a:solidFill>
+                <a:latin typeface="Calibri"/>
+              </a:defRPr>
+            </a:pPr>
+            <a:r>
+              <a:t>Boundaries follow BUSINESS domains (bounded contexts), not technical layers.</a:t>
+            </a:r>
+          </a:p>
+          <a:p>
+            <a:pPr>
+              <a:defRPr sz="1900">
+                <a:solidFill>
+                  <a:srgbClr val="333333"/>
+                </a:solidFill>
+                <a:latin typeface="Calibri"/>
+              </a:defRPr>
+            </a:pPr>
+            <a:r>
+              <a:t>Independent deployability is the acid test - if two services always ship together, they are one.</a:t>
+            </a:r>
+          </a:p>
+          <a:p>
+            <a:pPr>
+              <a:defRPr sz="1900">
+                <a:solidFill>
+                  <a:srgbClr val="333333"/>
+                </a:solidFill>
+                <a:latin typeface="Calibri"/>
+              </a:defRPr>
+            </a:pPr>
+            <a:r>
+              <a:t>Database per service: no shared tables; integration through APIs and events only.</a:t>
+            </a:r>
+          </a:p>
+          <a:p>
+            <a:pPr>
+              <a:defRPr sz="1900">
+                <a:solidFill>
+                  <a:srgbClr val="333333"/>
+                </a:solidFill>
+                <a:latin typeface="Calibri"/>
+              </a:defRPr>
+            </a:pPr>
+            <a:r>
+              <a:t>Smart endpoints, dumb pipes: logic in services, not in a clever bus.</a:t>
+            </a:r>
+          </a:p>
+          <a:p>
+            <a:pPr>
+              <a:defRPr sz="1900">
+                <a:solidFill>
+                  <a:srgbClr val="333333"/>
+                </a:solidFill>
+                <a:latin typeface="Calibri"/>
+              </a:defRPr>
+            </a:pPr>
+            <a:r>
+              <a:t>Design for partial failure: timeouts, retries with backoff, circuit breakers, graceful degradation.</a:t>
+            </a:r>
+          </a:p>
+        </p:txBody>
+      </p:sp>
+    </p:spTree>
+  </p:cSld>
+  <p:clrMapOvr>
+    <a:masterClrMapping/>
+  </p:clrMapOvr>
+</p:sld>
+</file>
+
+<file path=ppt/slides/slide5.xml><?xml version="1.0" encoding="utf-8"?>
+<p:sld xmlns:a="http://schemas.openxmlformats.org/drawingml/2006/main" xmlns:p="http://schemas.openxmlformats.org/presentationml/2006/main" xmlns:r="http://schemas.openxmlformats.org/officeDocument/2006/relationships">
+  <p:cSld>
+    <p:spTree>
+      <p:nvGrpSpPr>
+        <p:cNvPr id="1" name=""/>
+        <p:cNvGrpSpPr/>
+        <p:nvPr/>
+      </p:nvGrpSpPr>
+      <p:grpSpPr/>
+      <p:sp>
+        <p:nvSpPr>
+          <p:cNvPr id="2" name="Title 1"/>
+          <p:cNvSpPr>
+            <a:spLocks noGrp="1"/>
+          </p:cNvSpPr>
+          <p:nvPr>
+            <p:ph type="title"/>
+          </p:nvPr>
+        </p:nvSpPr>
+        <p:spPr/>
+        <p:txBody>
+          <a:bodyPr/>
+          <a:lstStyle/>
+          <a:p>
+            <a:r>
+              <a:rPr sz="3200" b="1">
+                <a:solidFill>
+                  <a:srgbClr val="1A3C6C"/>
+                </a:solidFill>
+                <a:latin typeface="Calibri"/>
+              </a:rPr>
+              <a:t>Twelve-Factor Apps - the Portability Contract</a:t>
+            </a:r>
+          </a:p>
+        </p:txBody>
+      </p:sp>
+      <p:sp>
+        <p:nvSpPr>
+          <p:cNvPr id="3" name="Content Placeholder 2"/>
+          <p:cNvSpPr>
+            <a:spLocks noGrp="1"/>
+          </p:cNvSpPr>
+          <p:nvPr>
+            <p:ph idx="1"/>
+          </p:nvPr>
+        </p:nvSpPr>
+        <p:spPr/>
+        <p:txBody>
+          <a:bodyPr/>
+          <a:lstStyle/>
+          <a:p>
+            <a:pPr>
+              <a:defRPr sz="1900">
+                <a:solidFill>
+                  <a:srgbClr val="333333"/>
+                </a:solidFill>
+                <a:latin typeface="Calibri"/>
+              </a:defRPr>
+            </a:pPr>
+            <a:r>
+              <a:t>Config in the ENVIRONMENT, never in the artifact - one image runs everywhere.</a:t>
+            </a:r>
+          </a:p>
+          <a:p>
+            <a:pPr>
+              <a:defRPr sz="1900">
+                <a:solidFill>
+                  <a:srgbClr val="333333"/>
+                </a:solidFill>
+                <a:latin typeface="Calibri"/>
+              </a:defRPr>
+            </a:pPr>
+            <a:r>
+              <a:t>Stateless processes: state lives in backing services, so replicas are interchangeable.</a:t>
+            </a:r>
+          </a:p>
+          <a:p>
+            <a:pPr>
+              <a:defRPr sz="1900">
+                <a:solidFill>
+                  <a:srgbClr val="333333"/>
+                </a:solidFill>
+                <a:latin typeface="Calibri"/>
+              </a:defRPr>
+            </a:pPr>
+            <a:r>
+              <a:t>Logs to stdout as event streams - the platform aggregates, the app does not manage files.</a:t>
+            </a:r>
+          </a:p>
+          <a:p>
+            <a:pPr>
+              <a:defRPr sz="1900">
+                <a:solidFill>
+                  <a:srgbClr val="333333"/>
+                </a:solidFill>
+                <a:latin typeface="Calibri"/>
+              </a:defRPr>
+            </a:pPr>
+            <a:r>
+              <a:t>Fast startup, graceful shutdown - disposability is what makes orchestration possible.</a:t>
+            </a:r>
+          </a:p>
+          <a:p>
+            <a:pPr>
+              <a:defRPr sz="1900">
+                <a:solidFill>
+                  <a:srgbClr val="333333"/>
+                </a:solidFill>
+                <a:latin typeface="Calibri"/>
+              </a:defRPr>
+            </a:pPr>
+            <a:r>
+              <a:t>Dev/prod parity: the same artifact and shape from laptop to production.</a:t>
+            </a:r>
+          </a:p>
+        </p:txBody>
+      </p:sp>
+    </p:spTree>
+  </p:cSld>
+  <p:clrMapOvr>
+    <a:masterClrMapping/>
+  </p:clrMapOvr>
+</p:sld>
+</file>
+
+<file path=ppt/slides/slide6.xml><?xml version="1.0" encoding="utf-8"?>
+<p:sld xmlns:a="http://schemas.openxmlformats.org/drawingml/2006/main" xmlns:p="http://schemas.openxmlformats.org/presentationml/2006/main" xmlns:r="http://schemas.openxmlformats.org/officeDocument/2006/relationships">
+  <p:cSld>
+    <p:spTree>
+      <p:nvGrpSpPr>
+        <p:cNvPr id="1" name=""/>
+        <p:cNvGrpSpPr/>
+        <p:nvPr/>
+      </p:nvGrpSpPr>
+      <p:grpSpPr/>
+      <p:sp>
+        <p:nvSpPr>
+          <p:cNvPr id="2" name="Title 1"/>
+          <p:cNvSpPr>
+            <a:spLocks noGrp="1"/>
+          </p:cNvSpPr>
+          <p:nvPr>
+            <p:ph type="title"/>
+          </p:nvPr>
+        </p:nvSpPr>
+        <p:spPr/>
+        <p:txBody>
+          <a:bodyPr/>
+          <a:lstStyle/>
+          <a:p>
+            <a:r>
+              <a:rPr sz="3200" b="1">
+                <a:solidFill>
+                  <a:srgbClr val="1A3C6C"/>
+                </a:solidFill>
+                <a:latin typeface="Calibri"/>
+              </a:rPr>
+              <a:t>What a Container Actually Is</a:t>
+            </a:r>
+          </a:p>
+        </p:txBody>
+      </p:sp>
+      <p:sp>
+        <p:nvSpPr>
+          <p:cNvPr id="3" name="Content Placeholder 2"/>
+          <p:cNvSpPr>
+            <a:spLocks noGrp="1"/>
+          </p:cNvSpPr>
+          <p:nvPr>
+            <p:ph idx="1"/>
+          </p:nvPr>
+        </p:nvSpPr>
+        <p:spPr/>
+        <p:txBody>
+          <a:bodyPr/>
+          <a:lstStyle/>
+          <a:p>
+            <a:pPr>
+              <a:defRPr sz="1900">
+                <a:solidFill>
+                  <a:srgbClr val="333333"/>
+                </a:solidFill>
+                <a:latin typeface="Calibri"/>
+              </a:defRPr>
+            </a:pPr>
+            <a:r>
+              <a:t>NOT a VM: no guest OS - processes on the host kernel, isolated by namespaces + cgroups.</a:t>
+            </a:r>
+          </a:p>
+          <a:p>
+            <a:pPr>
+              <a:defRPr sz="1900">
+                <a:solidFill>
+                  <a:srgbClr val="333333"/>
+                </a:solidFill>
+                <a:latin typeface="Calibri"/>
+              </a:defRPr>
+            </a:pPr>
+            <a:r>
+              <a:t>Namespaces = what you can SEE (processes, network, filesystem); cgroups = what you can USE.</a:t>
+            </a:r>
+          </a:p>
+          <a:p>
+            <a:pPr>
+              <a:defRPr sz="1900">
+                <a:solidFill>
+                  <a:srgbClr val="333333"/>
+                </a:solidFill>
+                <a:latin typeface="Calibri"/>
+              </a:defRPr>
+            </a:pPr>
+            <a:r>
+              <a:t>An image is a stack of immutable layers + metadata (OCI standard); a container is a running instance.</a:t>
+            </a:r>
+          </a:p>
+          <a:p>
+            <a:pPr>
+              <a:defRPr sz="1900">
+                <a:solidFill>
+                  <a:srgbClr val="333333"/>
+                </a:solidFill>
+                <a:latin typeface="Calibri"/>
+              </a:defRPr>
+            </a:pPr>
+            <a:r>
+              <a:t>Layers are content-addressed and shared - 50 services on one base image store it once.</a:t>
+            </a:r>
+          </a:p>
+          <a:p>
+            <a:pPr>
+              <a:defRPr sz="1900">
+                <a:solidFill>
+                  <a:srgbClr val="333333"/>
+                </a:solidFill>
+                <a:latin typeface="Calibri"/>
+              </a:defRPr>
+            </a:pPr>
+            <a:r>
+              <a:t>Registries distribute images by digest: the SHA is the identity, tags are mutable pointers.</a:t>
+            </a:r>
+          </a:p>
+        </p:txBody>
+      </p:sp>
+    </p:spTree>
+  </p:cSld>
+  <p:clrMapOvr>
+    <a:masterClrMapping/>
+  </p:clrMapOvr>
+</p:sld>
+</file>
+
+<file path=ppt/slides/slide7.xml><?xml version="1.0" encoding="utf-8"?>
+<p:sld xmlns:a="http://schemas.openxmlformats.org/drawingml/2006/main" xmlns:p="http://schemas.openxmlformats.org/presentationml/2006/main" xmlns:r="http://schemas.openxmlformats.org/officeDocument/2006/relationships">
+  <p:cSld>
+    <p:spTree>
+      <p:nvGrpSpPr>
+        <p:cNvPr id="1" name=""/>
+        <p:cNvGrpSpPr/>
+        <p:nvPr/>
+      </p:nvGrpSpPr>
+      <p:grpSpPr/>
+      <p:sp>
+        <p:nvSpPr>
+          <p:cNvPr id="2" name="Title 1"/>
+          <p:cNvSpPr>
+            <a:spLocks noGrp="1"/>
+          </p:cNvSpPr>
+          <p:nvPr>
+            <p:ph type="title"/>
+          </p:nvPr>
+        </p:nvSpPr>
+        <p:spPr/>
+        <p:txBody>
+          <a:bodyPr/>
+          <a:lstStyle/>
+          <a:p>
+            <a:r>
+              <a:rPr sz="3200" b="1">
+                <a:solidFill>
+                  <a:srgbClr val="1A3C6C"/>
+                </a:solidFill>
+                <a:latin typeface="Calibri"/>
+              </a:rPr>
+              <a:t>Building Good Images</a:t>
+            </a:r>
+          </a:p>
+        </p:txBody>
+      </p:sp>
+      <p:sp>
+        <p:nvSpPr>
+          <p:cNvPr id="3" name="Content Placeholder 2"/>
+          <p:cNvSpPr>
+            <a:spLocks noGrp="1"/>
+          </p:cNvSpPr>
+          <p:nvPr>
+            <p:ph idx="1"/>
+          </p:nvPr>
+        </p:nvSpPr>
+        <p:spPr/>
+        <p:txBody>
+          <a:bodyPr/>
+          <a:lstStyle/>
+          <a:p>
+            <a:pPr>
+              <a:defRPr sz="1900">
+                <a:solidFill>
+                  <a:srgbClr val="333333"/>
+                </a:solidFill>
+                <a:latin typeface="Calibri"/>
+              </a:defRPr>
+            </a:pPr>
+            <a:r>
+              <a:t>Multi-stage builds: compile/install in a builder stage, ship only the runtime slice.</a:t>
+            </a:r>
+          </a:p>
+          <a:p>
+            <a:pPr>
+              <a:defRPr sz="1900">
+                <a:solidFill>
+                  <a:srgbClr val="333333"/>
+                </a:solidFill>
+                <a:latin typeface="Calibri"/>
+              </a:defRPr>
+            </a:pPr>
+            <a:r>
+              <a:t>Run as non-root; smallest sensible base (slim/distroless); pin base versions.</a:t>
+            </a:r>
+          </a:p>
+          <a:p>
+            <a:pPr>
+              <a:defRPr sz="1900">
+                <a:solidFill>
+                  <a:srgbClr val="333333"/>
+                </a:solidFill>
+                <a:latin typeface="Calibri"/>
+              </a:defRPr>
+            </a:pPr>
+            <a:r>
+              <a:t>Order layers for cache: dependency manifest first, source code last.</a:t>
+            </a:r>
+          </a:p>
+          <a:p>
+            <a:pPr>
+              <a:defRPr sz="1900">
+                <a:solidFill>
+                  <a:srgbClr val="333333"/>
+                </a:solidFill>
+                <a:latin typeface="Calibri"/>
+              </a:defRPr>
+            </a:pPr>
+            <a:r>
+              <a:t>HEALTHCHECK + graceful shutdown make the image orchestrator-friendly.</a:t>
+            </a:r>
+          </a:p>
+          <a:p>
+            <a:pPr>
+              <a:defRPr sz="1900">
+                <a:solidFill>
+                  <a:srgbClr val="333333"/>
+                </a:solidFill>
+                <a:latin typeface="Calibri"/>
+              </a:defRPr>
+            </a:pPr>
+            <a:r>
+              <a:t>.dockerignore: the build context is not your whole repository.</a:t>
+            </a:r>
+          </a:p>
+        </p:txBody>
+      </p:sp>
+    </p:spTree>
+  </p:cSld>
+  <p:clrMapOvr>
+    <a:masterClrMapping/>
+  </p:clrMapOvr>
+</p:sld>
+</file>
+
+<file path=ppt/slides/slide8.xml><?xml version="1.0" encoding="utf-8"?>
+<p:sld xmlns:a="http://schemas.openxmlformats.org/drawingml/2006/main" xmlns:p="http://schemas.openxmlformats.org/presentationml/2006/main" xmlns:r="http://schemas.openxmlformats.org/officeDocument/2006/relationships">
+  <p:cSld>
+    <p:spTree>
+      <p:nvGrpSpPr>
+        <p:cNvPr id="1" name=""/>
+        <p:cNvGrpSpPr/>
+        <p:nvPr/>
+      </p:nvGrpSpPr>
+      <p:grpSpPr/>
+      <p:sp>
+        <p:nvSpPr>
+          <p:cNvPr id="2" name="Title 1"/>
+          <p:cNvSpPr>
+            <a:spLocks noGrp="1"/>
+          </p:cNvSpPr>
+          <p:nvPr>
+            <p:ph type="title"/>
+          </p:nvPr>
+        </p:nvSpPr>
+        <p:spPr/>
+        <p:txBody>
+          <a:bodyPr/>
+          <a:lstStyle/>
+          <a:p>
+            <a:r>
+              <a:rPr sz="3200" b="1">
+                <a:solidFill>
+                  <a:srgbClr val="1A3C6C"/>
+                </a:solidFill>
+                <a:latin typeface="Calibri"/>
+              </a:rPr>
+              <a:t>Why Orchestration - What Kubernetes Actually Does</a:t>
+            </a:r>
+          </a:p>
+        </p:txBody>
+      </p:sp>
+      <p:sp>
+        <p:nvSpPr>
+          <p:cNvPr id="3" name="Content Placeholder 2"/>
+          <p:cNvSpPr>
+            <a:spLocks noGrp="1"/>
+          </p:cNvSpPr>
+          <p:nvPr>
+            <p:ph idx="1"/>
+          </p:nvPr>
+        </p:nvSpPr>
+        <p:spPr/>
+        <p:txBody>
+          <a:bodyPr/>
+          <a:lstStyle/>
+          <a:p>
+            <a:pPr>
+              <a:defRPr sz="1900">
+                <a:solidFill>
+                  <a:srgbClr val="333333"/>
+                </a:solidFill>
+                <a:latin typeface="Calibri"/>
+              </a:defRPr>
+            </a:pPr>
+            <a:r>
+              <a:t>One host + docker run does not: reschedule on failure, scale, roll out, load-balance, heal.</a:t>
+            </a:r>
+          </a:p>
+          <a:p>
+            <a:pPr>
+              <a:defRPr sz="1900">
+                <a:solidFill>
+                  <a:srgbClr val="333333"/>
+                </a:solidFill>
+                <a:latin typeface="Calibri"/>
+              </a:defRPr>
+            </a:pPr>
+            <a:r>
+              <a:t>Kubernetes = a RECONCILIATION engine: you declare desired state, controllers converge reality.</a:t>
+            </a:r>
+          </a:p>
+          <a:p>
+            <a:pPr>
+              <a:defRPr sz="1900">
+                <a:solidFill>
+                  <a:srgbClr val="333333"/>
+                </a:solidFill>
+                <a:latin typeface="Calibri"/>
+              </a:defRPr>
+            </a:pPr>
+            <a:r>
+              <a:t>Scheduling: pods placed by resource requests, spread and affinity across nodes.</a:t>
+            </a:r>
+          </a:p>
+          <a:p>
+            <a:pPr>
+              <a:defRPr sz="1900">
+                <a:solidFill>
+                  <a:srgbClr val="333333"/>
+                </a:solidFill>
+                <a:latin typeface="Calibri"/>
+              </a:defRPr>
+            </a:pPr>
+            <a:r>
+              <a:t>Self-healing: failed pods replaced, failed probes remove pods from traffic - automatically.</a:t>
+            </a:r>
+          </a:p>
+          <a:p>
+            <a:pPr>
+              <a:defRPr sz="1900">
+                <a:solidFill>
+                  <a:srgbClr val="333333"/>
+                </a:solidFill>
+                <a:latin typeface="Calibri"/>
+              </a:defRPr>
+            </a:pPr>
+            <a:r>
+              <a:t>The same declarative + converge model as Terraform, applied continuously at runtime.</a:t>
+            </a:r>
+          </a:p>
+        </p:txBody>
+      </p:sp>
+    </p:spTree>
+  </p:cSld>
+  <p:clrMapOvr>
+    <a:masterClrMapping/>
+  </p:clrMapOvr>
+</p:sld>
+</file>
+
+<file path=ppt/slides/slide9.xml><?xml version="1.0" encoding="utf-8"?>
+<p:sld xmlns:a="http://schemas.openxmlformats.org/drawingml/2006/main" xmlns:p="http://schemas.openxmlformats.org/presentationml/2006/main" xmlns:r="http://schemas.openxmlformats.org/officeDocument/2006/relationships">
+  <p:cSld>
+    <p:spTree>
+      <p:nvGrpSpPr>
+        <p:cNvPr id="1" name=""/>
+        <p:cNvGrpSpPr/>
+        <p:nvPr/>
+      </p:nvGrpSpPr>
+      <p:grpSpPr/>
+      <p:sp>
+        <p:nvSpPr>
+          <p:cNvPr id="2" name="Title 1"/>
+          <p:cNvSpPr>
+            <a:spLocks noGrp="1"/>
+          </p:cNvSpPr>
+          <p:nvPr>
+            <p:ph type="title"/>
+          </p:nvPr>
+        </p:nvSpPr>
+        <p:spPr/>
+        <p:txBody>
+          <a:bodyPr/>
+          <a:lstStyle/>
+          <a:p/>
+        </p:txBody>
+      </p:sp>
+      <p:sp>
+        <p:nvSpPr>
+          <p:cNvPr id="3" name="TextBox 2"/>
+          <p:cNvSpPr txBox="1"/>
+          <p:nvPr/>
+        </p:nvSpPr>
+        <p:spPr>
+          <a:xfrm>
+            <a:off x="457200" y="274320"/>
+            <a:ext cx="8229600" cy="731520"/>
+          </a:xfrm>
+          <a:prstGeom prst="rect">
+            <a:avLst/>
+          </a:prstGeom>
+          <a:noFill/>
+        </p:spPr>
+        <p:txBody>
+          <a:bodyPr wrap="none">
+            <a:spAutoFit/>
+          </a:bodyPr>
+          <a:lstStyle/>
+          <a:p>
+            <a:r>
+              <a:rPr sz="3000" b="1">
+                <a:solidFill>
+                  <a:srgbClr val="1A3C6C"/>
+                </a:solidFill>
+                <a:latin typeface="Calibri"/>
+              </a:rPr>
+              <a:t>Kubernetes Architecture</a:t>
+            </a:r>
+          </a:p>
+        </p:txBody>
+      </p:sp>
+      <p:pic>
+        <p:nvPicPr>
+          <p:cNvPr id="4" name="Picture 3" descr="04-kubernetes-architecture.png"/>
+          <p:cNvPicPr>
+            <a:picLocks noChangeAspect="1"/>
+          </p:cNvPicPr>
+          <p:nvPr/>
+        </p:nvPicPr>
+        <p:blipFill>
+          <a:blip r:embed="rId2"/>
+          <a:stretch>
+            <a:fillRect/>
+          </a:stretch>
+        </p:blipFill>
+        <p:spPr>
+          <a:xfrm>
+            <a:off x="914400" y="1097280"/>
+            <a:ext cx="7315200" cy="4507480"/>
+          </a:xfrm>
+          <a:prstGeom prst="rect">
+            <a:avLst/>
+          </a:prstGeom>
+        </p:spPr>
+      </p:pic>
+      <p:sp>
+        <p:nvSpPr>
+          <p:cNvPr id="5" name="TextBox 4"/>
+          <p:cNvSpPr txBox="1"/>
+          <p:nvPr/>
+        </p:nvSpPr>
+        <p:spPr>
+          <a:xfrm>
+            <a:off x="457200" y="5943600"/>
+            <a:ext cx="8229600" cy="731520"/>
+          </a:xfrm>
+          <a:prstGeom prst="rect">
+            <a:avLst/>
+          </a:prstGeom>
+          <a:noFill/>
+        </p:spPr>
+        <p:txBody>
+          <a:bodyPr wrap="none">
+            <a:spAutoFit/>
+          </a:bodyPr>
+          <a:lstStyle/>
+          <a:p>
+            <a:pPr algn="ctr"/>
+            <a:r>
+              <a:rPr sz="1600" b="0">
+                <a:solidFill>
+                  <a:srgbClr val="333333"/>
+                </a:solidFill>
+                <a:latin typeface="Calibri"/>
+              </a:rPr>
+              <a:t>Control plane decides; workers run; everything talks to the API server.</a:t>
             </a:r>
           </a:p>
         </p:txBody>

--- a/slides/DevOps-PlatformEngineering-Day2.pptx
+++ b/slides/DevOps-PlatformEngineering-Day2.pptx
@@ -1400,7 +1400,7 @@
           <a:lstStyle/>
           <a:p>
             <a:r>
-              <a:t>Set expectations before the first workshop: these three blocks are where theory becomes muscle memory, and they use one continuous application so context never resets. Workshop 1 realises Module 5: participants copy the CI workflow into place, read it critically (job graph, permissions, pinned actions, the report-vs-gate Trivy pair), trigger it from a real pull request (or act locally), and watch it go green - Day 1 ends with a working pipeline, which matters emotionally as much as technically. Workshop 2 realises Module 6 end-to-end: build the image and inspect its layers, compose the two-service stack and watch service discovery work, then kind-deploy with probes and limits, scale, roll forward, roll back - the complete container journey in one morning. Workshop 3 realises Module 4: the full Terraform loop against local Docker including the drift experiment, plus the Ansible idempotence bonus - and the explicit read-through of what changes for cloud (one provider block). Timing guidance for the instructor: each workshop guide (workshops/ folder) marks a core path sized to fit the slot and stretch parts for fast finishers; insist on the verification checklists - done means checked, not time elapsed.</a:t>
+              <a:t>Set expectations before the first workshop: these three blocks are where theory becomes muscle memory, and they use one continuous application so context never resets. Workshop 1 realises Module 5: participants copy the CI workflow into place, read it critically (job graph, permissions, pinned actions, the report-vs-gate Trivy pair), run it locally with act (act -l, then job by job, then the whole graph), deliberately make the security gate fail and restore it, and watch it go green - Day 1 ends with a working pipeline on every participant's VM, which matters emotionally as much as technically. Pushing it to GitHub is an optional extra part for anyone with an account. Workshop 2 realises Module 6 end-to-end: build the image and inspect its layers, compose the two-service stack and watch service discovery work, then kind-deploy with probes and limits, scale, roll forward, roll back - the complete container journey in one morning. Workshop 3 realises Module 4: the full Terraform loop against local Docker including the drift experiment, plus the Ansible idempotence bonus - and the explicit read-through of what changes for cloud (one provider block). Timing guidance for the instructor: each workshop guide (workshops/ folder) marks a core path sized to fit the slot and stretch parts for fast finishers; insist on the verification checklists - done means checked, not time elapsed.</a:t>
             </a:r>
           </a:p>
         </p:txBody>

--- a/slides/DevOps-PlatformEngineering-Day2.pptx
+++ b/slides/DevOps-PlatformEngineering-Day2.pptx
@@ -14798,7 +14798,7 @@
         </p:nvSpPr>
         <p:spPr>
           <a:xfrm>
-            <a:off x="457200" y="274320"/>
+            <a:off x="457200" y="256032"/>
             <a:ext cx="8229600" cy="731520"/>
           </a:xfrm>
           <a:prstGeom prst="rect">
@@ -14807,7 +14807,7 @@
           <a:noFill/>
         </p:spPr>
         <p:txBody>
-          <a:bodyPr wrap="none">
+          <a:bodyPr wrap="square">
             <a:spAutoFit/>
           </a:bodyPr>
           <a:lstStyle/>
@@ -15875,7 +15875,7 @@
         </p:nvSpPr>
         <p:spPr>
           <a:xfrm>
-            <a:off x="457200" y="274320"/>
+            <a:off x="457200" y="256032"/>
             <a:ext cx="8229600" cy="731520"/>
           </a:xfrm>
           <a:prstGeom prst="rect">
@@ -15884,7 +15884,7 @@
           <a:noFill/>
         </p:spPr>
         <p:txBody>
-          <a:bodyPr wrap="none">
+          <a:bodyPr wrap="square">
             <a:spAutoFit/>
           </a:bodyPr>
           <a:lstStyle/>
@@ -16266,7 +16266,7 @@
         </p:nvSpPr>
         <p:spPr>
           <a:xfrm>
-            <a:off x="457200" y="274320"/>
+            <a:off x="457200" y="256032"/>
             <a:ext cx="8229600" cy="731520"/>
           </a:xfrm>
           <a:prstGeom prst="rect">
@@ -16275,7 +16275,7 @@
           <a:noFill/>
         </p:spPr>
         <p:txBody>
-          <a:bodyPr wrap="none">
+          <a:bodyPr wrap="square">
             <a:spAutoFit/>
           </a:bodyPr>
           <a:lstStyle/>
@@ -16765,7 +16765,7 @@
         </p:nvSpPr>
         <p:spPr>
           <a:xfrm>
-            <a:off x="457200" y="274320"/>
+            <a:off x="457200" y="256032"/>
             <a:ext cx="8229600" cy="731520"/>
           </a:xfrm>
           <a:prstGeom prst="rect">
@@ -16774,7 +16774,7 @@
           <a:noFill/>
         </p:spPr>
         <p:txBody>
-          <a:bodyPr wrap="none">
+          <a:bodyPr wrap="square">
             <a:spAutoFit/>
           </a:bodyPr>
           <a:lstStyle/>
@@ -18495,7 +18495,7 @@
         </p:nvSpPr>
         <p:spPr>
           <a:xfrm>
-            <a:off x="457200" y="274320"/>
+            <a:off x="457200" y="256032"/>
             <a:ext cx="8229600" cy="731520"/>
           </a:xfrm>
           <a:prstGeom prst="rect">
@@ -18504,7 +18504,7 @@
           <a:noFill/>
         </p:spPr>
         <p:txBody>
-          <a:bodyPr wrap="none">
+          <a:bodyPr wrap="square">
             <a:spAutoFit/>
           </a:bodyPr>
           <a:lstStyle/>
@@ -19292,7 +19292,7 @@
         </p:nvSpPr>
         <p:spPr>
           <a:xfrm>
-            <a:off x="457200" y="274320"/>
+            <a:off x="457200" y="256032"/>
             <a:ext cx="8229600" cy="731520"/>
           </a:xfrm>
           <a:prstGeom prst="rect">
@@ -19301,7 +19301,7 @@
           <a:noFill/>
         </p:spPr>
         <p:txBody>
-          <a:bodyPr wrap="none">
+          <a:bodyPr wrap="square">
             <a:spAutoFit/>
           </a:bodyPr>
           <a:lstStyle/>
@@ -19683,7 +19683,7 @@
         </p:nvSpPr>
         <p:spPr>
           <a:xfrm>
-            <a:off x="457200" y="274320"/>
+            <a:off x="457200" y="256032"/>
             <a:ext cx="8229600" cy="731520"/>
           </a:xfrm>
           <a:prstGeom prst="rect">
@@ -19692,7 +19692,7 @@
           <a:noFill/>
         </p:spPr>
         <p:txBody>
-          <a:bodyPr wrap="none">
+          <a:bodyPr wrap="square">
             <a:spAutoFit/>
           </a:bodyPr>
           <a:lstStyle/>
@@ -21209,7 +21209,7 @@
         </p:nvSpPr>
         <p:spPr>
           <a:xfrm>
-            <a:off x="457200" y="274320"/>
+            <a:off x="457200" y="256032"/>
             <a:ext cx="8229600" cy="731520"/>
           </a:xfrm>
           <a:prstGeom prst="rect">
@@ -21218,7 +21218,7 @@
           <a:noFill/>
         </p:spPr>
         <p:txBody>
-          <a:bodyPr wrap="none">
+          <a:bodyPr wrap="square">
             <a:spAutoFit/>
           </a:bodyPr>
           <a:lstStyle/>
@@ -23024,7 +23024,7 @@
         </p:nvSpPr>
         <p:spPr>
           <a:xfrm>
-            <a:off x="457200" y="274320"/>
+            <a:off x="457200" y="256032"/>
             <a:ext cx="8229600" cy="731520"/>
           </a:xfrm>
           <a:prstGeom prst="rect">
@@ -23033,7 +23033,7 @@
           <a:noFill/>
         </p:spPr>
         <p:txBody>
-          <a:bodyPr wrap="none">
+          <a:bodyPr wrap="square">
             <a:spAutoFit/>
           </a:bodyPr>
           <a:lstStyle/>
@@ -25034,7 +25034,7 @@
         </p:nvSpPr>
         <p:spPr>
           <a:xfrm>
-            <a:off x="457200" y="274320"/>
+            <a:off x="457200" y="256032"/>
             <a:ext cx="8229600" cy="731520"/>
           </a:xfrm>
           <a:prstGeom prst="rect">
@@ -25043,7 +25043,7 @@
           <a:noFill/>
         </p:spPr>
         <p:txBody>
-          <a:bodyPr wrap="none">
+          <a:bodyPr wrap="square">
             <a:spAutoFit/>
           </a:bodyPr>
           <a:lstStyle/>
@@ -26810,7 +26810,7 @@
         </p:nvSpPr>
         <p:spPr>
           <a:xfrm>
-            <a:off x="457200" y="274320"/>
+            <a:off x="457200" y="256032"/>
             <a:ext cx="8229600" cy="731520"/>
           </a:xfrm>
           <a:prstGeom prst="rect">
@@ -26819,7 +26819,7 @@
           <a:noFill/>
         </p:spPr>
         <p:txBody>
-          <a:bodyPr wrap="none">
+          <a:bodyPr wrap="square">
             <a:spAutoFit/>
           </a:bodyPr>
           <a:lstStyle/>
@@ -27481,7 +27481,7 @@
         </p:nvSpPr>
         <p:spPr>
           <a:xfrm>
-            <a:off x="457200" y="274320"/>
+            <a:off x="457200" y="256032"/>
             <a:ext cx="8229600" cy="731520"/>
           </a:xfrm>
           <a:prstGeom prst="rect">
@@ -27490,7 +27490,7 @@
           <a:noFill/>
         </p:spPr>
         <p:txBody>
-          <a:bodyPr wrap="none">
+          <a:bodyPr wrap="square">
             <a:spAutoFit/>
           </a:bodyPr>
           <a:lstStyle/>
@@ -29137,7 +29137,7 @@
         </p:nvSpPr>
         <p:spPr>
           <a:xfrm>
-            <a:off x="457200" y="274320"/>
+            <a:off x="457200" y="256032"/>
             <a:ext cx="8229600" cy="731520"/>
           </a:xfrm>
           <a:prstGeom prst="rect">
@@ -29146,13 +29146,13 @@
           <a:noFill/>
         </p:spPr>
         <p:txBody>
-          <a:bodyPr wrap="none">
+          <a:bodyPr wrap="square">
             <a:spAutoFit/>
           </a:bodyPr>
           <a:lstStyle/>
           <a:p>
             <a:r>
-              <a:rPr sz="3000" b="1">
+              <a:rPr sz="2600" b="1">
                 <a:solidFill>
                   <a:srgbClr val="1A3C6C"/>
                 </a:solidFill>
@@ -31138,7 +31138,7 @@
         </p:nvSpPr>
         <p:spPr>
           <a:xfrm>
-            <a:off x="457200" y="274320"/>
+            <a:off x="457200" y="256032"/>
             <a:ext cx="8229600" cy="731520"/>
           </a:xfrm>
           <a:prstGeom prst="rect">
@@ -31147,7 +31147,7 @@
           <a:noFill/>
         </p:spPr>
         <p:txBody>
-          <a:bodyPr wrap="none">
+          <a:bodyPr wrap="square">
             <a:spAutoFit/>
           </a:bodyPr>
           <a:lstStyle/>
@@ -31249,7 +31249,7 @@
         </p:nvSpPr>
         <p:spPr>
           <a:xfrm>
-            <a:off x="457200" y="274320"/>
+            <a:off x="457200" y="256032"/>
             <a:ext cx="8229600" cy="731520"/>
           </a:xfrm>
           <a:prstGeom prst="rect">
@@ -31258,7 +31258,7 @@
           <a:noFill/>
         </p:spPr>
         <p:txBody>
-          <a:bodyPr wrap="none">
+          <a:bodyPr wrap="square">
             <a:spAutoFit/>
           </a:bodyPr>
           <a:lstStyle/>
@@ -32111,7 +32111,7 @@
         </p:nvSpPr>
         <p:spPr>
           <a:xfrm>
-            <a:off x="457200" y="274320"/>
+            <a:off x="457200" y="256032"/>
             <a:ext cx="8229600" cy="731520"/>
           </a:xfrm>
           <a:prstGeom prst="rect">
@@ -32120,7 +32120,7 @@
           <a:noFill/>
         </p:spPr>
         <p:txBody>
-          <a:bodyPr wrap="none">
+          <a:bodyPr wrap="square">
             <a:spAutoFit/>
           </a:bodyPr>
           <a:lstStyle/>
@@ -32908,7 +32908,7 @@
         </p:nvSpPr>
         <p:spPr>
           <a:xfrm>
-            <a:off x="457200" y="274320"/>
+            <a:off x="457200" y="256032"/>
             <a:ext cx="8229600" cy="731520"/>
           </a:xfrm>
           <a:prstGeom prst="rect">
@@ -32917,7 +32917,7 @@
           <a:noFill/>
         </p:spPr>
         <p:txBody>
-          <a:bodyPr wrap="none">
+          <a:bodyPr wrap="square">
             <a:spAutoFit/>
           </a:bodyPr>
           <a:lstStyle/>
@@ -35191,7 +35191,7 @@
         </p:nvSpPr>
         <p:spPr>
           <a:xfrm>
-            <a:off x="457200" y="274320"/>
+            <a:off x="457200" y="256032"/>
             <a:ext cx="8229600" cy="731520"/>
           </a:xfrm>
           <a:prstGeom prst="rect">
@@ -35200,13 +35200,13 @@
           <a:noFill/>
         </p:spPr>
         <p:txBody>
-          <a:bodyPr wrap="none">
+          <a:bodyPr wrap="square">
             <a:spAutoFit/>
           </a:bodyPr>
           <a:lstStyle/>
           <a:p>
             <a:r>
-              <a:rPr sz="3000" b="1">
+              <a:rPr sz="2600" b="1">
                 <a:solidFill>
                   <a:srgbClr val="1A3C6C"/>
                 </a:solidFill>
@@ -36191,7 +36191,7 @@
         </p:nvSpPr>
         <p:spPr>
           <a:xfrm>
-            <a:off x="457200" y="274320"/>
+            <a:off x="457200" y="256032"/>
             <a:ext cx="8229600" cy="731520"/>
           </a:xfrm>
           <a:prstGeom prst="rect">
@@ -36200,7 +36200,7 @@
           <a:noFill/>
         </p:spPr>
         <p:txBody>
-          <a:bodyPr wrap="none">
+          <a:bodyPr wrap="square">
             <a:spAutoFit/>
           </a:bodyPr>
           <a:lstStyle/>
@@ -37281,7 +37281,7 @@
         </p:nvSpPr>
         <p:spPr>
           <a:xfrm>
-            <a:off x="457200" y="274320"/>
+            <a:off x="457200" y="256032"/>
             <a:ext cx="8229600" cy="731520"/>
           </a:xfrm>
           <a:prstGeom prst="rect">
@@ -37290,7 +37290,7 @@
           <a:noFill/>
         </p:spPr>
         <p:txBody>
-          <a:bodyPr wrap="none">
+          <a:bodyPr wrap="square">
             <a:spAutoFit/>
           </a:bodyPr>
           <a:lstStyle/>
@@ -39330,7 +39330,7 @@
         </p:nvSpPr>
         <p:spPr>
           <a:xfrm>
-            <a:off x="457200" y="274320"/>
+            <a:off x="457200" y="256032"/>
             <a:ext cx="8229600" cy="731520"/>
           </a:xfrm>
           <a:prstGeom prst="rect">
@@ -39339,7 +39339,7 @@
           <a:noFill/>
         </p:spPr>
         <p:txBody>
-          <a:bodyPr wrap="none">
+          <a:bodyPr wrap="square">
             <a:spAutoFit/>
           </a:bodyPr>
           <a:lstStyle/>
@@ -41188,7 +41188,7 @@
         </p:nvSpPr>
         <p:spPr>
           <a:xfrm>
-            <a:off x="457200" y="274320"/>
+            <a:off x="457200" y="256032"/>
             <a:ext cx="8229600" cy="731520"/>
           </a:xfrm>
           <a:prstGeom prst="rect">
@@ -41197,7 +41197,7 @@
           <a:noFill/>
         </p:spPr>
         <p:txBody>
-          <a:bodyPr wrap="none">
+          <a:bodyPr wrap="square">
             <a:spAutoFit/>
           </a:bodyPr>
           <a:lstStyle/>
@@ -42755,7 +42755,7 @@
         </p:nvSpPr>
         <p:spPr>
           <a:xfrm>
-            <a:off x="457200" y="274320"/>
+            <a:off x="457200" y="256032"/>
             <a:ext cx="8229600" cy="731520"/>
           </a:xfrm>
           <a:prstGeom prst="rect">
@@ -42764,13 +42764,13 @@
           <a:noFill/>
         </p:spPr>
         <p:txBody>
-          <a:bodyPr wrap="none">
+          <a:bodyPr wrap="square">
             <a:spAutoFit/>
           </a:bodyPr>
           <a:lstStyle/>
           <a:p>
             <a:r>
-              <a:rPr sz="3000" b="1">
+              <a:rPr sz="2300" b="1">
                 <a:solidFill>
                   <a:srgbClr val="1A3C6C"/>
                 </a:solidFill>
@@ -43439,7 +43439,7 @@
         </p:nvSpPr>
         <p:spPr>
           <a:xfrm>
-            <a:off x="457200" y="274320"/>
+            <a:off x="457200" y="256032"/>
             <a:ext cx="8229600" cy="731520"/>
           </a:xfrm>
           <a:prstGeom prst="rect">
@@ -43448,7 +43448,7 @@
           <a:noFill/>
         </p:spPr>
         <p:txBody>
-          <a:bodyPr wrap="none">
+          <a:bodyPr wrap="square">
             <a:spAutoFit/>
           </a:bodyPr>
           <a:lstStyle/>
@@ -45069,7 +45069,7 @@
         </p:nvSpPr>
         <p:spPr>
           <a:xfrm>
-            <a:off x="457200" y="274320"/>
+            <a:off x="457200" y="256032"/>
             <a:ext cx="8229600" cy="731520"/>
           </a:xfrm>
           <a:prstGeom prst="rect">
@@ -45078,7 +45078,7 @@
           <a:noFill/>
         </p:spPr>
         <p:txBody>
-          <a:bodyPr wrap="none">
+          <a:bodyPr wrap="square">
             <a:spAutoFit/>
           </a:bodyPr>
           <a:lstStyle/>
@@ -46656,7 +46656,7 @@
         </p:nvSpPr>
         <p:spPr>
           <a:xfrm>
-            <a:off x="457200" y="274320"/>
+            <a:off x="457200" y="256032"/>
             <a:ext cx="8229600" cy="731520"/>
           </a:xfrm>
           <a:prstGeom prst="rect">
@@ -46665,7 +46665,7 @@
           <a:noFill/>
         </p:spPr>
         <p:txBody>
-          <a:bodyPr wrap="none">
+          <a:bodyPr wrap="square">
             <a:spAutoFit/>
           </a:bodyPr>
           <a:lstStyle/>
@@ -47518,7 +47518,7 @@
         </p:nvSpPr>
         <p:spPr>
           <a:xfrm>
-            <a:off x="457200" y="274320"/>
+            <a:off x="457200" y="256032"/>
             <a:ext cx="8229600" cy="731520"/>
           </a:xfrm>
           <a:prstGeom prst="rect">
@@ -47527,7 +47527,7 @@
           <a:noFill/>
         </p:spPr>
         <p:txBody>
-          <a:bodyPr wrap="none">
+          <a:bodyPr wrap="square">
             <a:spAutoFit/>
           </a:bodyPr>
           <a:lstStyle/>
@@ -49439,7 +49439,7 @@
         </p:nvSpPr>
         <p:spPr>
           <a:xfrm>
-            <a:off x="457200" y="274320"/>
+            <a:off x="457200" y="256032"/>
             <a:ext cx="8229600" cy="731520"/>
           </a:xfrm>
           <a:prstGeom prst="rect">
@@ -49448,7 +49448,7 @@
           <a:noFill/>
         </p:spPr>
         <p:txBody>
-          <a:bodyPr wrap="none">
+          <a:bodyPr wrap="square">
             <a:spAutoFit/>
           </a:bodyPr>
           <a:lstStyle/>

--- a/slides/DevOps-PlatformEngineering-Day2.pptx
+++ b/slides/DevOps-PlatformEngineering-Day2.pptx
@@ -30361,7 +30361,7 @@
               </a:defRPr>
             </a:pPr>
             <a:r>
-              <a:t># ~180 MB, far fewer CVEs, no secrets, non-root, rebuilds in seconds</a:t>
+              <a:t># far smaller (a fraction of the original), fewer CVEs, no secrets, non-root,</a:t>
             </a:r>
           </a:p>
           <a:p>
@@ -30374,7 +30374,7 @@
               </a:defRPr>
             </a:pPr>
             <a:r>
-              <a:t># when only application code changed.</a:t>
+              <a:t># and it rebuilds in seconds when only application code changed.</a:t>
             </a:r>
           </a:p>
         </p:txBody>
